--- a/contenus/deck-webinaire/Pack-2-structure-et-conclusion.pptx
+++ b/contenus/deck-webinaire/Pack-2-structure-et-conclusion.pptx
@@ -29,6 +29,16 @@
     <p:sldId id="277" r:id="rId29"/>
     <p:sldId id="278" r:id="rId30"/>
     <p:sldId id="279" r:id="rId31"/>
+    <p:sldId id="280" r:id="rId32"/>
+    <p:sldId id="281" r:id="rId33"/>
+    <p:sldId id="282" r:id="rId34"/>
+    <p:sldId id="283" r:id="rId35"/>
+    <p:sldId id="284" r:id="rId36"/>
+    <p:sldId id="285" r:id="rId37"/>
+    <p:sldId id="286" r:id="rId38"/>
+    <p:sldId id="287" r:id="rId39"/>
+    <p:sldId id="288" r:id="rId40"/>
+    <p:sldId id="289" r:id="rId41"/>
   </p:sldIdLst>
   <p:sldSz cx="12192000" cy="6858000" type="screen4x3"/>
   <p:notesSz cx="6858000" cy="9144000"/>
@@ -525,7 +535,7 @@
           <a:lstStyle/>
           <a:p>
             <a:r>
-              <a:t>[01 / 1 · Le plan de la soirée]  → INSÉRER APRÈS ta slide « Et à la fin : un QUIZ », donc juste avant PARTIE 1</a:t>
+              <a:t>CONSIGNE — ne pas conserver cette page dans le deck final.</a:t>
             </a:r>
           </a:p>
         </p:txBody>
@@ -595,7 +605,7 @@
           <a:lstStyle/>
           <a:p>
             <a:r>
-              <a:t>[10 / 3 · Résumé des six axes]  ↑ suite du bloc « 3 · Résumé des six axes »</a:t>
+              <a:t>[05 / 2 · Séparateur partie 3]  → INSÉRER AVANT « CE QUI TE MANQUE N'EST PAS CE QUE TU CROIS » (début du bloc G du pack précédent)</a:t>
             </a:r>
           </a:p>
         </p:txBody>
@@ -665,7 +675,7 @@
           <a:lstStyle/>
           <a:p>
             <a:r>
-              <a:t>[11 / 4 · Et mes outils actuels ?]  → INSÉRER JUSTE APRÈS le résumé des six axes, en ouverture de la partie 3</a:t>
+              <a:t>CONSIGNE — ne pas conserver cette page dans le deck final.</a:t>
             </a:r>
           </a:p>
         </p:txBody>
@@ -735,7 +745,7 @@
           <a:lstStyle/>
           <a:p>
             <a:r>
-              <a:t>[12 / 4 · Et mes outils actuels ?]  ↑ suite du bloc « 4 · Et mes outils actuels ? »</a:t>
+              <a:t>[06 / 2 · Séparateur partie 4]  → INSÉRER EN REMPLACEMENT de ta slide « PARTIE 3 / LA méthodologie »</a:t>
             </a:r>
           </a:p>
         </p:txBody>
@@ -805,7 +815,7 @@
           <a:lstStyle/>
           <a:p>
             <a:r>
-              <a:t>[13 / 4 · Et mes outils actuels ?]  ↑ suite du bloc « 4 · Et mes outils actuels ? »</a:t>
+              <a:t>CONSIGNE — ne pas conserver cette page dans le deck final.</a:t>
             </a:r>
           </a:p>
         </p:txBody>
@@ -875,7 +885,7 @@
           <a:lstStyle/>
           <a:p>
             <a:r>
-              <a:t>[14 / 4 · Et mes outils actuels ?]  ↑ suite du bloc « 4 · Et mes outils actuels ? »</a:t>
+              <a:t>[07 / 3 · Résumé des six axes]  → INSÉRER À LA FIN DE LA PARTIE 2, après ton dernier axe et AVANT la partie 3</a:t>
             </a:r>
           </a:p>
         </p:txBody>
@@ -945,7 +955,7 @@
           <a:lstStyle/>
           <a:p>
             <a:r>
-              <a:t>[15 / 5 · Ce que tu emportes]  → INSÉRER À LA PLACE de ta séquence « CE QUE TU EMPORTES » actuelle (les trois slides 1️⃣ 2️⃣ 3️⃣)</a:t>
+              <a:t>[08 / 3 · Résumé des six axes]  ↑ suite du bloc « 3 · Résumé des six axes »</a:t>
             </a:r>
           </a:p>
         </p:txBody>
@@ -1015,7 +1025,7 @@
           <a:lstStyle/>
           <a:p>
             <a:r>
-              <a:t>[16 / 5 · Ce que tu emportes]  ↑ suite du bloc « 5 · Ce que tu emportes »</a:t>
+              <a:t>[09 / 3 · Résumé des six axes]  ↑ suite du bloc « 3 · Résumé des six axes »</a:t>
             </a:r>
           </a:p>
         </p:txBody>
@@ -1085,7 +1095,7 @@
           <a:lstStyle/>
           <a:p>
             <a:r>
-              <a:t>[17 / 5 · Ce que tu emportes]  ↑ suite du bloc « 5 · Ce que tu emportes »</a:t>
+              <a:t>[10 / 3 · Résumé des six axes]  ↑ suite du bloc « 3 · Résumé des six axes »</a:t>
             </a:r>
           </a:p>
         </p:txBody>
@@ -1155,7 +1165,7 @@
           <a:lstStyle/>
           <a:p>
             <a:r>
-              <a:t>[18 / 5 · Ce que tu emportes]  ↑ suite du bloc « 5 · Ce que tu emportes »</a:t>
+              <a:t>CONSIGNE — ne pas conserver cette page dans le deck final.</a:t>
             </a:r>
           </a:p>
         </p:txBody>
@@ -1225,7 +1235,7 @@
           <a:lstStyle/>
           <a:p>
             <a:r>
-              <a:t>[19 / 5 · Ce que tu emportes]  ↑ suite du bloc « 5 · Ce que tu emportes »</a:t>
+              <a:t>[11 / 4 · Et mes outils actuels ?]  → INSÉRER JUSTE APRÈS le résumé des six axes, en ouverture de la partie 3</a:t>
             </a:r>
           </a:p>
         </p:txBody>
@@ -1295,7 +1305,7 @@
           <a:lstStyle/>
           <a:p>
             <a:r>
-              <a:t>[02 / 1 · Le plan de la soirée]  ↑ suite du bloc « 1 · Le plan de la soirée »</a:t>
+              <a:t>CONSIGNE — ne pas conserver cette page dans le deck final.</a:t>
             </a:r>
           </a:p>
         </p:txBody>
@@ -1365,7 +1375,7 @@
           <a:lstStyle/>
           <a:p>
             <a:r>
-              <a:t>[20 / 6 · Soyons honnêtes]  → INSÉRER APRÈS « CE QUE TU EMPORTES », avant le quiz</a:t>
+              <a:t>[12 / 4 · Et mes outils actuels ?]  ↑ suite du bloc « 4 · Et mes outils actuels ? »</a:t>
             </a:r>
           </a:p>
         </p:txBody>
@@ -1435,7 +1445,7 @@
           <a:lstStyle/>
           <a:p>
             <a:r>
-              <a:t>[21 / 6 · Soyons honnêtes]  ↑ suite du bloc « 6 · Soyons honnêtes »</a:t>
+              <a:t>[13 / 4 · Et mes outils actuels ?]  ↑ suite du bloc « 4 · Et mes outils actuels ? »</a:t>
             </a:r>
           </a:p>
         </p:txBody>
@@ -1505,7 +1515,7 @@
           <a:lstStyle/>
           <a:p>
             <a:r>
-              <a:t>[22 / 6 · Soyons honnêtes]  ↑ suite du bloc « 6 · Soyons honnêtes »</a:t>
+              <a:t>[14 / 4 · Et mes outils actuels ?]  ↑ suite du bloc « 4 · Et mes outils actuels ? »</a:t>
             </a:r>
           </a:p>
         </p:txBody>
@@ -1575,7 +1585,7 @@
           <a:lstStyle/>
           <a:p>
             <a:r>
-              <a:t>[23 / 6 · Soyons honnêtes]  ↑ suite du bloc « 6 · Soyons honnêtes »</a:t>
+              <a:t>CONSIGNE — ne pas conserver cette page dans le deck final.</a:t>
             </a:r>
           </a:p>
         </p:txBody>
@@ -1645,7 +1655,357 @@
           <a:lstStyle/>
           <a:p>
             <a:r>
-              <a:t>[24 / 6 · Soyons honnêtes]  ↑ suite du bloc « 6 · Soyons honnêtes »</a:t>
+              <a:t>[15 / 5 · Ce que tu emportes]  → INSÉRER À LA PLACE de ta séquence « CE QUE TU EMPORTES » actuelle (les trois slides 1️⃣ 2️⃣ 3️⃣)</a:t>
+            </a:r>
+          </a:p>
+        </p:txBody>
+      </p:sp>
+      <p:sp>
+        <p:nvSpPr>
+          <p:cNvPr id="4" name="Slide Number Placeholder 3"/>
+          <p:cNvSpPr>
+            <a:spLocks noGrp="1"/>
+          </p:cNvSpPr>
+          <p:nvPr>
+            <p:ph type="sldNum" idx="5" sz="quarter"/>
+          </p:nvPr>
+        </p:nvSpPr>
+        <p:spPr/>
+      </p:sp>
+    </p:spTree>
+  </p:cSld>
+  <p:clrMapOvr>
+    <a:masterClrMapping/>
+  </p:clrMapOvr>
+</p:notes>
+</file>
+
+<file path=ppt/notesSlides/notesSlide25.xml><?xml version="1.0" encoding="utf-8"?>
+<p:notes xmlns:a="http://schemas.openxmlformats.org/drawingml/2006/main" xmlns:p="http://schemas.openxmlformats.org/presentationml/2006/main" xmlns:r="http://schemas.openxmlformats.org/officeDocument/2006/relationships">
+  <p:cSld>
+    <p:spTree>
+      <p:nvGrpSpPr>
+        <p:cNvPr id="1" name=""/>
+        <p:cNvGrpSpPr/>
+        <p:nvPr/>
+      </p:nvGrpSpPr>
+      <p:grpSpPr>
+        <a:xfrm>
+          <a:off x="0" y="0"/>
+          <a:ext cx="0" cy="0"/>
+          <a:chOff x="0" y="0"/>
+          <a:chExt cx="0" cy="0"/>
+        </a:xfrm>
+      </p:grpSpPr>
+      <p:sp>
+        <p:nvSpPr>
+          <p:cNvPr id="2" name="Slide Image Placeholder 1"/>
+          <p:cNvSpPr>
+            <a:spLocks noGrp="1"/>
+          </p:cNvSpPr>
+          <p:nvPr>
+            <p:ph type="sldImg" idx="2"/>
+          </p:nvPr>
+        </p:nvSpPr>
+        <p:spPr/>
+      </p:sp>
+      <p:sp>
+        <p:nvSpPr>
+          <p:cNvPr id="3" name="Notes Placeholder 2"/>
+          <p:cNvSpPr>
+            <a:spLocks noGrp="1"/>
+          </p:cNvSpPr>
+          <p:nvPr>
+            <p:ph type="body" idx="3" sz="quarter"/>
+          </p:nvPr>
+        </p:nvSpPr>
+        <p:spPr/>
+        <p:txBody>
+          <a:bodyPr/>
+          <a:lstStyle/>
+          <a:p>
+            <a:r>
+              <a:t>[16 / 5 · Ce que tu emportes]  ↑ suite du bloc « 5 · Ce que tu emportes »</a:t>
+            </a:r>
+          </a:p>
+        </p:txBody>
+      </p:sp>
+      <p:sp>
+        <p:nvSpPr>
+          <p:cNvPr id="4" name="Slide Number Placeholder 3"/>
+          <p:cNvSpPr>
+            <a:spLocks noGrp="1"/>
+          </p:cNvSpPr>
+          <p:nvPr>
+            <p:ph type="sldNum" idx="5" sz="quarter"/>
+          </p:nvPr>
+        </p:nvSpPr>
+        <p:spPr/>
+      </p:sp>
+    </p:spTree>
+  </p:cSld>
+  <p:clrMapOvr>
+    <a:masterClrMapping/>
+  </p:clrMapOvr>
+</p:notes>
+</file>
+
+<file path=ppt/notesSlides/notesSlide26.xml><?xml version="1.0" encoding="utf-8"?>
+<p:notes xmlns:a="http://schemas.openxmlformats.org/drawingml/2006/main" xmlns:p="http://schemas.openxmlformats.org/presentationml/2006/main" xmlns:r="http://schemas.openxmlformats.org/officeDocument/2006/relationships">
+  <p:cSld>
+    <p:spTree>
+      <p:nvGrpSpPr>
+        <p:cNvPr id="1" name=""/>
+        <p:cNvGrpSpPr/>
+        <p:nvPr/>
+      </p:nvGrpSpPr>
+      <p:grpSpPr>
+        <a:xfrm>
+          <a:off x="0" y="0"/>
+          <a:ext cx="0" cy="0"/>
+          <a:chOff x="0" y="0"/>
+          <a:chExt cx="0" cy="0"/>
+        </a:xfrm>
+      </p:grpSpPr>
+      <p:sp>
+        <p:nvSpPr>
+          <p:cNvPr id="2" name="Slide Image Placeholder 1"/>
+          <p:cNvSpPr>
+            <a:spLocks noGrp="1"/>
+          </p:cNvSpPr>
+          <p:nvPr>
+            <p:ph type="sldImg" idx="2"/>
+          </p:nvPr>
+        </p:nvSpPr>
+        <p:spPr/>
+      </p:sp>
+      <p:sp>
+        <p:nvSpPr>
+          <p:cNvPr id="3" name="Notes Placeholder 2"/>
+          <p:cNvSpPr>
+            <a:spLocks noGrp="1"/>
+          </p:cNvSpPr>
+          <p:nvPr>
+            <p:ph type="body" idx="3" sz="quarter"/>
+          </p:nvPr>
+        </p:nvSpPr>
+        <p:spPr/>
+        <p:txBody>
+          <a:bodyPr/>
+          <a:lstStyle/>
+          <a:p>
+            <a:r>
+              <a:t>[17 / 5 · Ce que tu emportes]  ↑ suite du bloc « 5 · Ce que tu emportes »</a:t>
+            </a:r>
+          </a:p>
+        </p:txBody>
+      </p:sp>
+      <p:sp>
+        <p:nvSpPr>
+          <p:cNvPr id="4" name="Slide Number Placeholder 3"/>
+          <p:cNvSpPr>
+            <a:spLocks noGrp="1"/>
+          </p:cNvSpPr>
+          <p:nvPr>
+            <p:ph type="sldNum" idx="5" sz="quarter"/>
+          </p:nvPr>
+        </p:nvSpPr>
+        <p:spPr/>
+      </p:sp>
+    </p:spTree>
+  </p:cSld>
+  <p:clrMapOvr>
+    <a:masterClrMapping/>
+  </p:clrMapOvr>
+</p:notes>
+</file>
+
+<file path=ppt/notesSlides/notesSlide27.xml><?xml version="1.0" encoding="utf-8"?>
+<p:notes xmlns:a="http://schemas.openxmlformats.org/drawingml/2006/main" xmlns:p="http://schemas.openxmlformats.org/presentationml/2006/main" xmlns:r="http://schemas.openxmlformats.org/officeDocument/2006/relationships">
+  <p:cSld>
+    <p:spTree>
+      <p:nvGrpSpPr>
+        <p:cNvPr id="1" name=""/>
+        <p:cNvGrpSpPr/>
+        <p:nvPr/>
+      </p:nvGrpSpPr>
+      <p:grpSpPr>
+        <a:xfrm>
+          <a:off x="0" y="0"/>
+          <a:ext cx="0" cy="0"/>
+          <a:chOff x="0" y="0"/>
+          <a:chExt cx="0" cy="0"/>
+        </a:xfrm>
+      </p:grpSpPr>
+      <p:sp>
+        <p:nvSpPr>
+          <p:cNvPr id="2" name="Slide Image Placeholder 1"/>
+          <p:cNvSpPr>
+            <a:spLocks noGrp="1"/>
+          </p:cNvSpPr>
+          <p:nvPr>
+            <p:ph type="sldImg" idx="2"/>
+          </p:nvPr>
+        </p:nvSpPr>
+        <p:spPr/>
+      </p:sp>
+      <p:sp>
+        <p:nvSpPr>
+          <p:cNvPr id="3" name="Notes Placeholder 2"/>
+          <p:cNvSpPr>
+            <a:spLocks noGrp="1"/>
+          </p:cNvSpPr>
+          <p:nvPr>
+            <p:ph type="body" idx="3" sz="quarter"/>
+          </p:nvPr>
+        </p:nvSpPr>
+        <p:spPr/>
+        <p:txBody>
+          <a:bodyPr/>
+          <a:lstStyle/>
+          <a:p>
+            <a:r>
+              <a:t>[18 / 5 · Ce que tu emportes]  ↑ suite du bloc « 5 · Ce que tu emportes »</a:t>
+            </a:r>
+          </a:p>
+        </p:txBody>
+      </p:sp>
+      <p:sp>
+        <p:nvSpPr>
+          <p:cNvPr id="4" name="Slide Number Placeholder 3"/>
+          <p:cNvSpPr>
+            <a:spLocks noGrp="1"/>
+          </p:cNvSpPr>
+          <p:nvPr>
+            <p:ph type="sldNum" idx="5" sz="quarter"/>
+          </p:nvPr>
+        </p:nvSpPr>
+        <p:spPr/>
+      </p:sp>
+    </p:spTree>
+  </p:cSld>
+  <p:clrMapOvr>
+    <a:masterClrMapping/>
+  </p:clrMapOvr>
+</p:notes>
+</file>
+
+<file path=ppt/notesSlides/notesSlide28.xml><?xml version="1.0" encoding="utf-8"?>
+<p:notes xmlns:a="http://schemas.openxmlformats.org/drawingml/2006/main" xmlns:p="http://schemas.openxmlformats.org/presentationml/2006/main" xmlns:r="http://schemas.openxmlformats.org/officeDocument/2006/relationships">
+  <p:cSld>
+    <p:spTree>
+      <p:nvGrpSpPr>
+        <p:cNvPr id="1" name=""/>
+        <p:cNvGrpSpPr/>
+        <p:nvPr/>
+      </p:nvGrpSpPr>
+      <p:grpSpPr>
+        <a:xfrm>
+          <a:off x="0" y="0"/>
+          <a:ext cx="0" cy="0"/>
+          <a:chOff x="0" y="0"/>
+          <a:chExt cx="0" cy="0"/>
+        </a:xfrm>
+      </p:grpSpPr>
+      <p:sp>
+        <p:nvSpPr>
+          <p:cNvPr id="2" name="Slide Image Placeholder 1"/>
+          <p:cNvSpPr>
+            <a:spLocks noGrp="1"/>
+          </p:cNvSpPr>
+          <p:nvPr>
+            <p:ph type="sldImg" idx="2"/>
+          </p:nvPr>
+        </p:nvSpPr>
+        <p:spPr/>
+      </p:sp>
+      <p:sp>
+        <p:nvSpPr>
+          <p:cNvPr id="3" name="Notes Placeholder 2"/>
+          <p:cNvSpPr>
+            <a:spLocks noGrp="1"/>
+          </p:cNvSpPr>
+          <p:nvPr>
+            <p:ph type="body" idx="3" sz="quarter"/>
+          </p:nvPr>
+        </p:nvSpPr>
+        <p:spPr/>
+        <p:txBody>
+          <a:bodyPr/>
+          <a:lstStyle/>
+          <a:p>
+            <a:r>
+              <a:t>[19 / 5 · Ce que tu emportes]  ↑ suite du bloc « 5 · Ce que tu emportes »</a:t>
+            </a:r>
+          </a:p>
+        </p:txBody>
+      </p:sp>
+      <p:sp>
+        <p:nvSpPr>
+          <p:cNvPr id="4" name="Slide Number Placeholder 3"/>
+          <p:cNvSpPr>
+            <a:spLocks noGrp="1"/>
+          </p:cNvSpPr>
+          <p:nvPr>
+            <p:ph type="sldNum" idx="5" sz="quarter"/>
+          </p:nvPr>
+        </p:nvSpPr>
+        <p:spPr/>
+      </p:sp>
+    </p:spTree>
+  </p:cSld>
+  <p:clrMapOvr>
+    <a:masterClrMapping/>
+  </p:clrMapOvr>
+</p:notes>
+</file>
+
+<file path=ppt/notesSlides/notesSlide29.xml><?xml version="1.0" encoding="utf-8"?>
+<p:notes xmlns:a="http://schemas.openxmlformats.org/drawingml/2006/main" xmlns:p="http://schemas.openxmlformats.org/presentationml/2006/main" xmlns:r="http://schemas.openxmlformats.org/officeDocument/2006/relationships">
+  <p:cSld>
+    <p:spTree>
+      <p:nvGrpSpPr>
+        <p:cNvPr id="1" name=""/>
+        <p:cNvGrpSpPr/>
+        <p:nvPr/>
+      </p:nvGrpSpPr>
+      <p:grpSpPr>
+        <a:xfrm>
+          <a:off x="0" y="0"/>
+          <a:ext cx="0" cy="0"/>
+          <a:chOff x="0" y="0"/>
+          <a:chExt cx="0" cy="0"/>
+        </a:xfrm>
+      </p:grpSpPr>
+      <p:sp>
+        <p:nvSpPr>
+          <p:cNvPr id="2" name="Slide Image Placeholder 1"/>
+          <p:cNvSpPr>
+            <a:spLocks noGrp="1"/>
+          </p:cNvSpPr>
+          <p:nvPr>
+            <p:ph type="sldImg" idx="2"/>
+          </p:nvPr>
+        </p:nvSpPr>
+        <p:spPr/>
+      </p:sp>
+      <p:sp>
+        <p:nvSpPr>
+          <p:cNvPr id="3" name="Notes Placeholder 2"/>
+          <p:cNvSpPr>
+            <a:spLocks noGrp="1"/>
+          </p:cNvSpPr>
+          <p:nvPr>
+            <p:ph type="body" idx="3" sz="quarter"/>
+          </p:nvPr>
+        </p:nvSpPr>
+        <p:spPr/>
+        <p:txBody>
+          <a:bodyPr/>
+          <a:lstStyle/>
+          <a:p>
+            <a:r>
+              <a:t>CONSIGNE — ne pas conserver cette page dans le deck final.</a:t>
             </a:r>
           </a:p>
         </p:txBody>
@@ -1715,7 +2075,357 @@
           <a:lstStyle/>
           <a:p>
             <a:r>
-              <a:t>[03 / 2 · Séparateur partie 1]  → INSÉRER EN REMPLACEMENT de ta slide « PARTIE 1 / POSER LE CADRE »</a:t>
+              <a:t>[01 / 1 · Le plan de la soirée]  → INSÉRER APRÈS ta slide « Et à la fin : un QUIZ », donc juste avant PARTIE 1</a:t>
+            </a:r>
+          </a:p>
+        </p:txBody>
+      </p:sp>
+      <p:sp>
+        <p:nvSpPr>
+          <p:cNvPr id="4" name="Slide Number Placeholder 3"/>
+          <p:cNvSpPr>
+            <a:spLocks noGrp="1"/>
+          </p:cNvSpPr>
+          <p:nvPr>
+            <p:ph type="sldNum" idx="5" sz="quarter"/>
+          </p:nvPr>
+        </p:nvSpPr>
+        <p:spPr/>
+      </p:sp>
+    </p:spTree>
+  </p:cSld>
+  <p:clrMapOvr>
+    <a:masterClrMapping/>
+  </p:clrMapOvr>
+</p:notes>
+</file>
+
+<file path=ppt/notesSlides/notesSlide30.xml><?xml version="1.0" encoding="utf-8"?>
+<p:notes xmlns:a="http://schemas.openxmlformats.org/drawingml/2006/main" xmlns:p="http://schemas.openxmlformats.org/presentationml/2006/main" xmlns:r="http://schemas.openxmlformats.org/officeDocument/2006/relationships">
+  <p:cSld>
+    <p:spTree>
+      <p:nvGrpSpPr>
+        <p:cNvPr id="1" name=""/>
+        <p:cNvGrpSpPr/>
+        <p:nvPr/>
+      </p:nvGrpSpPr>
+      <p:grpSpPr>
+        <a:xfrm>
+          <a:off x="0" y="0"/>
+          <a:ext cx="0" cy="0"/>
+          <a:chOff x="0" y="0"/>
+          <a:chExt cx="0" cy="0"/>
+        </a:xfrm>
+      </p:grpSpPr>
+      <p:sp>
+        <p:nvSpPr>
+          <p:cNvPr id="2" name="Slide Image Placeholder 1"/>
+          <p:cNvSpPr>
+            <a:spLocks noGrp="1"/>
+          </p:cNvSpPr>
+          <p:nvPr>
+            <p:ph type="sldImg" idx="2"/>
+          </p:nvPr>
+        </p:nvSpPr>
+        <p:spPr/>
+      </p:sp>
+      <p:sp>
+        <p:nvSpPr>
+          <p:cNvPr id="3" name="Notes Placeholder 2"/>
+          <p:cNvSpPr>
+            <a:spLocks noGrp="1"/>
+          </p:cNvSpPr>
+          <p:nvPr>
+            <p:ph type="body" idx="3" sz="quarter"/>
+          </p:nvPr>
+        </p:nvSpPr>
+        <p:spPr/>
+        <p:txBody>
+          <a:bodyPr/>
+          <a:lstStyle/>
+          <a:p>
+            <a:r>
+              <a:t>[20 / 6 · Soyons honnêtes]  → INSÉRER APRÈS « CE QUE TU EMPORTES », avant le quiz</a:t>
+            </a:r>
+          </a:p>
+        </p:txBody>
+      </p:sp>
+      <p:sp>
+        <p:nvSpPr>
+          <p:cNvPr id="4" name="Slide Number Placeholder 3"/>
+          <p:cNvSpPr>
+            <a:spLocks noGrp="1"/>
+          </p:cNvSpPr>
+          <p:nvPr>
+            <p:ph type="sldNum" idx="5" sz="quarter"/>
+          </p:nvPr>
+        </p:nvSpPr>
+        <p:spPr/>
+      </p:sp>
+    </p:spTree>
+  </p:cSld>
+  <p:clrMapOvr>
+    <a:masterClrMapping/>
+  </p:clrMapOvr>
+</p:notes>
+</file>
+
+<file path=ppt/notesSlides/notesSlide31.xml><?xml version="1.0" encoding="utf-8"?>
+<p:notes xmlns:a="http://schemas.openxmlformats.org/drawingml/2006/main" xmlns:p="http://schemas.openxmlformats.org/presentationml/2006/main" xmlns:r="http://schemas.openxmlformats.org/officeDocument/2006/relationships">
+  <p:cSld>
+    <p:spTree>
+      <p:nvGrpSpPr>
+        <p:cNvPr id="1" name=""/>
+        <p:cNvGrpSpPr/>
+        <p:nvPr/>
+      </p:nvGrpSpPr>
+      <p:grpSpPr>
+        <a:xfrm>
+          <a:off x="0" y="0"/>
+          <a:ext cx="0" cy="0"/>
+          <a:chOff x="0" y="0"/>
+          <a:chExt cx="0" cy="0"/>
+        </a:xfrm>
+      </p:grpSpPr>
+      <p:sp>
+        <p:nvSpPr>
+          <p:cNvPr id="2" name="Slide Image Placeholder 1"/>
+          <p:cNvSpPr>
+            <a:spLocks noGrp="1"/>
+          </p:cNvSpPr>
+          <p:nvPr>
+            <p:ph type="sldImg" idx="2"/>
+          </p:nvPr>
+        </p:nvSpPr>
+        <p:spPr/>
+      </p:sp>
+      <p:sp>
+        <p:nvSpPr>
+          <p:cNvPr id="3" name="Notes Placeholder 2"/>
+          <p:cNvSpPr>
+            <a:spLocks noGrp="1"/>
+          </p:cNvSpPr>
+          <p:nvPr>
+            <p:ph type="body" idx="3" sz="quarter"/>
+          </p:nvPr>
+        </p:nvSpPr>
+        <p:spPr/>
+        <p:txBody>
+          <a:bodyPr/>
+          <a:lstStyle/>
+          <a:p>
+            <a:r>
+              <a:t>[21 / 6 · Soyons honnêtes]  ↑ suite du bloc « 6 · Soyons honnêtes »</a:t>
+            </a:r>
+          </a:p>
+        </p:txBody>
+      </p:sp>
+      <p:sp>
+        <p:nvSpPr>
+          <p:cNvPr id="4" name="Slide Number Placeholder 3"/>
+          <p:cNvSpPr>
+            <a:spLocks noGrp="1"/>
+          </p:cNvSpPr>
+          <p:nvPr>
+            <p:ph type="sldNum" idx="5" sz="quarter"/>
+          </p:nvPr>
+        </p:nvSpPr>
+        <p:spPr/>
+      </p:sp>
+    </p:spTree>
+  </p:cSld>
+  <p:clrMapOvr>
+    <a:masterClrMapping/>
+  </p:clrMapOvr>
+</p:notes>
+</file>
+
+<file path=ppt/notesSlides/notesSlide32.xml><?xml version="1.0" encoding="utf-8"?>
+<p:notes xmlns:a="http://schemas.openxmlformats.org/drawingml/2006/main" xmlns:p="http://schemas.openxmlformats.org/presentationml/2006/main" xmlns:r="http://schemas.openxmlformats.org/officeDocument/2006/relationships">
+  <p:cSld>
+    <p:spTree>
+      <p:nvGrpSpPr>
+        <p:cNvPr id="1" name=""/>
+        <p:cNvGrpSpPr/>
+        <p:nvPr/>
+      </p:nvGrpSpPr>
+      <p:grpSpPr>
+        <a:xfrm>
+          <a:off x="0" y="0"/>
+          <a:ext cx="0" cy="0"/>
+          <a:chOff x="0" y="0"/>
+          <a:chExt cx="0" cy="0"/>
+        </a:xfrm>
+      </p:grpSpPr>
+      <p:sp>
+        <p:nvSpPr>
+          <p:cNvPr id="2" name="Slide Image Placeholder 1"/>
+          <p:cNvSpPr>
+            <a:spLocks noGrp="1"/>
+          </p:cNvSpPr>
+          <p:nvPr>
+            <p:ph type="sldImg" idx="2"/>
+          </p:nvPr>
+        </p:nvSpPr>
+        <p:spPr/>
+      </p:sp>
+      <p:sp>
+        <p:nvSpPr>
+          <p:cNvPr id="3" name="Notes Placeholder 2"/>
+          <p:cNvSpPr>
+            <a:spLocks noGrp="1"/>
+          </p:cNvSpPr>
+          <p:nvPr>
+            <p:ph type="body" idx="3" sz="quarter"/>
+          </p:nvPr>
+        </p:nvSpPr>
+        <p:spPr/>
+        <p:txBody>
+          <a:bodyPr/>
+          <a:lstStyle/>
+          <a:p>
+            <a:r>
+              <a:t>[22 / 6 · Soyons honnêtes]  ↑ suite du bloc « 6 · Soyons honnêtes »</a:t>
+            </a:r>
+          </a:p>
+        </p:txBody>
+      </p:sp>
+      <p:sp>
+        <p:nvSpPr>
+          <p:cNvPr id="4" name="Slide Number Placeholder 3"/>
+          <p:cNvSpPr>
+            <a:spLocks noGrp="1"/>
+          </p:cNvSpPr>
+          <p:nvPr>
+            <p:ph type="sldNum" idx="5" sz="quarter"/>
+          </p:nvPr>
+        </p:nvSpPr>
+        <p:spPr/>
+      </p:sp>
+    </p:spTree>
+  </p:cSld>
+  <p:clrMapOvr>
+    <a:masterClrMapping/>
+  </p:clrMapOvr>
+</p:notes>
+</file>
+
+<file path=ppt/notesSlides/notesSlide33.xml><?xml version="1.0" encoding="utf-8"?>
+<p:notes xmlns:a="http://schemas.openxmlformats.org/drawingml/2006/main" xmlns:p="http://schemas.openxmlformats.org/presentationml/2006/main" xmlns:r="http://schemas.openxmlformats.org/officeDocument/2006/relationships">
+  <p:cSld>
+    <p:spTree>
+      <p:nvGrpSpPr>
+        <p:cNvPr id="1" name=""/>
+        <p:cNvGrpSpPr/>
+        <p:nvPr/>
+      </p:nvGrpSpPr>
+      <p:grpSpPr>
+        <a:xfrm>
+          <a:off x="0" y="0"/>
+          <a:ext cx="0" cy="0"/>
+          <a:chOff x="0" y="0"/>
+          <a:chExt cx="0" cy="0"/>
+        </a:xfrm>
+      </p:grpSpPr>
+      <p:sp>
+        <p:nvSpPr>
+          <p:cNvPr id="2" name="Slide Image Placeholder 1"/>
+          <p:cNvSpPr>
+            <a:spLocks noGrp="1"/>
+          </p:cNvSpPr>
+          <p:nvPr>
+            <p:ph type="sldImg" idx="2"/>
+          </p:nvPr>
+        </p:nvSpPr>
+        <p:spPr/>
+      </p:sp>
+      <p:sp>
+        <p:nvSpPr>
+          <p:cNvPr id="3" name="Notes Placeholder 2"/>
+          <p:cNvSpPr>
+            <a:spLocks noGrp="1"/>
+          </p:cNvSpPr>
+          <p:nvPr>
+            <p:ph type="body" idx="3" sz="quarter"/>
+          </p:nvPr>
+        </p:nvSpPr>
+        <p:spPr/>
+        <p:txBody>
+          <a:bodyPr/>
+          <a:lstStyle/>
+          <a:p>
+            <a:r>
+              <a:t>[23 / 6 · Soyons honnêtes]  ↑ suite du bloc « 6 · Soyons honnêtes »</a:t>
+            </a:r>
+          </a:p>
+        </p:txBody>
+      </p:sp>
+      <p:sp>
+        <p:nvSpPr>
+          <p:cNvPr id="4" name="Slide Number Placeholder 3"/>
+          <p:cNvSpPr>
+            <a:spLocks noGrp="1"/>
+          </p:cNvSpPr>
+          <p:nvPr>
+            <p:ph type="sldNum" idx="5" sz="quarter"/>
+          </p:nvPr>
+        </p:nvSpPr>
+        <p:spPr/>
+      </p:sp>
+    </p:spTree>
+  </p:cSld>
+  <p:clrMapOvr>
+    <a:masterClrMapping/>
+  </p:clrMapOvr>
+</p:notes>
+</file>
+
+<file path=ppt/notesSlides/notesSlide34.xml><?xml version="1.0" encoding="utf-8"?>
+<p:notes xmlns:a="http://schemas.openxmlformats.org/drawingml/2006/main" xmlns:p="http://schemas.openxmlformats.org/presentationml/2006/main" xmlns:r="http://schemas.openxmlformats.org/officeDocument/2006/relationships">
+  <p:cSld>
+    <p:spTree>
+      <p:nvGrpSpPr>
+        <p:cNvPr id="1" name=""/>
+        <p:cNvGrpSpPr/>
+        <p:nvPr/>
+      </p:nvGrpSpPr>
+      <p:grpSpPr>
+        <a:xfrm>
+          <a:off x="0" y="0"/>
+          <a:ext cx="0" cy="0"/>
+          <a:chOff x="0" y="0"/>
+          <a:chExt cx="0" cy="0"/>
+        </a:xfrm>
+      </p:grpSpPr>
+      <p:sp>
+        <p:nvSpPr>
+          <p:cNvPr id="2" name="Slide Image Placeholder 1"/>
+          <p:cNvSpPr>
+            <a:spLocks noGrp="1"/>
+          </p:cNvSpPr>
+          <p:nvPr>
+            <p:ph type="sldImg" idx="2"/>
+          </p:nvPr>
+        </p:nvSpPr>
+        <p:spPr/>
+      </p:sp>
+      <p:sp>
+        <p:nvSpPr>
+          <p:cNvPr id="3" name="Notes Placeholder 2"/>
+          <p:cNvSpPr>
+            <a:spLocks noGrp="1"/>
+          </p:cNvSpPr>
+          <p:nvPr>
+            <p:ph type="body" idx="3" sz="quarter"/>
+          </p:nvPr>
+        </p:nvSpPr>
+        <p:spPr/>
+        <p:txBody>
+          <a:bodyPr/>
+          <a:lstStyle/>
+          <a:p>
+            <a:r>
+              <a:t>[24 / 6 · Soyons honnêtes]  ↑ suite du bloc « 6 · Soyons honnêtes »</a:t>
             </a:r>
           </a:p>
         </p:txBody>
@@ -1785,7 +2495,7 @@
           <a:lstStyle/>
           <a:p>
             <a:r>
-              <a:t>[04 / 2 · Séparateur partie 2]  → INSÉRER AVANT « ON ARRÊTE LA THÉORIE » — remplace la slide PARTIE 2 du pack précédent</a:t>
+              <a:t>[02 / 1 · Le plan de la soirée]  ↑ suite du bloc « 1 · Le plan de la soirée »</a:t>
             </a:r>
           </a:p>
         </p:txBody>
@@ -1855,7 +2565,7 @@
           <a:lstStyle/>
           <a:p>
             <a:r>
-              <a:t>[05 / 2 · Séparateur partie 3]  → INSÉRER AVANT « CE QUI TE MANQUE N'EST PAS CE QUE TU CROIS » (début du bloc G du pack précédent)</a:t>
+              <a:t>CONSIGNE — ne pas conserver cette page dans le deck final.</a:t>
             </a:r>
           </a:p>
         </p:txBody>
@@ -1925,7 +2635,7 @@
           <a:lstStyle/>
           <a:p>
             <a:r>
-              <a:t>[06 / 2 · Séparateur partie 4]  → INSÉRER EN REMPLACEMENT de ta slide « PARTIE 3 / LA méthodologie »</a:t>
+              <a:t>[03 / 2 · Séparateur partie 1]  → INSÉRER EN REMPLACEMENT de ta slide « PARTIE 1 / POSER LE CADRE »</a:t>
             </a:r>
           </a:p>
         </p:txBody>
@@ -1995,7 +2705,7 @@
           <a:lstStyle/>
           <a:p>
             <a:r>
-              <a:t>[07 / 3 · Résumé des six axes]  → INSÉRER À LA FIN DE LA PARTIE 2, après ton dernier axe et AVANT la partie 3</a:t>
+              <a:t>CONSIGNE — ne pas conserver cette page dans le deck final.</a:t>
             </a:r>
           </a:p>
         </p:txBody>
@@ -2065,7 +2775,7 @@
           <a:lstStyle/>
           <a:p>
             <a:r>
-              <a:t>[08 / 3 · Résumé des six axes]  ↑ suite du bloc « 3 · Résumé des six axes »</a:t>
+              <a:t>[04 / 2 · Séparateur partie 2]  → INSÉRER AVANT « ON ARRÊTE LA THÉORIE » — remplace la slide PARTIE 2 du pack précédent</a:t>
             </a:r>
           </a:p>
         </p:txBody>
@@ -2135,7 +2845,7 @@
           <a:lstStyle/>
           <a:p>
             <a:r>
-              <a:t>[09 / 3 · Résumé des six axes]  ↑ suite du bloc « 3 · Résumé des six axes »</a:t>
+              <a:t>CONSIGNE — ne pas conserver cette page dans le deck final.</a:t>
             </a:r>
           </a:p>
         </p:txBody>
@@ -5141,20 +5851,12 @@
         <p:nvPr/>
       </p:nvGrpSpPr>
       <p:grpSpPr/>
-      <p:pic>
-        <p:nvPicPr>
-          <p:cNvPr id="2" name="Picture 1" descr="bg.png"/>
-          <p:cNvPicPr>
-            <a:picLocks noChangeAspect="1"/>
-          </p:cNvPicPr>
+      <p:sp>
+        <p:nvSpPr>
+          <p:cNvPr id="2" name="Rectangle 1"/>
+          <p:cNvSpPr/>
           <p:nvPr/>
-        </p:nvPicPr>
-        <p:blipFill>
-          <a:blip r:embed="rId2"/>
-          <a:stretch>
-            <a:fillRect/>
-          </a:stretch>
-        </p:blipFill>
+        </p:nvSpPr>
         <p:spPr>
           <a:xfrm>
             <a:off x="0" y="0"/>
@@ -5163,24 +5865,8 @@
           <a:prstGeom prst="rect">
             <a:avLst/>
           </a:prstGeom>
-        </p:spPr>
-      </p:pic>
-      <p:sp>
-        <p:nvSpPr>
-          <p:cNvPr id="3" name="Rectangle 2"/>
-          <p:cNvSpPr/>
-          <p:nvPr/>
-        </p:nvSpPr>
-        <p:spPr>
-          <a:xfrm>
-            <a:off x="622300" y="2884170"/>
-            <a:ext cx="10947400" cy="1089660"/>
-          </a:xfrm>
-          <a:prstGeom prst="rect">
-            <a:avLst/>
-          </a:prstGeom>
           <a:solidFill>
-            <a:srgbClr val="FFFFFF"/>
+            <a:srgbClr val="E3A94F"/>
           </a:solidFill>
           <a:ln>
             <a:noFill/>
@@ -5211,14 +5897,49 @@
       </p:sp>
       <p:sp>
         <p:nvSpPr>
+          <p:cNvPr id="3" name="TextBox 2"/>
+          <p:cNvSpPr txBox="1"/>
+          <p:nvPr/>
+        </p:nvSpPr>
+        <p:spPr>
+          <a:xfrm>
+            <a:off x="952500" y="762000"/>
+            <a:ext cx="10287000" cy="952500"/>
+          </a:xfrm>
+          <a:prstGeom prst="rect">
+            <a:avLst/>
+          </a:prstGeom>
+          <a:noFill/>
+        </p:spPr>
+        <p:txBody>
+          <a:bodyPr wrap="square" lIns="0" rIns="0" tIns="0" bIns="0" anchor="t">
+            <a:spAutoFit/>
+          </a:bodyPr>
+          <a:lstStyle/>
+          <a:p>
+            <a:pPr algn="l"/>
+            <a:r>
+              <a:rPr sz="1600" b="1" i="0">
+                <a:solidFill>
+                  <a:srgbClr val="141414"/>
+                </a:solidFill>
+                <a:latin typeface="Poppins"/>
+              </a:rPr>
+              <a:t>À INSÉRER DANS TON DECK</a:t>
+            </a:r>
+          </a:p>
+        </p:txBody>
+      </p:sp>
+      <p:sp>
+        <p:nvSpPr>
           <p:cNvPr id="4" name="TextBox 3"/>
           <p:cNvSpPr txBox="1"/>
           <p:nvPr/>
         </p:nvSpPr>
         <p:spPr>
           <a:xfrm>
-            <a:off x="812800" y="2884170"/>
-            <a:ext cx="10566400" cy="1089660"/>
+            <a:off x="952500" y="1587500"/>
+            <a:ext cx="10287000" cy="1397000"/>
           </a:xfrm>
           <a:prstGeom prst="rect">
             <a:avLst/>
@@ -5226,195 +5947,266 @@
           <a:noFill/>
         </p:spPr>
         <p:txBody>
-          <a:bodyPr wrap="square" lIns="0" rIns="0" tIns="0" bIns="0" anchor="ctr">
+          <a:bodyPr wrap="square" lIns="0" rIns="0" tIns="0" bIns="0" anchor="t">
             <a:spAutoFit/>
           </a:bodyPr>
           <a:lstStyle/>
           <a:p>
-            <a:pPr algn="ctr">
+            <a:pPr algn="l">
               <a:lnSpc>
-                <a:spcPct val="100000"/>
+                <a:spcPct val="106000"/>
               </a:lnSpc>
             </a:pPr>
             <a:r>
-              <a:rPr sz="6600" b="1" i="1">
-                <a:solidFill>
-                  <a:srgbClr val="131313"/>
+              <a:rPr sz="4200" b="1" i="1">
+                <a:solidFill>
+                  <a:srgbClr val="141414"/>
                 </a:solidFill>
                 <a:latin typeface="Archivo"/>
               </a:rPr>
-              <a:t>L</a:t>
-            </a:r>
-            <a:r>
-              <a:rPr sz="6600" b="1" i="1">
-                <a:solidFill>
-                  <a:srgbClr val="131313"/>
-                </a:solidFill>
-                <a:latin typeface="Archivo"/>
-              </a:rPr>
-              <a:t>E</a:t>
-            </a:r>
-            <a:r>
-              <a:rPr sz="6600" b="1" i="1">
-                <a:solidFill>
-                  <a:srgbClr val="131313"/>
-                </a:solidFill>
-                <a:latin typeface="Archivo"/>
-              </a:rPr>
-              <a:t> </a:t>
-            </a:r>
-            <a:r>
-              <a:rPr sz="6600" b="1" i="1">
-                <a:solidFill>
-                  <a:srgbClr val="131313"/>
-                </a:solidFill>
-                <a:latin typeface="Archivo"/>
-              </a:rPr>
-              <a:t>P</a:t>
-            </a:r>
-            <a:r>
-              <a:rPr sz="6600" b="1" i="1">
-                <a:solidFill>
-                  <a:srgbClr val="131313"/>
-                </a:solidFill>
-                <a:latin typeface="Archivo"/>
-              </a:rPr>
-              <a:t>L</a:t>
-            </a:r>
-            <a:r>
-              <a:rPr sz="6600" b="1" i="1">
-                <a:solidFill>
-                  <a:srgbClr val="1C1914"/>
-                </a:solidFill>
-                <a:latin typeface="Archivo"/>
-              </a:rPr>
-              <a:t>A</a:t>
-            </a:r>
-            <a:r>
-              <a:rPr sz="6600" b="1" i="1">
-                <a:solidFill>
-                  <a:srgbClr val="272115"/>
-                </a:solidFill>
-                <a:latin typeface="Archivo"/>
-              </a:rPr>
-              <a:t>N</a:t>
-            </a:r>
-            <a:r>
-              <a:rPr sz="6600" b="1" i="1">
-                <a:solidFill>
-                  <a:srgbClr val="322817"/>
-                </a:solidFill>
-                <a:latin typeface="Archivo"/>
-              </a:rPr>
-              <a:t> </a:t>
-            </a:r>
-            <a:r>
-              <a:rPr sz="6600" b="1" i="1">
-                <a:solidFill>
-                  <a:srgbClr val="3D3019"/>
-                </a:solidFill>
-                <a:latin typeface="Archivo"/>
-              </a:rPr>
-              <a:t>D</a:t>
-            </a:r>
-            <a:r>
-              <a:rPr sz="6600" b="1" i="1">
-                <a:solidFill>
-                  <a:srgbClr val="48381A"/>
-                </a:solidFill>
-                <a:latin typeface="Archivo"/>
-              </a:rPr>
-              <a:t>E</a:t>
-            </a:r>
-            <a:r>
-              <a:rPr sz="6600" b="1" i="1">
-                <a:solidFill>
-                  <a:srgbClr val="53401C"/>
-                </a:solidFill>
-                <a:latin typeface="Archivo"/>
-              </a:rPr>
-              <a:t> </a:t>
-            </a:r>
-            <a:r>
-              <a:rPr sz="6600" b="1" i="1">
-                <a:solidFill>
-                  <a:srgbClr val="5E471E"/>
-                </a:solidFill>
-                <a:latin typeface="Archivo"/>
-              </a:rPr>
-              <a:t>L</a:t>
-            </a:r>
-            <a:r>
-              <a:rPr sz="6600" b="1" i="1">
-                <a:solidFill>
-                  <a:srgbClr val="6A4F1F"/>
-                </a:solidFill>
-                <a:latin typeface="Archivo"/>
-              </a:rPr>
-              <a:t>A</a:t>
-            </a:r>
-            <a:r>
-              <a:rPr sz="6600" b="1" i="1">
-                <a:solidFill>
-                  <a:srgbClr val="755721"/>
-                </a:solidFill>
-                <a:latin typeface="Archivo"/>
-              </a:rPr>
-              <a:t> </a:t>
-            </a:r>
-            <a:r>
-              <a:rPr sz="6600" b="1" i="1">
-                <a:solidFill>
-                  <a:srgbClr val="805F22"/>
-                </a:solidFill>
-                <a:latin typeface="Archivo"/>
-              </a:rPr>
-              <a:t>S</a:t>
-            </a:r>
-            <a:r>
-              <a:rPr sz="6600" b="1" i="1">
-                <a:solidFill>
-                  <a:srgbClr val="8B6624"/>
-                </a:solidFill>
-                <a:latin typeface="Archivo"/>
-              </a:rPr>
-              <a:t>O</a:t>
-            </a:r>
-            <a:r>
-              <a:rPr sz="6600" b="1" i="1">
-                <a:solidFill>
-                  <a:srgbClr val="966E26"/>
-                </a:solidFill>
-                <a:latin typeface="Archivo"/>
-              </a:rPr>
-              <a:t>I</a:t>
-            </a:r>
-            <a:r>
-              <a:rPr sz="6600" b="1" i="1">
-                <a:solidFill>
-                  <a:srgbClr val="A17627"/>
-                </a:solidFill>
-                <a:latin typeface="Archivo"/>
-              </a:rPr>
-              <a:t>R</a:t>
-            </a:r>
-            <a:r>
-              <a:rPr sz="6600" b="1" i="1">
-                <a:solidFill>
-                  <a:srgbClr val="AC7E29"/>
-                </a:solidFill>
-                <a:latin typeface="Archivo"/>
-              </a:rPr>
-              <a:t>É</a:t>
-            </a:r>
-            <a:r>
-              <a:rPr sz="6600" b="1" i="1">
-                <a:solidFill>
-                  <a:srgbClr val="B8862B"/>
-                </a:solidFill>
-                <a:latin typeface="Archivo"/>
-              </a:rPr>
-              <a:t>E</a:t>
+              <a:t>MODE D'EMPLOI</a:t>
+            </a:r>
+          </a:p>
+        </p:txBody>
+      </p:sp>
+      <p:sp>
+        <p:nvSpPr>
+          <p:cNvPr id="5" name="Rectangle 4"/>
+          <p:cNvSpPr/>
+          <p:nvPr/>
+        </p:nvSpPr>
+        <p:spPr>
+          <a:xfrm>
+            <a:off x="952500" y="3175000"/>
+            <a:ext cx="1651000" cy="50800"/>
+          </a:xfrm>
+          <a:prstGeom prst="rect">
+            <a:avLst/>
+          </a:prstGeom>
+          <a:solidFill>
+            <a:srgbClr val="141414"/>
+          </a:solidFill>
+          <a:ln>
+            <a:noFill/>
+          </a:ln>
+          <a:effectLst/>
+        </p:spPr>
+        <p:style>
+          <a:lnRef idx="1">
+            <a:schemeClr val="accent1"/>
+          </a:lnRef>
+          <a:fillRef idx="3">
+            <a:schemeClr val="accent1"/>
+          </a:fillRef>
+          <a:effectRef idx="2">
+            <a:schemeClr val="accent1"/>
+          </a:effectRef>
+          <a:fontRef idx="minor">
+            <a:schemeClr val="lt1"/>
+          </a:fontRef>
+        </p:style>
+        <p:txBody>
+          <a:bodyPr rtlCol="0" anchor="ctr"/>
+          <a:lstStyle/>
+          <a:p>
+            <a:pPr algn="ctr"/>
+          </a:p>
+        </p:txBody>
+      </p:sp>
+      <p:sp>
+        <p:nvSpPr>
+          <p:cNvPr id="6" name="TextBox 5"/>
+          <p:cNvSpPr txBox="1"/>
+          <p:nvPr/>
+        </p:nvSpPr>
+        <p:spPr>
+          <a:xfrm>
+            <a:off x="952500" y="3556000"/>
+            <a:ext cx="10287000" cy="2095500"/>
+          </a:xfrm>
+          <a:prstGeom prst="rect">
+            <a:avLst/>
+          </a:prstGeom>
+          <a:noFill/>
+        </p:spPr>
+        <p:txBody>
+          <a:bodyPr wrap="square" lIns="0" rIns="0" tIns="0" bIns="0" anchor="t">
+            <a:spAutoFit/>
+          </a:bodyPr>
+          <a:lstStyle/>
+          <a:p>
+            <a:pPr algn="l">
+              <a:spcAft>
+                <a:spcPts val="300"/>
+              </a:spcAft>
+            </a:pPr>
+            <a:r>
+              <a:rPr sz="1500" b="1" i="0">
+                <a:solidFill>
+                  <a:srgbClr val="141414"/>
+                </a:solidFill>
+                <a:latin typeface="Poppins"/>
+              </a:rPr>
+              <a:t>CE FICHIER</a:t>
+            </a:r>
+          </a:p>
+          <a:p>
+            <a:pPr algn="l">
+              <a:lnSpc>
+                <a:spcPct val="134000"/>
+              </a:lnSpc>
+              <a:spcAft>
+                <a:spcPts val="1300"/>
+              </a:spcAft>
+            </a:pPr>
+            <a:r>
+              <a:rPr sz="1900" b="0" i="0">
+                <a:solidFill>
+                  <a:srgbClr val="141414"/>
+                </a:solidFill>
+                <a:latin typeface="Poppins"/>
+              </a:rPr>
+              <a:t>Ce sont uniquement les nouvelles slides. Ton deck n'est pas touché.</a:t>
+            </a:r>
+          </a:p>
+          <a:p>
+            <a:pPr algn="l">
+              <a:spcAft>
+                <a:spcPts val="300"/>
+              </a:spcAft>
+            </a:pPr>
+            <a:r>
+              <a:rPr sz="1500" b="1" i="0">
+                <a:solidFill>
+                  <a:srgbClr val="141414"/>
+                </a:solidFill>
+                <a:latin typeface="Poppins"/>
+              </a:rPr>
+              <a:t>AVANT CHAQUE BLOC</a:t>
+            </a:r>
+          </a:p>
+          <a:p>
+            <a:pPr algn="l">
+              <a:lnSpc>
+                <a:spcPct val="134000"/>
+              </a:lnSpc>
+              <a:spcAft>
+                <a:spcPts val="1300"/>
+              </a:spcAft>
+            </a:pPr>
+            <a:r>
+              <a:rPr sz="1900" b="0" i="0">
+                <a:solidFill>
+                  <a:srgbClr val="141414"/>
+                </a:solidFill>
+                <a:latin typeface="Poppins"/>
+              </a:rPr>
+              <a:t>une page dorée comme celle-ci te dit où le poser.</a:t>
+            </a:r>
+          </a:p>
+          <a:p>
+            <a:pPr algn="l">
+              <a:spcAft>
+                <a:spcPts val="300"/>
+              </a:spcAft>
+            </a:pPr>
+            <a:r>
+              <a:rPr sz="1500" b="1" i="0">
+                <a:solidFill>
+                  <a:srgbClr val="141414"/>
+                </a:solidFill>
+                <a:latin typeface="Poppins"/>
+              </a:rPr>
+              <a:t>LES REPÈRES</a:t>
+            </a:r>
+          </a:p>
+          <a:p>
+            <a:pPr algn="l">
+              <a:lnSpc>
+                <a:spcPct val="134000"/>
+              </a:lnSpc>
+              <a:spcAft>
+                <a:spcPts val="1300"/>
+              </a:spcAft>
+            </a:pPr>
+            <a:r>
+              <a:rPr sz="1900" b="0" i="0">
+                <a:solidFill>
+                  <a:srgbClr val="141414"/>
+                </a:solidFill>
+                <a:latin typeface="Poppins"/>
+              </a:rPr>
+              <a:t>sont donnés par le TEXTE de tes slides, pas par un numéro de page :</a:t>
+            </a:r>
+          </a:p>
+          <a:p>
+            <a:pPr algn="l">
+              <a:spcAft>
+                <a:spcPts val="300"/>
+              </a:spcAft>
+            </a:pPr>
+            <a:r>
+              <a:rPr sz="1500" b="1" i="0">
+                <a:solidFill>
+                  <a:srgbClr val="141414"/>
+                </a:solidFill>
+                <a:latin typeface="Poppins"/>
+              </a:rPr>
+              <a:t>POURQUOI</a:t>
+            </a:r>
+          </a:p>
+          <a:p>
+            <a:pPr algn="l">
+              <a:lnSpc>
+                <a:spcPct val="134000"/>
+              </a:lnSpc>
+              <a:spcAft>
+                <a:spcPts val="1300"/>
+              </a:spcAft>
+            </a:pPr>
+            <a:r>
+              <a:rPr sz="1900" b="0" i="0">
+                <a:solidFill>
+                  <a:srgbClr val="141414"/>
+                </a:solidFill>
+                <a:latin typeface="Poppins"/>
+              </a:rPr>
+              <a:t>tes numéros bougent à chaque insertion, le texte ne bouge pas.</a:t>
+            </a:r>
+          </a:p>
+        </p:txBody>
+      </p:sp>
+      <p:sp>
+        <p:nvSpPr>
+          <p:cNvPr id="7" name="TextBox 6"/>
+          <p:cNvSpPr txBox="1"/>
+          <p:nvPr/>
+        </p:nvSpPr>
+        <p:spPr>
+          <a:xfrm>
+            <a:off x="952500" y="5905500"/>
+            <a:ext cx="10287000" cy="444500"/>
+          </a:xfrm>
+          <a:prstGeom prst="rect">
+            <a:avLst/>
+          </a:prstGeom>
+          <a:noFill/>
+        </p:spPr>
+        <p:txBody>
+          <a:bodyPr wrap="square" lIns="0" rIns="0" tIns="0" bIns="0" anchor="t">
+            <a:spAutoFit/>
+          </a:bodyPr>
+          <a:lstStyle/>
+          <a:p>
+            <a:pPr algn="l"/>
+            <a:r>
+              <a:rPr sz="1400" b="0" i="1">
+                <a:solidFill>
+                  <a:srgbClr val="141414"/>
+                </a:solidFill>
+                <a:latin typeface="Poppins"/>
+              </a:rPr>
+              <a:t>Les 0 slides qui suivent forment ce bloc. Cette page-ci ne va pas dans le deck.</a:t>
             </a:r>
           </a:p>
         </p:txBody>
@@ -5439,7 +6231,7 @@
       <p:grpSpPr/>
       <p:pic>
         <p:nvPicPr>
-          <p:cNvPr id="2" name="Picture 1" descr="bg.png"/>
+          <p:cNvPr id="2" name="Picture 1" descr="bg2.png"/>
           <p:cNvPicPr>
             <a:picLocks noChangeAspect="1"/>
           </p:cNvPicPr>
@@ -5469,8 +6261,8 @@
         </p:nvSpPr>
         <p:spPr>
           <a:xfrm>
-            <a:off x="812800" y="812800"/>
-            <a:ext cx="10566400" cy="5232400"/>
+            <a:off x="812800" y="2032000"/>
+            <a:ext cx="10566400" cy="762000"/>
           </a:xfrm>
           <a:prstGeom prst="rect">
             <a:avLst/>
@@ -5478,66 +6270,104 @@
           <a:noFill/>
         </p:spPr>
         <p:txBody>
-          <a:bodyPr wrap="square" lIns="0" rIns="0" tIns="0" bIns="0" anchor="ctr">
+          <a:bodyPr wrap="square" lIns="0" rIns="0" tIns="0" bIns="0" anchor="b">
             <a:spAutoFit/>
           </a:bodyPr>
           <a:lstStyle/>
           <a:p>
-            <a:pPr algn="ctr">
+            <a:pPr algn="l"/>
+            <a:r>
+              <a:rPr sz="1700" b="1" i="0">
+                <a:solidFill>
+                  <a:srgbClr val="E3A94F"/>
+                </a:solidFill>
+                <a:latin typeface="Poppins"/>
+              </a:rPr>
+              <a:t>PARTIE 3 SUR 4</a:t>
+            </a:r>
+          </a:p>
+        </p:txBody>
+      </p:sp>
+      <p:sp>
+        <p:nvSpPr>
+          <p:cNvPr id="4" name="TextBox 3"/>
+          <p:cNvSpPr txBox="1"/>
+          <p:nvPr/>
+        </p:nvSpPr>
+        <p:spPr>
+          <a:xfrm>
+            <a:off x="812800" y="2870200"/>
+            <a:ext cx="10566400" cy="1651000"/>
+          </a:xfrm>
+          <a:prstGeom prst="rect">
+            <a:avLst/>
+          </a:prstGeom>
+          <a:noFill/>
+        </p:spPr>
+        <p:txBody>
+          <a:bodyPr wrap="square" lIns="0" rIns="0" tIns="0" bIns="0" anchor="t">
+            <a:spAutoFit/>
+          </a:bodyPr>
+          <a:lstStyle/>
+          <a:p>
+            <a:pPr algn="l">
               <a:lnSpc>
-                <a:spcPct val="134000"/>
+                <a:spcPct val="104000"/>
               </a:lnSpc>
-              <a:spcAft>
-                <a:spcPts val="900"/>
-              </a:spcAft>
             </a:pPr>
             <a:r>
-              <a:rPr sz="2600" b="0" i="0">
+              <a:rPr sz="5500" b="1" i="1">
                 <a:solidFill>
                   <a:srgbClr val="FFFFFF"/>
                 </a:solidFill>
-                <a:latin typeface="Poppins"/>
-              </a:rPr>
-              <a:t>Prends-en une.</a:t>
-            </a:r>
-          </a:p>
-          <a:p>
-            <a:pPr algn="ctr">
-              <a:lnSpc>
-                <a:spcPct val="134000"/>
-              </a:lnSpc>
-              <a:spcAft>
-                <a:spcPts val="900"/>
-              </a:spcAft>
-            </a:pPr>
-            <a:r>
-              <a:rPr sz="2600" b="0" i="0">
-                <a:solidFill>
-                  <a:srgbClr val="FFFFFF"/>
-                </a:solidFill>
-                <a:latin typeface="Poppins"/>
-              </a:rPr>
-              <a:t>Une seule.</a:t>
-            </a:r>
-          </a:p>
-          <a:p>
-            <a:pPr algn="ctr">
-              <a:lnSpc>
-                <a:spcPct val="134000"/>
-              </a:lnSpc>
-              <a:spcAft>
-                <a:spcPts val="900"/>
-              </a:spcAft>
-            </a:pPr>
-            <a:r>
-              <a:rPr sz="2600" b="0" i="0">
-                <a:solidFill>
-                  <a:srgbClr val="E3A94F"/>
-                </a:solidFill>
-                <a:latin typeface="Poppins"/>
-              </a:rPr>
-              <a:t>Celle qui t'a le plus gêné ce soir.</a:t>
-            </a:r>
+                <a:latin typeface="Archivo"/>
+              </a:rPr>
+              <a:t>LES COMPÉTENCES TRANSVERSALES</a:t>
+            </a:r>
+          </a:p>
+        </p:txBody>
+      </p:sp>
+      <p:sp>
+        <p:nvSpPr>
+          <p:cNvPr id="5" name="Rectangle 4"/>
+          <p:cNvSpPr/>
+          <p:nvPr/>
+        </p:nvSpPr>
+        <p:spPr>
+          <a:xfrm>
+            <a:off x="812800" y="4699000"/>
+            <a:ext cx="1905000" cy="31750"/>
+          </a:xfrm>
+          <a:prstGeom prst="rect">
+            <a:avLst/>
+          </a:prstGeom>
+          <a:solidFill>
+            <a:srgbClr val="E3A94F"/>
+          </a:solidFill>
+          <a:ln>
+            <a:noFill/>
+          </a:ln>
+          <a:effectLst/>
+        </p:spPr>
+        <p:style>
+          <a:lnRef idx="1">
+            <a:schemeClr val="accent1"/>
+          </a:lnRef>
+          <a:fillRef idx="3">
+            <a:schemeClr val="accent1"/>
+          </a:fillRef>
+          <a:effectRef idx="2">
+            <a:schemeClr val="accent1"/>
+          </a:effectRef>
+          <a:fontRef idx="minor">
+            <a:schemeClr val="lt1"/>
+          </a:fontRef>
+        </p:style>
+        <p:txBody>
+          <a:bodyPr rtlCol="0" anchor="ctr"/>
+          <a:lstStyle/>
+          <a:p>
+            <a:pPr algn="ctr"/>
           </a:p>
         </p:txBody>
       </p:sp>
@@ -5559,20 +6389,12 @@
         <p:nvPr/>
       </p:nvGrpSpPr>
       <p:grpSpPr/>
-      <p:pic>
-        <p:nvPicPr>
-          <p:cNvPr id="2" name="Picture 1" descr="bg.png"/>
-          <p:cNvPicPr>
-            <a:picLocks noChangeAspect="1"/>
-          </p:cNvPicPr>
+      <p:sp>
+        <p:nvSpPr>
+          <p:cNvPr id="2" name="Rectangle 1"/>
+          <p:cNvSpPr/>
           <p:nvPr/>
-        </p:nvPicPr>
-        <p:blipFill>
-          <a:blip r:embed="rId2"/>
-          <a:stretch>
-            <a:fillRect/>
-          </a:stretch>
-        </p:blipFill>
+        </p:nvSpPr>
         <p:spPr>
           <a:xfrm>
             <a:off x="0" y="0"/>
@@ -5581,8 +6403,36 @@
           <a:prstGeom prst="rect">
             <a:avLst/>
           </a:prstGeom>
-        </p:spPr>
-      </p:pic>
+          <a:solidFill>
+            <a:srgbClr val="E3A94F"/>
+          </a:solidFill>
+          <a:ln>
+            <a:noFill/>
+          </a:ln>
+          <a:effectLst/>
+        </p:spPr>
+        <p:style>
+          <a:lnRef idx="1">
+            <a:schemeClr val="accent1"/>
+          </a:lnRef>
+          <a:fillRef idx="3">
+            <a:schemeClr val="accent1"/>
+          </a:fillRef>
+          <a:effectRef idx="2">
+            <a:schemeClr val="accent1"/>
+          </a:effectRef>
+          <a:fontRef idx="minor">
+            <a:schemeClr val="lt1"/>
+          </a:fontRef>
+        </p:style>
+        <p:txBody>
+          <a:bodyPr rtlCol="0" anchor="ctr"/>
+          <a:lstStyle/>
+          <a:p>
+            <a:pPr algn="ctr"/>
+          </a:p>
+        </p:txBody>
+      </p:sp>
       <p:sp>
         <p:nvSpPr>
           <p:cNvPr id="3" name="TextBox 2"/>
@@ -5591,8 +6441,8 @@
         </p:nvSpPr>
         <p:spPr>
           <a:xfrm>
-            <a:off x="812800" y="812800"/>
-            <a:ext cx="10566400" cy="5232400"/>
+            <a:off x="952500" y="762000"/>
+            <a:ext cx="10287000" cy="952500"/>
           </a:xfrm>
           <a:prstGeom prst="rect">
             <a:avLst/>
@@ -5600,24 +6450,196 @@
           <a:noFill/>
         </p:spPr>
         <p:txBody>
-          <a:bodyPr wrap="square" lIns="0" rIns="0" tIns="0" bIns="0" anchor="ctr">
+          <a:bodyPr wrap="square" lIns="0" rIns="0" tIns="0" bIns="0" anchor="t">
             <a:spAutoFit/>
           </a:bodyPr>
           <a:lstStyle/>
           <a:p>
-            <a:pPr algn="ctr">
+            <a:pPr algn="l"/>
+            <a:r>
+              <a:rPr sz="1600" b="1" i="0">
+                <a:solidFill>
+                  <a:srgbClr val="141414"/>
+                </a:solidFill>
+                <a:latin typeface="Poppins"/>
+              </a:rPr>
+              <a:t>À INSÉRER DANS TON DECK</a:t>
+            </a:r>
+          </a:p>
+        </p:txBody>
+      </p:sp>
+      <p:sp>
+        <p:nvSpPr>
+          <p:cNvPr id="4" name="TextBox 3"/>
+          <p:cNvSpPr txBox="1"/>
+          <p:nvPr/>
+        </p:nvSpPr>
+        <p:spPr>
+          <a:xfrm>
+            <a:off x="952500" y="1587500"/>
+            <a:ext cx="10287000" cy="1397000"/>
+          </a:xfrm>
+          <a:prstGeom prst="rect">
+            <a:avLst/>
+          </a:prstGeom>
+          <a:noFill/>
+        </p:spPr>
+        <p:txBody>
+          <a:bodyPr wrap="square" lIns="0" rIns="0" tIns="0" bIns="0" anchor="t">
+            <a:spAutoFit/>
+          </a:bodyPr>
+          <a:lstStyle/>
+          <a:p>
+            <a:pPr algn="l">
               <a:lnSpc>
                 <a:spcPct val="106000"/>
               </a:lnSpc>
             </a:pPr>
             <a:r>
-              <a:rPr sz="5000" b="1" i="1">
-                <a:solidFill>
-                  <a:srgbClr val="FFFFFF"/>
+              <a:rPr sz="4200" b="1" i="1">
+                <a:solidFill>
+                  <a:srgbClr val="141414"/>
                 </a:solidFill>
                 <a:latin typeface="Archivo"/>
               </a:rPr>
-              <a:t>ET TOUT CE QUE J'AI DÉJÀ APPRIS ?</a:t>
+              <a:t>SÉPARATEUR PARTIE 4</a:t>
+            </a:r>
+          </a:p>
+        </p:txBody>
+      </p:sp>
+      <p:sp>
+        <p:nvSpPr>
+          <p:cNvPr id="5" name="Rectangle 4"/>
+          <p:cNvSpPr/>
+          <p:nvPr/>
+        </p:nvSpPr>
+        <p:spPr>
+          <a:xfrm>
+            <a:off x="952500" y="3175000"/>
+            <a:ext cx="1651000" cy="50800"/>
+          </a:xfrm>
+          <a:prstGeom prst="rect">
+            <a:avLst/>
+          </a:prstGeom>
+          <a:solidFill>
+            <a:srgbClr val="141414"/>
+          </a:solidFill>
+          <a:ln>
+            <a:noFill/>
+          </a:ln>
+          <a:effectLst/>
+        </p:spPr>
+        <p:style>
+          <a:lnRef idx="1">
+            <a:schemeClr val="accent1"/>
+          </a:lnRef>
+          <a:fillRef idx="3">
+            <a:schemeClr val="accent1"/>
+          </a:fillRef>
+          <a:effectRef idx="2">
+            <a:schemeClr val="accent1"/>
+          </a:effectRef>
+          <a:fontRef idx="minor">
+            <a:schemeClr val="lt1"/>
+          </a:fontRef>
+        </p:style>
+        <p:txBody>
+          <a:bodyPr rtlCol="0" anchor="ctr"/>
+          <a:lstStyle/>
+          <a:p>
+            <a:pPr algn="ctr"/>
+          </a:p>
+        </p:txBody>
+      </p:sp>
+      <p:sp>
+        <p:nvSpPr>
+          <p:cNvPr id="6" name="TextBox 5"/>
+          <p:cNvSpPr txBox="1"/>
+          <p:nvPr/>
+        </p:nvSpPr>
+        <p:spPr>
+          <a:xfrm>
+            <a:off x="952500" y="3556000"/>
+            <a:ext cx="10287000" cy="2095500"/>
+          </a:xfrm>
+          <a:prstGeom prst="rect">
+            <a:avLst/>
+          </a:prstGeom>
+          <a:noFill/>
+        </p:spPr>
+        <p:txBody>
+          <a:bodyPr wrap="square" lIns="0" rIns="0" tIns="0" bIns="0" anchor="t">
+            <a:spAutoFit/>
+          </a:bodyPr>
+          <a:lstStyle/>
+          <a:p>
+            <a:pPr algn="l">
+              <a:spcAft>
+                <a:spcPts val="300"/>
+              </a:spcAft>
+            </a:pPr>
+            <a:r>
+              <a:rPr sz="1500" b="1" i="0">
+                <a:solidFill>
+                  <a:srgbClr val="141414"/>
+                </a:solidFill>
+                <a:latin typeface="Poppins"/>
+              </a:rPr>
+              <a:t>REMPLACE ta slide</a:t>
+            </a:r>
+          </a:p>
+          <a:p>
+            <a:pPr algn="l">
+              <a:lnSpc>
+                <a:spcPct val="134000"/>
+              </a:lnSpc>
+              <a:spcAft>
+                <a:spcPts val="1300"/>
+              </a:spcAft>
+            </a:pPr>
+            <a:r>
+              <a:rPr sz="1900" b="0" i="0">
+                <a:solidFill>
+                  <a:srgbClr val="141414"/>
+                </a:solidFill>
+                <a:latin typeface="Poppins"/>
+              </a:rPr>
+              <a:t>« PARTIE 3 / LA MÉTHODOLOGIE »</a:t>
+            </a:r>
+          </a:p>
+        </p:txBody>
+      </p:sp>
+      <p:sp>
+        <p:nvSpPr>
+          <p:cNvPr id="7" name="TextBox 6"/>
+          <p:cNvSpPr txBox="1"/>
+          <p:nvPr/>
+        </p:nvSpPr>
+        <p:spPr>
+          <a:xfrm>
+            <a:off x="952500" y="5905500"/>
+            <a:ext cx="10287000" cy="444500"/>
+          </a:xfrm>
+          <a:prstGeom prst="rect">
+            <a:avLst/>
+          </a:prstGeom>
+          <a:noFill/>
+        </p:spPr>
+        <p:txBody>
+          <a:bodyPr wrap="square" lIns="0" rIns="0" tIns="0" bIns="0" anchor="t">
+            <a:spAutoFit/>
+          </a:bodyPr>
+          <a:lstStyle/>
+          <a:p>
+            <a:pPr algn="l"/>
+            <a:r>
+              <a:rPr sz="1400" b="0" i="1">
+                <a:solidFill>
+                  <a:srgbClr val="141414"/>
+                </a:solidFill>
+                <a:latin typeface="Poppins"/>
+              </a:rPr>
+              <a:t>Les 1 slides qui suivent forment ce bloc. Cette page-ci ne va pas dans le deck.</a:t>
             </a:r>
           </a:p>
         </p:txBody>
@@ -5642,7 +6664,7 @@
       <p:grpSpPr/>
       <p:pic>
         <p:nvPicPr>
-          <p:cNvPr id="2" name="Picture 1" descr="bg.png"/>
+          <p:cNvPr id="2" name="Picture 1" descr="bg2.png"/>
           <p:cNvPicPr>
             <a:picLocks noChangeAspect="1"/>
           </p:cNvPicPr>
@@ -5672,8 +6694,8 @@
         </p:nvSpPr>
         <p:spPr>
           <a:xfrm>
-            <a:off x="812800" y="812800"/>
-            <a:ext cx="10566400" cy="5232400"/>
+            <a:off x="812800" y="2032000"/>
+            <a:ext cx="10566400" cy="762000"/>
           </a:xfrm>
           <a:prstGeom prst="rect">
             <a:avLst/>
@@ -5681,47 +6703,104 @@
           <a:noFill/>
         </p:spPr>
         <p:txBody>
-          <a:bodyPr wrap="square" lIns="0" rIns="0" tIns="0" bIns="0" anchor="ctr">
+          <a:bodyPr wrap="square" lIns="0" rIns="0" tIns="0" bIns="0" anchor="b">
             <a:spAutoFit/>
           </a:bodyPr>
           <a:lstStyle/>
           <a:p>
-            <a:pPr algn="ctr">
+            <a:pPr algn="l"/>
+            <a:r>
+              <a:rPr sz="1700" b="1" i="0">
+                <a:solidFill>
+                  <a:srgbClr val="E3A94F"/>
+                </a:solidFill>
+                <a:latin typeface="Poppins"/>
+              </a:rPr>
+              <a:t>PARTIE 4 SUR 4</a:t>
+            </a:r>
+          </a:p>
+        </p:txBody>
+      </p:sp>
+      <p:sp>
+        <p:nvSpPr>
+          <p:cNvPr id="4" name="TextBox 3"/>
+          <p:cNvSpPr txBox="1"/>
+          <p:nvPr/>
+        </p:nvSpPr>
+        <p:spPr>
+          <a:xfrm>
+            <a:off x="812800" y="2870200"/>
+            <a:ext cx="10566400" cy="1651000"/>
+          </a:xfrm>
+          <a:prstGeom prst="rect">
+            <a:avLst/>
+          </a:prstGeom>
+          <a:noFill/>
+        </p:spPr>
+        <p:txBody>
+          <a:bodyPr wrap="square" lIns="0" rIns="0" tIns="0" bIns="0" anchor="t">
+            <a:spAutoFit/>
+          </a:bodyPr>
+          <a:lstStyle/>
+          <a:p>
+            <a:pPr algn="l">
               <a:lnSpc>
-                <a:spcPct val="134000"/>
+                <a:spcPct val="104000"/>
               </a:lnSpc>
-              <a:spcAft>
-                <a:spcPts val="900"/>
-              </a:spcAft>
             </a:pPr>
             <a:r>
-              <a:rPr sz="2600" b="0" i="0">
+              <a:rPr sz="5500" b="1" i="1">
                 <a:solidFill>
                   <a:srgbClr val="FFFFFF"/>
                 </a:solidFill>
-                <a:latin typeface="Poppins"/>
-              </a:rPr>
-              <a:t>On ne jette rien.</a:t>
-            </a:r>
-          </a:p>
-          <a:p>
-            <a:pPr algn="ctr">
-              <a:lnSpc>
-                <a:spcPct val="134000"/>
-              </a:lnSpc>
-              <a:spcAft>
-                <a:spcPts val="900"/>
-              </a:spcAft>
-            </a:pPr>
-            <a:r>
-              <a:rPr sz="2600" b="0" i="0">
-                <a:solidFill>
-                  <a:srgbClr val="E3A94F"/>
-                </a:solidFill>
-                <a:latin typeface="Poppins"/>
-              </a:rPr>
-              <a:t>On règle.</a:t>
-            </a:r>
+                <a:latin typeface="Archivo"/>
+              </a:rPr>
+              <a:t>LA MÉTHODOLOGIE TARIQA</a:t>
+            </a:r>
+          </a:p>
+        </p:txBody>
+      </p:sp>
+      <p:sp>
+        <p:nvSpPr>
+          <p:cNvPr id="5" name="Rectangle 4"/>
+          <p:cNvSpPr/>
+          <p:nvPr/>
+        </p:nvSpPr>
+        <p:spPr>
+          <a:xfrm>
+            <a:off x="812800" y="4699000"/>
+            <a:ext cx="1905000" cy="31750"/>
+          </a:xfrm>
+          <a:prstGeom prst="rect">
+            <a:avLst/>
+          </a:prstGeom>
+          <a:solidFill>
+            <a:srgbClr val="E3A94F"/>
+          </a:solidFill>
+          <a:ln>
+            <a:noFill/>
+          </a:ln>
+          <a:effectLst/>
+        </p:spPr>
+        <p:style>
+          <a:lnRef idx="1">
+            <a:schemeClr val="accent1"/>
+          </a:lnRef>
+          <a:fillRef idx="3">
+            <a:schemeClr val="accent1"/>
+          </a:fillRef>
+          <a:effectRef idx="2">
+            <a:schemeClr val="accent1"/>
+          </a:effectRef>
+          <a:fontRef idx="minor">
+            <a:schemeClr val="lt1"/>
+          </a:fontRef>
+        </p:style>
+        <p:txBody>
+          <a:bodyPr rtlCol="0" anchor="ctr"/>
+          <a:lstStyle/>
+          <a:p>
+            <a:pPr algn="ctr"/>
           </a:p>
         </p:txBody>
       </p:sp>
@@ -5743,20 +6822,12 @@
         <p:nvPr/>
       </p:nvGrpSpPr>
       <p:grpSpPr/>
-      <p:pic>
-        <p:nvPicPr>
-          <p:cNvPr id="2" name="Picture 1" descr="bg.png"/>
-          <p:cNvPicPr>
-            <a:picLocks noChangeAspect="1"/>
-          </p:cNvPicPr>
+      <p:sp>
+        <p:nvSpPr>
+          <p:cNvPr id="2" name="Rectangle 1"/>
+          <p:cNvSpPr/>
           <p:nvPr/>
-        </p:nvPicPr>
-        <p:blipFill>
-          <a:blip r:embed="rId2"/>
-          <a:stretch>
-            <a:fillRect/>
-          </a:stretch>
-        </p:blipFill>
+        </p:nvSpPr>
         <p:spPr>
           <a:xfrm>
             <a:off x="0" y="0"/>
@@ -5765,8 +6836,36 @@
           <a:prstGeom prst="rect">
             <a:avLst/>
           </a:prstGeom>
-        </p:spPr>
-      </p:pic>
+          <a:solidFill>
+            <a:srgbClr val="E3A94F"/>
+          </a:solidFill>
+          <a:ln>
+            <a:noFill/>
+          </a:ln>
+          <a:effectLst/>
+        </p:spPr>
+        <p:style>
+          <a:lnRef idx="1">
+            <a:schemeClr val="accent1"/>
+          </a:lnRef>
+          <a:fillRef idx="3">
+            <a:schemeClr val="accent1"/>
+          </a:fillRef>
+          <a:effectRef idx="2">
+            <a:schemeClr val="accent1"/>
+          </a:effectRef>
+          <a:fontRef idx="minor">
+            <a:schemeClr val="lt1"/>
+          </a:fontRef>
+        </p:style>
+        <p:txBody>
+          <a:bodyPr rtlCol="0" anchor="ctr"/>
+          <a:lstStyle/>
+          <a:p>
+            <a:pPr algn="ctr"/>
+          </a:p>
+        </p:txBody>
+      </p:sp>
       <p:sp>
         <p:nvSpPr>
           <p:cNvPr id="3" name="TextBox 2"/>
@@ -5775,8 +6874,8 @@
         </p:nvSpPr>
         <p:spPr>
           <a:xfrm>
-            <a:off x="812800" y="812800"/>
-            <a:ext cx="10566400" cy="5232400"/>
+            <a:off x="952500" y="762000"/>
+            <a:ext cx="10287000" cy="952500"/>
           </a:xfrm>
           <a:prstGeom prst="rect">
             <a:avLst/>
@@ -5784,43 +6883,266 @@
           <a:noFill/>
         </p:spPr>
         <p:txBody>
-          <a:bodyPr wrap="square" lIns="0" rIns="0" tIns="0" bIns="0" anchor="ctr">
+          <a:bodyPr wrap="square" lIns="0" rIns="0" tIns="0" bIns="0" anchor="t">
             <a:spAutoFit/>
           </a:bodyPr>
           <a:lstStyle/>
           <a:p>
-            <a:pPr algn="ctr">
+            <a:pPr algn="l"/>
+            <a:r>
+              <a:rPr sz="1600" b="1" i="0">
+                <a:solidFill>
+                  <a:srgbClr val="141414"/>
+                </a:solidFill>
+                <a:latin typeface="Poppins"/>
+              </a:rPr>
+              <a:t>À INSÉRER DANS TON DECK</a:t>
+            </a:r>
+          </a:p>
+        </p:txBody>
+      </p:sp>
+      <p:sp>
+        <p:nvSpPr>
+          <p:cNvPr id="4" name="TextBox 3"/>
+          <p:cNvSpPr txBox="1"/>
+          <p:nvPr/>
+        </p:nvSpPr>
+        <p:spPr>
+          <a:xfrm>
+            <a:off x="952500" y="1587500"/>
+            <a:ext cx="10287000" cy="1397000"/>
+          </a:xfrm>
+          <a:prstGeom prst="rect">
+            <a:avLst/>
+          </a:prstGeom>
+          <a:noFill/>
+        </p:spPr>
+        <p:txBody>
+          <a:bodyPr wrap="square" lIns="0" rIns="0" tIns="0" bIns="0" anchor="t">
+            <a:spAutoFit/>
+          </a:bodyPr>
+          <a:lstStyle/>
+          <a:p>
+            <a:pPr algn="l">
               <a:lnSpc>
-                <a:spcPct val="118000"/>
+                <a:spcPct val="106000"/>
+              </a:lnSpc>
+            </a:pPr>
+            <a:r>
+              <a:rPr sz="4200" b="1" i="1">
+                <a:solidFill>
+                  <a:srgbClr val="141414"/>
+                </a:solidFill>
+                <a:latin typeface="Archivo"/>
+              </a:rPr>
+              <a:t>RÉSUMÉ DES SIX AXES</a:t>
+            </a:r>
+          </a:p>
+        </p:txBody>
+      </p:sp>
+      <p:sp>
+        <p:nvSpPr>
+          <p:cNvPr id="5" name="Rectangle 4"/>
+          <p:cNvSpPr/>
+          <p:nvPr/>
+        </p:nvSpPr>
+        <p:spPr>
+          <a:xfrm>
+            <a:off x="952500" y="3175000"/>
+            <a:ext cx="1651000" cy="50800"/>
+          </a:xfrm>
+          <a:prstGeom prst="rect">
+            <a:avLst/>
+          </a:prstGeom>
+          <a:solidFill>
+            <a:srgbClr val="141414"/>
+          </a:solidFill>
+          <a:ln>
+            <a:noFill/>
+          </a:ln>
+          <a:effectLst/>
+        </p:spPr>
+        <p:style>
+          <a:lnRef idx="1">
+            <a:schemeClr val="accent1"/>
+          </a:lnRef>
+          <a:fillRef idx="3">
+            <a:schemeClr val="accent1"/>
+          </a:fillRef>
+          <a:effectRef idx="2">
+            <a:schemeClr val="accent1"/>
+          </a:effectRef>
+          <a:fontRef idx="minor">
+            <a:schemeClr val="lt1"/>
+          </a:fontRef>
+        </p:style>
+        <p:txBody>
+          <a:bodyPr rtlCol="0" anchor="ctr"/>
+          <a:lstStyle/>
+          <a:p>
+            <a:pPr algn="ctr"/>
+          </a:p>
+        </p:txBody>
+      </p:sp>
+      <p:sp>
+        <p:nvSpPr>
+          <p:cNvPr id="6" name="TextBox 5"/>
+          <p:cNvSpPr txBox="1"/>
+          <p:nvPr/>
+        </p:nvSpPr>
+        <p:spPr>
+          <a:xfrm>
+            <a:off x="952500" y="3556000"/>
+            <a:ext cx="10287000" cy="2095500"/>
+          </a:xfrm>
+          <a:prstGeom prst="rect">
+            <a:avLst/>
+          </a:prstGeom>
+          <a:noFill/>
+        </p:spPr>
+        <p:txBody>
+          <a:bodyPr wrap="square" lIns="0" rIns="0" tIns="0" bIns="0" anchor="t">
+            <a:spAutoFit/>
+          </a:bodyPr>
+          <a:lstStyle/>
+          <a:p>
+            <a:pPr algn="l">
+              <a:spcAft>
+                <a:spcPts val="300"/>
+              </a:spcAft>
+            </a:pPr>
+            <a:r>
+              <a:rPr sz="1500" b="1" i="0">
+                <a:solidFill>
+                  <a:srgbClr val="141414"/>
+                </a:solidFill>
+                <a:latin typeface="Poppins"/>
+              </a:rPr>
+              <a:t>REMPLACE ta slide</a:t>
+            </a:r>
+          </a:p>
+          <a:p>
+            <a:pPr algn="l">
+              <a:lnSpc>
+                <a:spcPct val="134000"/>
               </a:lnSpc>
               <a:spcAft>
-                <a:spcPts val="1500"/>
+                <a:spcPts val="1300"/>
               </a:spcAft>
             </a:pPr>
             <a:r>
-              <a:rPr sz="3000" b="1" i="0">
-                <a:solidFill>
-                  <a:srgbClr val="FFFFFF"/>
-                </a:solidFill>
-                <a:latin typeface="Oswald"/>
-              </a:rPr>
-              <a:t>L'IDÉE N'EST PAS DE TOUT REJETER. ON NE PEUT QU'EMPRUNTER. LA QUESTION, C'EST COMMENT.</a:t>
-            </a:r>
-          </a:p>
-          <a:p>
-            <a:pPr algn="ctr">
+              <a:rPr sz="1900" b="0" i="0">
+                <a:solidFill>
+                  <a:srgbClr val="141414"/>
+                </a:solidFill>
+                <a:latin typeface="Poppins"/>
+              </a:rPr>
+              <a:t>« LES SIX SONT PASSÉS »</a:t>
+            </a:r>
+          </a:p>
+          <a:p>
+            <a:pPr algn="l">
               <a:spcAft>
-                <a:spcPts val="1700"/>
+                <a:spcPts val="300"/>
               </a:spcAft>
             </a:pPr>
             <a:r>
+              <a:rPr sz="1500" b="1" i="0">
+                <a:solidFill>
+                  <a:srgbClr val="141414"/>
+                </a:solidFill>
+                <a:latin typeface="Poppins"/>
+              </a:rPr>
+              <a:t>DONC APRÈS</a:t>
+            </a:r>
+          </a:p>
+          <a:p>
+            <a:pPr algn="l">
+              <a:lnSpc>
+                <a:spcPct val="134000"/>
+              </a:lnSpc>
+              <a:spcAft>
+                <a:spcPts val="1300"/>
+              </a:spcAft>
+            </a:pPr>
+            <a:r>
+              <a:rPr sz="1900" b="0" i="0">
+                <a:solidFill>
+                  <a:srgbClr val="141414"/>
+                </a:solidFill>
+                <a:latin typeface="Poppins"/>
+              </a:rPr>
+              <a:t>« Il s'agit de ce que ton dispositif rend probable. »</a:t>
+            </a:r>
+          </a:p>
+          <a:p>
+            <a:pPr algn="l">
+              <a:spcAft>
+                <a:spcPts val="300"/>
+              </a:spcAft>
+            </a:pPr>
+            <a:r>
+              <a:rPr sz="1500" b="1" i="0">
+                <a:solidFill>
+                  <a:srgbClr val="141414"/>
+                </a:solidFill>
+                <a:latin typeface="Poppins"/>
+              </a:rPr>
+              <a:t>ET AVANT</a:t>
+            </a:r>
+          </a:p>
+          <a:p>
+            <a:pPr algn="l">
+              <a:lnSpc>
+                <a:spcPct val="134000"/>
+              </a:lnSpc>
+              <a:spcAft>
+                <a:spcPts val="1300"/>
+              </a:spcAft>
+            </a:pPr>
+            <a:r>
+              <a:rPr sz="1900" b="0" i="0">
+                <a:solidFill>
+                  <a:srgbClr val="141414"/>
+                </a:solidFill>
+                <a:latin typeface="Poppins"/>
+              </a:rPr>
+              <a:t>« D'accord. Et demain, je fais quoi de tout ce que j'ai déjà appris ? »</a:t>
+            </a:r>
+          </a:p>
+        </p:txBody>
+      </p:sp>
+      <p:sp>
+        <p:nvSpPr>
+          <p:cNvPr id="7" name="TextBox 6"/>
+          <p:cNvSpPr txBox="1"/>
+          <p:nvPr/>
+        </p:nvSpPr>
+        <p:spPr>
+          <a:xfrm>
+            <a:off x="952500" y="5905500"/>
+            <a:ext cx="10287000" cy="444500"/>
+          </a:xfrm>
+          <a:prstGeom prst="rect">
+            <a:avLst/>
+          </a:prstGeom>
+          <a:noFill/>
+        </p:spPr>
+        <p:txBody>
+          <a:bodyPr wrap="square" lIns="0" rIns="0" tIns="0" bIns="0" anchor="t">
+            <a:spAutoFit/>
+          </a:bodyPr>
+          <a:lstStyle/>
+          <a:p>
+            <a:pPr algn="l"/>
+            <a:r>
               <a:rPr sz="1400" b="0" i="1">
                 <a:solidFill>
-                  <a:srgbClr val="E3A94F"/>
+                  <a:srgbClr val="141414"/>
                 </a:solidFill>
                 <a:latin typeface="Poppins"/>
               </a:rPr>
-              <a:t>— Dr Chauki Lazhar, spécialiste des fondements du droit —</a:t>
+              <a:t>Les 4 slides qui suivent forment ce bloc. Cette page-ci ne va pas dans le deck.</a:t>
             </a:r>
           </a:p>
         </p:txBody>
@@ -5869,59 +7191,20 @@
       </p:pic>
       <p:sp>
         <p:nvSpPr>
-          <p:cNvPr id="3" name="TextBox 2"/>
-          <p:cNvSpPr txBox="1"/>
-          <p:nvPr/>
-        </p:nvSpPr>
-        <p:spPr>
-          <a:xfrm>
-            <a:off x="812800" y="812800"/>
-            <a:ext cx="10566400" cy="698500"/>
-          </a:xfrm>
-          <a:prstGeom prst="rect">
-            <a:avLst/>
-          </a:prstGeom>
-          <a:noFill/>
-        </p:spPr>
-        <p:txBody>
-          <a:bodyPr wrap="square" lIns="0" rIns="0" tIns="0" bIns="0" anchor="t">
-            <a:spAutoFit/>
-          </a:bodyPr>
-          <a:lstStyle/>
-          <a:p>
-            <a:pPr algn="l">
-              <a:lnSpc>
-                <a:spcPct val="114000"/>
-              </a:lnSpc>
-            </a:pPr>
-            <a:r>
-              <a:rPr sz="2000" b="1" i="1">
-                <a:solidFill>
-                  <a:srgbClr val="FFFFFF"/>
-                </a:solidFill>
-                <a:latin typeface="Archivo"/>
-              </a:rPr>
-              <a:t>DEUX QUESTIONS AVANT D'ADOPTER UN OUTIL</a:t>
-            </a:r>
-          </a:p>
-        </p:txBody>
-      </p:sp>
-      <p:sp>
-        <p:nvSpPr>
-          <p:cNvPr id="4" name="Rectangle 3"/>
+          <p:cNvPr id="3" name="Rectangle 2"/>
           <p:cNvSpPr/>
           <p:nvPr/>
         </p:nvSpPr>
         <p:spPr>
           <a:xfrm>
-            <a:off x="812800" y="1879600"/>
-            <a:ext cx="1143000" cy="25400"/>
+            <a:off x="1125220" y="2884170"/>
+            <a:ext cx="9941560" cy="1089660"/>
           </a:xfrm>
           <a:prstGeom prst="rect">
             <a:avLst/>
           </a:prstGeom>
           <a:solidFill>
-            <a:srgbClr val="E3A94F"/>
+            <a:srgbClr val="FFFFFF"/>
           </a:solidFill>
           <a:ln>
             <a:noFill/>
@@ -5952,14 +7235,14 @@
       </p:sp>
       <p:sp>
         <p:nvSpPr>
-          <p:cNvPr id="5" name="TextBox 4"/>
+          <p:cNvPr id="4" name="TextBox 3"/>
           <p:cNvSpPr txBox="1"/>
           <p:nvPr/>
         </p:nvSpPr>
         <p:spPr>
           <a:xfrm>
-            <a:off x="812800" y="2222500"/>
-            <a:ext cx="10566400" cy="3822700"/>
+            <a:off x="1315720" y="2884170"/>
+            <a:ext cx="9560560" cy="1089660"/>
           </a:xfrm>
           <a:prstGeom prst="rect">
             <a:avLst/>
@@ -5967,65 +7250,177 @@
           <a:noFill/>
         </p:spPr>
         <p:txBody>
-          <a:bodyPr wrap="square" lIns="0" rIns="0" tIns="0" bIns="0" anchor="t">
+          <a:bodyPr wrap="square" lIns="0" rIns="0" tIns="0" bIns="0" anchor="ctr">
             <a:spAutoFit/>
           </a:bodyPr>
           <a:lstStyle/>
           <a:p>
-            <a:pPr algn="l">
+            <a:pPr algn="ctr">
               <a:lnSpc>
-                <a:spcPct val="142000"/>
+                <a:spcPct val="100000"/>
               </a:lnSpc>
-              <a:spcAft>
-                <a:spcPts val="900"/>
-              </a:spcAft>
             </a:pPr>
             <a:r>
-              <a:rPr sz="1850" b="0" i="0">
-                <a:solidFill>
-                  <a:srgbClr val="FFFFFF"/>
-                </a:solidFill>
-                <a:latin typeface="Poppins"/>
-              </a:rPr>
-              <a:t>1. D'où il vient ? Quelle idée de la réussite il transporte sans le dire ?</a:t>
-            </a:r>
-          </a:p>
-          <a:p>
-            <a:pPr algn="l">
-              <a:lnSpc>
-                <a:spcPct val="142000"/>
-              </a:lnSpc>
-              <a:spcAft>
-                <a:spcPts val="900"/>
-              </a:spcAft>
-            </a:pPr>
-            <a:r>
-              <a:rPr sz="1850" b="0" i="0">
-                <a:solidFill>
-                  <a:srgbClr val="FFFFFF"/>
-                </a:solidFill>
-                <a:latin typeface="Poppins"/>
-              </a:rPr>
-              <a:t>2. Qu'est-ce qu'il produit chez les gens ?</a:t>
-            </a:r>
-          </a:p>
-          <a:p>
-            <a:pPr algn="l">
-              <a:lnSpc>
-                <a:spcPct val="142000"/>
-              </a:lnSpc>
-              <a:spcAft>
-                <a:spcPts val="900"/>
-              </a:spcAft>
-            </a:pPr>
-            <a:r>
-              <a:rPr sz="1850" b="0" i="0">
-                <a:solidFill>
-                  <a:srgbClr val="E3A94F"/>
-                </a:solidFill>
-                <a:latin typeface="Poppins"/>
-              </a:rPr>
-              <a:t>👉 Et c'est tout. Deux questions, sur n'importe quelle formation, n'importe quelle méthode.</a:t>
+              <a:rPr sz="6600" b="1" i="1">
+                <a:solidFill>
+                  <a:srgbClr val="131313"/>
+                </a:solidFill>
+                <a:latin typeface="Archivo"/>
+              </a:rPr>
+              <a:t>U</a:t>
+            </a:r>
+            <a:r>
+              <a:rPr sz="6600" b="1" i="1">
+                <a:solidFill>
+                  <a:srgbClr val="131313"/>
+                </a:solidFill>
+                <a:latin typeface="Archivo"/>
+              </a:rPr>
+              <a:t>N</a:t>
+            </a:r>
+            <a:r>
+              <a:rPr sz="6600" b="1" i="1">
+                <a:solidFill>
+                  <a:srgbClr val="131313"/>
+                </a:solidFill>
+                <a:latin typeface="Archivo"/>
+              </a:rPr>
+              <a:t>E</a:t>
+            </a:r>
+            <a:r>
+              <a:rPr sz="6600" b="1" i="1">
+                <a:solidFill>
+                  <a:srgbClr val="131313"/>
+                </a:solidFill>
+                <a:latin typeface="Archivo"/>
+              </a:rPr>
+              <a:t> </a:t>
+            </a:r>
+            <a:r>
+              <a:rPr sz="6600" b="1" i="1">
+                <a:solidFill>
+                  <a:srgbClr val="161513"/>
+                </a:solidFill>
+                <a:latin typeface="Archivo"/>
+              </a:rPr>
+              <a:t>S</a:t>
+            </a:r>
+            <a:r>
+              <a:rPr sz="6600" b="1" i="1">
+                <a:solidFill>
+                  <a:srgbClr val="221D15"/>
+                </a:solidFill>
+                <a:latin typeface="Archivo"/>
+              </a:rPr>
+              <a:t>E</a:t>
+            </a:r>
+            <a:r>
+              <a:rPr sz="6600" b="1" i="1">
+                <a:solidFill>
+                  <a:srgbClr val="2F2617"/>
+                </a:solidFill>
+                <a:latin typeface="Archivo"/>
+              </a:rPr>
+              <a:t>U</a:t>
+            </a:r>
+            <a:r>
+              <a:rPr sz="6600" b="1" i="1">
+                <a:solidFill>
+                  <a:srgbClr val="3B2F18"/>
+                </a:solidFill>
+                <a:latin typeface="Archivo"/>
+              </a:rPr>
+              <a:t>L</a:t>
+            </a:r>
+            <a:r>
+              <a:rPr sz="6600" b="1" i="1">
+                <a:solidFill>
+                  <a:srgbClr val="48371A"/>
+                </a:solidFill>
+                <a:latin typeface="Archivo"/>
+              </a:rPr>
+              <a:t>E</a:t>
+            </a:r>
+            <a:r>
+              <a:rPr sz="6600" b="1" i="1">
+                <a:solidFill>
+                  <a:srgbClr val="54401C"/>
+                </a:solidFill>
+                <a:latin typeface="Archivo"/>
+              </a:rPr>
+              <a:t> </a:t>
+            </a:r>
+            <a:r>
+              <a:rPr sz="6600" b="1" i="1">
+                <a:solidFill>
+                  <a:srgbClr val="60491E"/>
+                </a:solidFill>
+                <a:latin typeface="Archivo"/>
+              </a:rPr>
+              <a:t>Q</a:t>
+            </a:r>
+            <a:r>
+              <a:rPr sz="6600" b="1" i="1">
+                <a:solidFill>
+                  <a:srgbClr val="6D5120"/>
+                </a:solidFill>
+                <a:latin typeface="Archivo"/>
+              </a:rPr>
+              <a:t>U</a:t>
+            </a:r>
+            <a:r>
+              <a:rPr sz="6600" b="1" i="1">
+                <a:solidFill>
+                  <a:srgbClr val="795A21"/>
+                </a:solidFill>
+                <a:latin typeface="Archivo"/>
+              </a:rPr>
+              <a:t>E</a:t>
+            </a:r>
+            <a:r>
+              <a:rPr sz="6600" b="1" i="1">
+                <a:solidFill>
+                  <a:srgbClr val="866323"/>
+                </a:solidFill>
+                <a:latin typeface="Archivo"/>
+              </a:rPr>
+              <a:t>S</a:t>
+            </a:r>
+            <a:r>
+              <a:rPr sz="6600" b="1" i="1">
+                <a:solidFill>
+                  <a:srgbClr val="926B25"/>
+                </a:solidFill>
+                <a:latin typeface="Archivo"/>
+              </a:rPr>
+              <a:t>T</a:t>
+            </a:r>
+            <a:r>
+              <a:rPr sz="6600" b="1" i="1">
+                <a:solidFill>
+                  <a:srgbClr val="9F7427"/>
+                </a:solidFill>
+                <a:latin typeface="Archivo"/>
+              </a:rPr>
+              <a:t>I</a:t>
+            </a:r>
+            <a:r>
+              <a:rPr sz="6600" b="1" i="1">
+                <a:solidFill>
+                  <a:srgbClr val="AB7D29"/>
+                </a:solidFill>
+                <a:latin typeface="Archivo"/>
+              </a:rPr>
+              <a:t>O</a:t>
+            </a:r>
+            <a:r>
+              <a:rPr sz="6600" b="1" i="1">
+                <a:solidFill>
+                  <a:srgbClr val="B8862B"/>
+                </a:solidFill>
+                <a:latin typeface="Archivo"/>
+              </a:rPr>
+              <a:t>N</a:t>
             </a:r>
           </a:p>
         </p:txBody>
@@ -6074,58 +7469,14 @@
       </p:pic>
       <p:sp>
         <p:nvSpPr>
-          <p:cNvPr id="3" name="Rectangle 2"/>
-          <p:cNvSpPr/>
-          <p:nvPr/>
-        </p:nvSpPr>
-        <p:spPr>
-          <a:xfrm>
-            <a:off x="1125220" y="2884170"/>
-            <a:ext cx="9941560" cy="1089660"/>
-          </a:xfrm>
-          <a:prstGeom prst="rect">
-            <a:avLst/>
-          </a:prstGeom>
-          <a:solidFill>
-            <a:srgbClr val="FFFFFF"/>
-          </a:solidFill>
-          <a:ln>
-            <a:noFill/>
-          </a:ln>
-          <a:effectLst/>
-        </p:spPr>
-        <p:style>
-          <a:lnRef idx="1">
-            <a:schemeClr val="accent1"/>
-          </a:lnRef>
-          <a:fillRef idx="3">
-            <a:schemeClr val="accent1"/>
-          </a:fillRef>
-          <a:effectRef idx="2">
-            <a:schemeClr val="accent1"/>
-          </a:effectRef>
-          <a:fontRef idx="minor">
-            <a:schemeClr val="lt1"/>
-          </a:fontRef>
-        </p:style>
-        <p:txBody>
-          <a:bodyPr rtlCol="0" anchor="ctr"/>
-          <a:lstStyle/>
-          <a:p>
-            <a:pPr algn="ctr"/>
-          </a:p>
-        </p:txBody>
-      </p:sp>
-      <p:sp>
-        <p:nvSpPr>
-          <p:cNvPr id="4" name="TextBox 3"/>
+          <p:cNvPr id="3" name="TextBox 2"/>
           <p:cNvSpPr txBox="1"/>
           <p:nvPr/>
         </p:nvSpPr>
         <p:spPr>
           <a:xfrm>
-            <a:off x="1315720" y="2884170"/>
-            <a:ext cx="9560560" cy="1089660"/>
+            <a:off x="812800" y="812800"/>
+            <a:ext cx="10566400" cy="5232400"/>
           </a:xfrm>
           <a:prstGeom prst="rect">
             <a:avLst/>
@@ -6140,170 +7491,33 @@
           <a:p>
             <a:pPr algn="ctr">
               <a:lnSpc>
-                <a:spcPct val="100000"/>
+                <a:spcPct val="106000"/>
               </a:lnSpc>
             </a:pPr>
             <a:r>
-              <a:rPr sz="6600" b="1" i="1">
-                <a:solidFill>
-                  <a:srgbClr val="131313"/>
+              <a:rPr sz="3900" b="1" i="1">
+                <a:solidFill>
+                  <a:srgbClr val="FFFFFF"/>
                 </a:solidFill>
                 <a:latin typeface="Archivo"/>
               </a:rPr>
-              <a:t>C</a:t>
-            </a:r>
-            <a:r>
-              <a:rPr sz="6600" b="1" i="1">
-                <a:solidFill>
-                  <a:srgbClr val="131313"/>
+              <a:t>QU'EST-CE QUE JE CHANGE</a:t>
+            </a:r>
+          </a:p>
+          <a:p>
+            <a:pPr algn="ctr">
+              <a:lnSpc>
+                <a:spcPct val="106000"/>
+              </a:lnSpc>
+            </a:pPr>
+            <a:r>
+              <a:rPr sz="3900" b="1" i="1">
+                <a:solidFill>
+                  <a:srgbClr val="FFFFFF"/>
                 </a:solidFill>
                 <a:latin typeface="Archivo"/>
               </a:rPr>
-              <a:t>E</a:t>
-            </a:r>
-            <a:r>
-              <a:rPr sz="6600" b="1" i="1">
-                <a:solidFill>
-                  <a:srgbClr val="131313"/>
-                </a:solidFill>
-                <a:latin typeface="Archivo"/>
-              </a:rPr>
-              <a:t> </a:t>
-            </a:r>
-            <a:r>
-              <a:rPr sz="6600" b="1" i="1">
-                <a:solidFill>
-                  <a:srgbClr val="131313"/>
-                </a:solidFill>
-                <a:latin typeface="Archivo"/>
-              </a:rPr>
-              <a:t>Q</a:t>
-            </a:r>
-            <a:r>
-              <a:rPr sz="6600" b="1" i="1">
-                <a:solidFill>
-                  <a:srgbClr val="161513"/>
-                </a:solidFill>
-                <a:latin typeface="Archivo"/>
-              </a:rPr>
-              <a:t>U</a:t>
-            </a:r>
-            <a:r>
-              <a:rPr sz="6600" b="1" i="1">
-                <a:solidFill>
-                  <a:srgbClr val="221D15"/>
-                </a:solidFill>
-                <a:latin typeface="Archivo"/>
-              </a:rPr>
-              <a:t>E</a:t>
-            </a:r>
-            <a:r>
-              <a:rPr sz="6600" b="1" i="1">
-                <a:solidFill>
-                  <a:srgbClr val="2F2617"/>
-                </a:solidFill>
-                <a:latin typeface="Archivo"/>
-              </a:rPr>
-              <a:t> </a:t>
-            </a:r>
-            <a:r>
-              <a:rPr sz="6600" b="1" i="1">
-                <a:solidFill>
-                  <a:srgbClr val="3B2F18"/>
-                </a:solidFill>
-                <a:latin typeface="Archivo"/>
-              </a:rPr>
-              <a:t>T</a:t>
-            </a:r>
-            <a:r>
-              <a:rPr sz="6600" b="1" i="1">
-                <a:solidFill>
-                  <a:srgbClr val="48371A"/>
-                </a:solidFill>
-                <a:latin typeface="Archivo"/>
-              </a:rPr>
-              <a:t>U</a:t>
-            </a:r>
-            <a:r>
-              <a:rPr sz="6600" b="1" i="1">
-                <a:solidFill>
-                  <a:srgbClr val="54401C"/>
-                </a:solidFill>
-                <a:latin typeface="Archivo"/>
-              </a:rPr>
-              <a:t> </a:t>
-            </a:r>
-            <a:r>
-              <a:rPr sz="6600" b="1" i="1">
-                <a:solidFill>
-                  <a:srgbClr val="60491E"/>
-                </a:solidFill>
-                <a:latin typeface="Archivo"/>
-              </a:rPr>
-              <a:t>E</a:t>
-            </a:r>
-            <a:r>
-              <a:rPr sz="6600" b="1" i="1">
-                <a:solidFill>
-                  <a:srgbClr val="6D5120"/>
-                </a:solidFill>
-                <a:latin typeface="Archivo"/>
-              </a:rPr>
-              <a:t>M</a:t>
-            </a:r>
-            <a:r>
-              <a:rPr sz="6600" b="1" i="1">
-                <a:solidFill>
-                  <a:srgbClr val="795A21"/>
-                </a:solidFill>
-                <a:latin typeface="Archivo"/>
-              </a:rPr>
-              <a:t>P</a:t>
-            </a:r>
-            <a:r>
-              <a:rPr sz="6600" b="1" i="1">
-                <a:solidFill>
-                  <a:srgbClr val="866323"/>
-                </a:solidFill>
-                <a:latin typeface="Archivo"/>
-              </a:rPr>
-              <a:t>O</a:t>
-            </a:r>
-            <a:r>
-              <a:rPr sz="6600" b="1" i="1">
-                <a:solidFill>
-                  <a:srgbClr val="926B25"/>
-                </a:solidFill>
-                <a:latin typeface="Archivo"/>
-              </a:rPr>
-              <a:t>R</a:t>
-            </a:r>
-            <a:r>
-              <a:rPr sz="6600" b="1" i="1">
-                <a:solidFill>
-                  <a:srgbClr val="9F7427"/>
-                </a:solidFill>
-                <a:latin typeface="Archivo"/>
-              </a:rPr>
-              <a:t>T</a:t>
-            </a:r>
-            <a:r>
-              <a:rPr sz="6600" b="1" i="1">
-                <a:solidFill>
-                  <a:srgbClr val="AB7D29"/>
-                </a:solidFill>
-                <a:latin typeface="Archivo"/>
-              </a:rPr>
-              <a:t>E</a:t>
-            </a:r>
-            <a:r>
-              <a:rPr sz="6600" b="1" i="1">
-                <a:solidFill>
-                  <a:srgbClr val="B8862B"/>
-                </a:solidFill>
-                <a:latin typeface="Archivo"/>
-              </a:rPr>
-              <a:t>S</a:t>
+              <a:t>CHEZ MOI, DÈS LUNDI ?</a:t>
             </a:r>
           </a:p>
         </p:txBody>
@@ -6359,7 +7573,7 @@
         <p:spPr>
           <a:xfrm>
             <a:off x="812800" y="812800"/>
-            <a:ext cx="10566400" cy="5232400"/>
+            <a:ext cx="10566400" cy="698500"/>
           </a:xfrm>
           <a:prstGeom prst="rect">
             <a:avLst/>
@@ -6367,65 +7581,205 @@
           <a:noFill/>
         </p:spPr>
         <p:txBody>
-          <a:bodyPr wrap="square" lIns="0" rIns="0" tIns="0" bIns="0" anchor="ctr">
+          <a:bodyPr wrap="square" lIns="0" rIns="0" tIns="0" bIns="0" anchor="t">
             <a:spAutoFit/>
           </a:bodyPr>
           <a:lstStyle/>
           <a:p>
-            <a:pPr algn="ctr">
+            <a:pPr algn="l">
               <a:lnSpc>
-                <a:spcPct val="134000"/>
+                <a:spcPct val="114000"/>
+              </a:lnSpc>
+            </a:pPr>
+            <a:r>
+              <a:rPr sz="2000" b="1" i="1">
+                <a:solidFill>
+                  <a:srgbClr val="FFFFFF"/>
+                </a:solidFill>
+                <a:latin typeface="Archivo"/>
+              </a:rPr>
+              <a:t>LES SIX AXES, ET L'ACTION QUI VA AVEC</a:t>
+            </a:r>
+          </a:p>
+        </p:txBody>
+      </p:sp>
+      <p:sp>
+        <p:nvSpPr>
+          <p:cNvPr id="4" name="Rectangle 3"/>
+          <p:cNvSpPr/>
+          <p:nvPr/>
+        </p:nvSpPr>
+        <p:spPr>
+          <a:xfrm>
+            <a:off x="812800" y="1879600"/>
+            <a:ext cx="1143000" cy="25400"/>
+          </a:xfrm>
+          <a:prstGeom prst="rect">
+            <a:avLst/>
+          </a:prstGeom>
+          <a:solidFill>
+            <a:srgbClr val="E3A94F"/>
+          </a:solidFill>
+          <a:ln>
+            <a:noFill/>
+          </a:ln>
+          <a:effectLst/>
+        </p:spPr>
+        <p:style>
+          <a:lnRef idx="1">
+            <a:schemeClr val="accent1"/>
+          </a:lnRef>
+          <a:fillRef idx="3">
+            <a:schemeClr val="accent1"/>
+          </a:fillRef>
+          <a:effectRef idx="2">
+            <a:schemeClr val="accent1"/>
+          </a:effectRef>
+          <a:fontRef idx="minor">
+            <a:schemeClr val="lt1"/>
+          </a:fontRef>
+        </p:style>
+        <p:txBody>
+          <a:bodyPr rtlCol="0" anchor="ctr"/>
+          <a:lstStyle/>
+          <a:p>
+            <a:pPr algn="ctr"/>
+          </a:p>
+        </p:txBody>
+      </p:sp>
+      <p:sp>
+        <p:nvSpPr>
+          <p:cNvPr id="5" name="TextBox 4"/>
+          <p:cNvSpPr txBox="1"/>
+          <p:nvPr/>
+        </p:nvSpPr>
+        <p:spPr>
+          <a:xfrm>
+            <a:off x="812800" y="2222500"/>
+            <a:ext cx="10566400" cy="3822700"/>
+          </a:xfrm>
+          <a:prstGeom prst="rect">
+            <a:avLst/>
+          </a:prstGeom>
+          <a:noFill/>
+        </p:spPr>
+        <p:txBody>
+          <a:bodyPr wrap="square" lIns="0" rIns="0" tIns="0" bIns="0" anchor="t">
+            <a:spAutoFit/>
+          </a:bodyPr>
+          <a:lstStyle/>
+          <a:p>
+            <a:pPr algn="l">
+              <a:lnSpc>
+                <a:spcPct val="142000"/>
               </a:lnSpc>
               <a:spcAft>
-                <a:spcPts val="900"/>
+                <a:spcPts val="600"/>
               </a:spcAft>
             </a:pPr>
             <a:r>
-              <a:rPr sz="2600" b="0" i="0">
+              <a:rPr sz="1600" b="0" i="0">
                 <a:solidFill>
                   <a:srgbClr val="FFFFFF"/>
                 </a:solidFill>
                 <a:latin typeface="Poppins"/>
               </a:rPr>
-              <a:t>Tu es venu chercher des techniques.</a:t>
-            </a:r>
-          </a:p>
-          <a:p>
-            <a:pPr algn="ctr">
+              <a:t>1. La finalité → écris pour quoi tu fais ça, puis ouvre ton agenda</a:t>
+            </a:r>
+          </a:p>
+          <a:p>
+            <a:pPr algn="l">
               <a:lnSpc>
-                <a:spcPct val="134000"/>
+                <a:spcPct val="142000"/>
               </a:lnSpc>
               <a:spcAft>
-                <a:spcPts val="900"/>
+                <a:spcPts val="600"/>
               </a:spcAft>
             </a:pPr>
             <a:r>
-              <a:rPr sz="2600" b="0" i="0">
+              <a:rPr sz="1600" b="0" i="0">
                 <a:solidFill>
                   <a:srgbClr val="FFFFFF"/>
                 </a:solidFill>
                 <a:latin typeface="Poppins"/>
               </a:rPr>
-              <a:t>Tu repars avec une question</a:t>
-            </a:r>
-          </a:p>
-          <a:p>
-            <a:pPr algn="ctr">
+              <a:t>2. La mesure → une ligne non chiffrable, tout en haut du tableau de bord</a:t>
+            </a:r>
+          </a:p>
+          <a:p>
+            <a:pPr algn="l">
               <a:lnSpc>
-                <a:spcPct val="134000"/>
+                <a:spcPct val="142000"/>
               </a:lnSpc>
               <a:spcAft>
-                <a:spcPts val="900"/>
+                <a:spcPts val="600"/>
               </a:spcAft>
             </a:pPr>
             <a:r>
-              <a:rPr sz="2600" b="0" i="0">
-                <a:solidFill>
-                  <a:srgbClr val="E3A94F"/>
+              <a:rPr sz="1600" b="0" i="0">
+                <a:solidFill>
+                  <a:srgbClr val="FFFFFF"/>
                 </a:solidFill>
                 <a:latin typeface="Poppins"/>
               </a:rPr>
-              <a:t>à te poser avant chaque technique.</a:t>
+              <a:t>3. Le profit et le risque → qui perd quoi, si ça tourne mal ?</a:t>
+            </a:r>
+          </a:p>
+          <a:p>
+            <a:pPr algn="l">
+              <a:lnSpc>
+                <a:spcPct val="142000"/>
+              </a:lnSpc>
+              <a:spcAft>
+                <a:spcPts val="600"/>
+              </a:spcAft>
+            </a:pPr>
+            <a:r>
+              <a:rPr sz="1600" b="0" i="0">
+                <a:solidFill>
+                  <a:srgbClr val="FFFFFF"/>
+                </a:solidFill>
+                <a:latin typeface="Poppins"/>
+              </a:rPr>
+              <a:t>4. La croissance et la dette → ce rythme, je le tiens encore dans deux ans ?</a:t>
+            </a:r>
+          </a:p>
+          <a:p>
+            <a:pPr algn="l">
+              <a:lnSpc>
+                <a:spcPct val="142000"/>
+              </a:lnSpc>
+              <a:spcAft>
+                <a:spcPts val="600"/>
+              </a:spcAft>
+            </a:pPr>
+            <a:r>
+              <a:rPr sz="1600" b="0" i="0">
+                <a:solidFill>
+                  <a:srgbClr val="FFFFFF"/>
+                </a:solidFill>
+                <a:latin typeface="Poppins"/>
+              </a:rPr>
+              <a:t>5. La concurrence → recommande un concurrent, publiquement</a:t>
+            </a:r>
+          </a:p>
+          <a:p>
+            <a:pPr algn="l">
+              <a:lnSpc>
+                <a:spcPct val="142000"/>
+              </a:lnSpc>
+              <a:spcAft>
+                <a:spcPts val="600"/>
+              </a:spcAft>
+            </a:pPr>
+            <a:r>
+              <a:rPr sz="1600" b="0" i="0">
+                <a:solidFill>
+                  <a:srgbClr val="FFFFFF"/>
+                </a:solidFill>
+                <a:latin typeface="Poppins"/>
+              </a:rPr>
+              <a:t>6. Le client et l'effet → qu'est-ce que j'installe chez mes clients ?</a:t>
             </a:r>
           </a:p>
         </p:txBody>
@@ -6481,7 +7835,7 @@
         <p:spPr>
           <a:xfrm>
             <a:off x="812800" y="812800"/>
-            <a:ext cx="10566400" cy="698500"/>
+            <a:ext cx="10566400" cy="5232400"/>
           </a:xfrm>
           <a:prstGeom prst="rect">
             <a:avLst/>
@@ -6489,148 +7843,65 @@
           <a:noFill/>
         </p:spPr>
         <p:txBody>
-          <a:bodyPr wrap="square" lIns="0" rIns="0" tIns="0" bIns="0" anchor="t">
+          <a:bodyPr wrap="square" lIns="0" rIns="0" tIns="0" bIns="0" anchor="ctr">
             <a:spAutoFit/>
           </a:bodyPr>
           <a:lstStyle/>
           <a:p>
-            <a:pPr algn="l">
+            <a:pPr algn="ctr">
               <a:lnSpc>
-                <a:spcPct val="114000"/>
-              </a:lnSpc>
-            </a:pPr>
-            <a:r>
-              <a:rPr sz="2000" b="1" i="1">
-                <a:solidFill>
-                  <a:srgbClr val="FFFFFF"/>
-                </a:solidFill>
-                <a:latin typeface="Archivo"/>
-              </a:rPr>
-              <a:t>TROIS QUESTIONS, SUR TON ACTIVITÉ ET SUR CHACUN DE TES OUTILS</a:t>
-            </a:r>
-          </a:p>
-        </p:txBody>
-      </p:sp>
-      <p:sp>
-        <p:nvSpPr>
-          <p:cNvPr id="4" name="Rectangle 3"/>
-          <p:cNvSpPr/>
-          <p:nvPr/>
-        </p:nvSpPr>
-        <p:spPr>
-          <a:xfrm>
-            <a:off x="812800" y="1879600"/>
-            <a:ext cx="1143000" cy="25400"/>
-          </a:xfrm>
-          <a:prstGeom prst="rect">
-            <a:avLst/>
-          </a:prstGeom>
-          <a:solidFill>
-            <a:srgbClr val="E3A94F"/>
-          </a:solidFill>
-          <a:ln>
-            <a:noFill/>
-          </a:ln>
-          <a:effectLst/>
-        </p:spPr>
-        <p:style>
-          <a:lnRef idx="1">
-            <a:schemeClr val="accent1"/>
-          </a:lnRef>
-          <a:fillRef idx="3">
-            <a:schemeClr val="accent1"/>
-          </a:fillRef>
-          <a:effectRef idx="2">
-            <a:schemeClr val="accent1"/>
-          </a:effectRef>
-          <a:fontRef idx="minor">
-            <a:schemeClr val="lt1"/>
-          </a:fontRef>
-        </p:style>
-        <p:txBody>
-          <a:bodyPr rtlCol="0" anchor="ctr"/>
-          <a:lstStyle/>
-          <a:p>
-            <a:pPr algn="ctr"/>
-          </a:p>
-        </p:txBody>
-      </p:sp>
-      <p:sp>
-        <p:nvSpPr>
-          <p:cNvPr id="5" name="TextBox 4"/>
-          <p:cNvSpPr txBox="1"/>
-          <p:nvPr/>
-        </p:nvSpPr>
-        <p:spPr>
-          <a:xfrm>
-            <a:off x="812800" y="2222500"/>
-            <a:ext cx="10566400" cy="3822700"/>
-          </a:xfrm>
-          <a:prstGeom prst="rect">
-            <a:avLst/>
-          </a:prstGeom>
-          <a:noFill/>
-        </p:spPr>
-        <p:txBody>
-          <a:bodyPr wrap="square" lIns="0" rIns="0" tIns="0" bIns="0" anchor="t">
-            <a:spAutoFit/>
-          </a:bodyPr>
-          <a:lstStyle/>
-          <a:p>
-            <a:pPr algn="l">
-              <a:lnSpc>
-                <a:spcPct val="142000"/>
+                <a:spcPct val="134000"/>
               </a:lnSpc>
               <a:spcAft>
                 <a:spcPts val="900"/>
               </a:spcAft>
             </a:pPr>
             <a:r>
-              <a:rPr sz="1850" b="0" i="0">
-                <a:solidFill>
-                  <a:srgbClr val="E3A94F"/>
+              <a:rPr sz="2600" b="0" i="0">
+                <a:solidFill>
+                  <a:srgbClr val="FFFFFF"/>
                 </a:solidFill>
                 <a:latin typeface="Poppins"/>
               </a:rPr>
-              <a:t>👉 Est-ce que ça crée de la DÉPENDANCE ?</a:t>
-            </a:r>
-          </a:p>
-          <a:p>
-            <a:pPr algn="l">
+              <a:t>Prends-en une.</a:t>
+            </a:r>
+          </a:p>
+          <a:p>
+            <a:pPr algn="ctr">
               <a:lnSpc>
-                <a:spcPct val="142000"/>
+                <a:spcPct val="134000"/>
               </a:lnSpc>
               <a:spcAft>
                 <a:spcPts val="900"/>
               </a:spcAft>
             </a:pPr>
             <a:r>
-              <a:rPr sz="1850" b="0" i="0">
-                <a:solidFill>
-                  <a:srgbClr val="E3A94F"/>
+              <a:rPr sz="2600" b="0" i="0">
+                <a:solidFill>
+                  <a:srgbClr val="FFFFFF"/>
                 </a:solidFill>
                 <a:latin typeface="Poppins"/>
               </a:rPr>
-              <a:t>👉 Est-ce que ça crée de l'AVEUGLEMENT ?</a:t>
-            </a:r>
-          </a:p>
-          <a:p>
-            <a:pPr algn="l">
+              <a:t>Une seule.</a:t>
+            </a:r>
+          </a:p>
+          <a:p>
+            <a:pPr algn="ctr">
               <a:lnSpc>
-                <a:spcPct val="142000"/>
+                <a:spcPct val="134000"/>
               </a:lnSpc>
               <a:spcAft>
                 <a:spcPts val="900"/>
               </a:spcAft>
             </a:pPr>
             <a:r>
-              <a:rPr sz="1850" b="0" i="0">
+              <a:rPr sz="2600" b="0" i="0">
                 <a:solidFill>
                   <a:srgbClr val="E3A94F"/>
                 </a:solidFill>
                 <a:latin typeface="Poppins"/>
               </a:rPr>
-              <a:t>👉 Est-ce que ça crée de l'EXCÈS ?</a:t>
+              <a:t>Celle qui t'a le plus gêné ce soir.</a:t>
             </a:r>
           </a:p>
         </p:txBody>
@@ -6653,20 +7924,12 @@
         <p:nvPr/>
       </p:nvGrpSpPr>
       <p:grpSpPr/>
-      <p:pic>
-        <p:nvPicPr>
-          <p:cNvPr id="2" name="Picture 1" descr="bg.png"/>
-          <p:cNvPicPr>
-            <a:picLocks noChangeAspect="1"/>
-          </p:cNvPicPr>
+      <p:sp>
+        <p:nvSpPr>
+          <p:cNvPr id="2" name="Rectangle 1"/>
+          <p:cNvSpPr/>
           <p:nvPr/>
-        </p:nvPicPr>
-        <p:blipFill>
-          <a:blip r:embed="rId2"/>
-          <a:stretch>
-            <a:fillRect/>
-          </a:stretch>
-        </p:blipFill>
+        </p:nvSpPr>
         <p:spPr>
           <a:xfrm>
             <a:off x="0" y="0"/>
@@ -6675,8 +7938,36 @@
           <a:prstGeom prst="rect">
             <a:avLst/>
           </a:prstGeom>
-        </p:spPr>
-      </p:pic>
+          <a:solidFill>
+            <a:srgbClr val="E3A94F"/>
+          </a:solidFill>
+          <a:ln>
+            <a:noFill/>
+          </a:ln>
+          <a:effectLst/>
+        </p:spPr>
+        <p:style>
+          <a:lnRef idx="1">
+            <a:schemeClr val="accent1"/>
+          </a:lnRef>
+          <a:fillRef idx="3">
+            <a:schemeClr val="accent1"/>
+          </a:fillRef>
+          <a:effectRef idx="2">
+            <a:schemeClr val="accent1"/>
+          </a:effectRef>
+          <a:fontRef idx="minor">
+            <a:schemeClr val="lt1"/>
+          </a:fontRef>
+        </p:style>
+        <p:txBody>
+          <a:bodyPr rtlCol="0" anchor="ctr"/>
+          <a:lstStyle/>
+          <a:p>
+            <a:pPr algn="ctr"/>
+          </a:p>
+        </p:txBody>
+      </p:sp>
       <p:sp>
         <p:nvSpPr>
           <p:cNvPr id="3" name="TextBox 2"/>
@@ -6685,8 +7976,8 @@
         </p:nvSpPr>
         <p:spPr>
           <a:xfrm>
-            <a:off x="812800" y="812800"/>
-            <a:ext cx="10566400" cy="5232400"/>
+            <a:off x="952500" y="762000"/>
+            <a:ext cx="10287000" cy="952500"/>
           </a:xfrm>
           <a:prstGeom prst="rect">
             <a:avLst/>
@@ -6694,65 +7985,231 @@
           <a:noFill/>
         </p:spPr>
         <p:txBody>
-          <a:bodyPr wrap="square" lIns="0" rIns="0" tIns="0" bIns="0" anchor="ctr">
+          <a:bodyPr wrap="square" lIns="0" rIns="0" tIns="0" bIns="0" anchor="t">
             <a:spAutoFit/>
           </a:bodyPr>
           <a:lstStyle/>
           <a:p>
-            <a:pPr algn="ctr">
+            <a:pPr algn="l"/>
+            <a:r>
+              <a:rPr sz="1600" b="1" i="0">
+                <a:solidFill>
+                  <a:srgbClr val="141414"/>
+                </a:solidFill>
+                <a:latin typeface="Poppins"/>
+              </a:rPr>
+              <a:t>À INSÉRER DANS TON DECK</a:t>
+            </a:r>
+          </a:p>
+        </p:txBody>
+      </p:sp>
+      <p:sp>
+        <p:nvSpPr>
+          <p:cNvPr id="4" name="TextBox 3"/>
+          <p:cNvSpPr txBox="1"/>
+          <p:nvPr/>
+        </p:nvSpPr>
+        <p:spPr>
+          <a:xfrm>
+            <a:off x="952500" y="1587500"/>
+            <a:ext cx="10287000" cy="1397000"/>
+          </a:xfrm>
+          <a:prstGeom prst="rect">
+            <a:avLst/>
+          </a:prstGeom>
+          <a:noFill/>
+        </p:spPr>
+        <p:txBody>
+          <a:bodyPr wrap="square" lIns="0" rIns="0" tIns="0" bIns="0" anchor="t">
+            <a:spAutoFit/>
+          </a:bodyPr>
+          <a:lstStyle/>
+          <a:p>
+            <a:pPr algn="l">
+              <a:lnSpc>
+                <a:spcPct val="106000"/>
+              </a:lnSpc>
+            </a:pPr>
+            <a:r>
+              <a:rPr sz="4200" b="1" i="1">
+                <a:solidFill>
+                  <a:srgbClr val="141414"/>
+                </a:solidFill>
+                <a:latin typeface="Archivo"/>
+              </a:rPr>
+              <a:t>ET MES OUTILS ACTUELS ?</a:t>
+            </a:r>
+          </a:p>
+        </p:txBody>
+      </p:sp>
+      <p:sp>
+        <p:nvSpPr>
+          <p:cNvPr id="5" name="Rectangle 4"/>
+          <p:cNvSpPr/>
+          <p:nvPr/>
+        </p:nvSpPr>
+        <p:spPr>
+          <a:xfrm>
+            <a:off x="952500" y="3175000"/>
+            <a:ext cx="1651000" cy="50800"/>
+          </a:xfrm>
+          <a:prstGeom prst="rect">
+            <a:avLst/>
+          </a:prstGeom>
+          <a:solidFill>
+            <a:srgbClr val="141414"/>
+          </a:solidFill>
+          <a:ln>
+            <a:noFill/>
+          </a:ln>
+          <a:effectLst/>
+        </p:spPr>
+        <p:style>
+          <a:lnRef idx="1">
+            <a:schemeClr val="accent1"/>
+          </a:lnRef>
+          <a:fillRef idx="3">
+            <a:schemeClr val="accent1"/>
+          </a:fillRef>
+          <a:effectRef idx="2">
+            <a:schemeClr val="accent1"/>
+          </a:effectRef>
+          <a:fontRef idx="minor">
+            <a:schemeClr val="lt1"/>
+          </a:fontRef>
+        </p:style>
+        <p:txBody>
+          <a:bodyPr rtlCol="0" anchor="ctr"/>
+          <a:lstStyle/>
+          <a:p>
+            <a:pPr algn="ctr"/>
+          </a:p>
+        </p:txBody>
+      </p:sp>
+      <p:sp>
+        <p:nvSpPr>
+          <p:cNvPr id="6" name="TextBox 5"/>
+          <p:cNvSpPr txBox="1"/>
+          <p:nvPr/>
+        </p:nvSpPr>
+        <p:spPr>
+          <a:xfrm>
+            <a:off x="952500" y="3556000"/>
+            <a:ext cx="10287000" cy="2095500"/>
+          </a:xfrm>
+          <a:prstGeom prst="rect">
+            <a:avLst/>
+          </a:prstGeom>
+          <a:noFill/>
+        </p:spPr>
+        <p:txBody>
+          <a:bodyPr wrap="square" lIns="0" rIns="0" tIns="0" bIns="0" anchor="t">
+            <a:spAutoFit/>
+          </a:bodyPr>
+          <a:lstStyle/>
+          <a:p>
+            <a:pPr algn="l">
+              <a:spcAft>
+                <a:spcPts val="300"/>
+              </a:spcAft>
+            </a:pPr>
+            <a:r>
+              <a:rPr sz="1500" b="1" i="0">
+                <a:solidFill>
+                  <a:srgbClr val="141414"/>
+                </a:solidFill>
+                <a:latin typeface="Poppins"/>
+              </a:rPr>
+              <a:t>APRÈS ta slide</a:t>
+            </a:r>
+          </a:p>
+          <a:p>
+            <a:pPr algn="l">
               <a:lnSpc>
                 <a:spcPct val="134000"/>
               </a:lnSpc>
               <a:spcAft>
-                <a:spcPts val="900"/>
+                <a:spcPts val="1300"/>
               </a:spcAft>
             </a:pPr>
             <a:r>
-              <a:rPr sz="2600" b="0" i="0">
-                <a:solidFill>
-                  <a:srgbClr val="FFFFFF"/>
+              <a:rPr sz="1900" b="0" i="0">
+                <a:solidFill>
+                  <a:srgbClr val="141414"/>
                 </a:solidFill>
                 <a:latin typeface="Poppins"/>
               </a:rPr>
-              <a:t>Trois questions.</a:t>
-            </a:r>
-          </a:p>
-          <a:p>
-            <a:pPr algn="ctr">
+              <a:t>« D'accord. Et demain, je fais quoi de tout ce que j'ai déjà appris ? »</a:t>
+            </a:r>
+          </a:p>
+          <a:p>
+            <a:pPr algn="l">
+              <a:spcAft>
+                <a:spcPts val="300"/>
+              </a:spcAft>
+            </a:pPr>
+            <a:r>
+              <a:rPr sz="1500" b="1" i="0">
+                <a:solidFill>
+                  <a:srgbClr val="141414"/>
+                </a:solidFill>
+                <a:latin typeface="Poppins"/>
+              </a:rPr>
+              <a:t>REMPLACE</a:t>
+            </a:r>
+          </a:p>
+          <a:p>
+            <a:pPr algn="l">
               <a:lnSpc>
                 <a:spcPct val="134000"/>
               </a:lnSpc>
               <a:spcAft>
-                <a:spcPts val="900"/>
+                <a:spcPts val="1300"/>
               </a:spcAft>
             </a:pPr>
             <a:r>
-              <a:rPr sz="2600" b="0" i="0">
-                <a:solidFill>
-                  <a:srgbClr val="FFFFFF"/>
+              <a:rPr sz="1900" b="0" i="0">
+                <a:solidFill>
+                  <a:srgbClr val="141414"/>
                 </a:solidFill>
                 <a:latin typeface="Poppins"/>
               </a:rPr>
-              <a:t>Aucune compétence religieuse nécessaire.</a:t>
-            </a:r>
-          </a:p>
-          <a:p>
-            <a:pPr algn="ctr">
-              <a:lnSpc>
-                <a:spcPct val="134000"/>
-              </a:lnSpc>
-              <a:spcAft>
-                <a:spcPts val="900"/>
-              </a:spcAft>
-            </a:pPr>
-            <a:r>
-              <a:rPr sz="2600" b="0" i="0">
-                <a:solidFill>
-                  <a:srgbClr val="E3A94F"/>
+              <a:t>« ALORS ON JETTE TOUT ? » et tout le bloc Ghazâlî / Bennabi / méthode en deux passes</a:t>
+            </a:r>
+          </a:p>
+        </p:txBody>
+      </p:sp>
+      <p:sp>
+        <p:nvSpPr>
+          <p:cNvPr id="7" name="TextBox 6"/>
+          <p:cNvSpPr txBox="1"/>
+          <p:nvPr/>
+        </p:nvSpPr>
+        <p:spPr>
+          <a:xfrm>
+            <a:off x="952500" y="5905500"/>
+            <a:ext cx="10287000" cy="444500"/>
+          </a:xfrm>
+          <a:prstGeom prst="rect">
+            <a:avLst/>
+          </a:prstGeom>
+          <a:noFill/>
+        </p:spPr>
+        <p:txBody>
+          <a:bodyPr wrap="square" lIns="0" rIns="0" tIns="0" bIns="0" anchor="t">
+            <a:spAutoFit/>
+          </a:bodyPr>
+          <a:lstStyle/>
+          <a:p>
+            <a:pPr algn="l"/>
+            <a:r>
+              <a:rPr sz="1400" b="0" i="1">
+                <a:solidFill>
+                  <a:srgbClr val="141414"/>
                 </a:solidFill>
                 <a:latin typeface="Poppins"/>
               </a:rPr>
-              <a:t>Tu peux les poser dès lundi matin.</a:t>
+              <a:t>Les 4 slides qui suivent forment ce bloc. Cette page-ci ne va pas dans le deck.</a:t>
             </a:r>
           </a:p>
         </p:txBody>
@@ -6823,58 +8280,17 @@
           <a:p>
             <a:pPr algn="ctr">
               <a:lnSpc>
-                <a:spcPct val="134000"/>
+                <a:spcPct val="106000"/>
               </a:lnSpc>
-              <a:spcAft>
-                <a:spcPts val="900"/>
-              </a:spcAft>
             </a:pPr>
             <a:r>
-              <a:rPr sz="2600" b="0" i="0">
+              <a:rPr sz="5000" b="1" i="1">
                 <a:solidFill>
                   <a:srgbClr val="FFFFFF"/>
                 </a:solidFill>
-                <a:latin typeface="Poppins"/>
-              </a:rPr>
-              <a:t>Halal répond à : est-ce que j'ai le droit ?</a:t>
-            </a:r>
-          </a:p>
-          <a:p>
-            <a:pPr algn="ctr">
-              <a:lnSpc>
-                <a:spcPct val="134000"/>
-              </a:lnSpc>
-              <a:spcAft>
-                <a:spcPts val="900"/>
-              </a:spcAft>
-            </a:pPr>
-            <a:r>
-              <a:rPr sz="2600" b="0" i="0">
-                <a:solidFill>
-                  <a:srgbClr val="FFFFFF"/>
-                </a:solidFill>
-                <a:latin typeface="Poppins"/>
-              </a:rPr>
-              <a:t>Ça ne répond pas à :</a:t>
-            </a:r>
-          </a:p>
-          <a:p>
-            <a:pPr algn="ctr">
-              <a:lnSpc>
-                <a:spcPct val="134000"/>
-              </a:lnSpc>
-              <a:spcAft>
-                <a:spcPts val="900"/>
-              </a:spcAft>
-            </a:pPr>
-            <a:r>
-              <a:rPr sz="2600" b="0" i="0">
-                <a:solidFill>
-                  <a:srgbClr val="E3A94F"/>
-                </a:solidFill>
-                <a:latin typeface="Poppins"/>
-              </a:rPr>
-              <a:t>est-ce que c'est ce que je dois faire ?</a:t>
+                <a:latin typeface="Archivo"/>
+              </a:rPr>
+              <a:t>ET TOUT CE QUE J'AI DÉJÀ APPRIS ?</a:t>
             </a:r>
           </a:p>
         </p:txBody>
@@ -6897,79 +8313,16 @@
         <p:nvPr/>
       </p:nvGrpSpPr>
       <p:grpSpPr/>
-      <p:pic>
-        <p:nvPicPr>
-          <p:cNvPr id="2" name="Picture 1" descr="bg.png"/>
-          <p:cNvPicPr>
-            <a:picLocks noChangeAspect="1"/>
-          </p:cNvPicPr>
+      <p:sp>
+        <p:nvSpPr>
+          <p:cNvPr id="2" name="Rectangle 1"/>
+          <p:cNvSpPr/>
           <p:nvPr/>
-        </p:nvPicPr>
-        <p:blipFill>
-          <a:blip r:embed="rId2"/>
-          <a:stretch>
-            <a:fillRect/>
-          </a:stretch>
-        </p:blipFill>
+        </p:nvSpPr>
         <p:spPr>
           <a:xfrm>
             <a:off x="0" y="0"/>
             <a:ext cx="12192000" cy="6858000"/>
-          </a:xfrm>
-          <a:prstGeom prst="rect">
-            <a:avLst/>
-          </a:prstGeom>
-        </p:spPr>
-      </p:pic>
-      <p:sp>
-        <p:nvSpPr>
-          <p:cNvPr id="3" name="TextBox 2"/>
-          <p:cNvSpPr txBox="1"/>
-          <p:nvPr/>
-        </p:nvSpPr>
-        <p:spPr>
-          <a:xfrm>
-            <a:off x="812800" y="812800"/>
-            <a:ext cx="10566400" cy="698500"/>
-          </a:xfrm>
-          <a:prstGeom prst="rect">
-            <a:avLst/>
-          </a:prstGeom>
-          <a:noFill/>
-        </p:spPr>
-        <p:txBody>
-          <a:bodyPr wrap="square" lIns="0" rIns="0" tIns="0" bIns="0" anchor="t">
-            <a:spAutoFit/>
-          </a:bodyPr>
-          <a:lstStyle/>
-          <a:p>
-            <a:pPr algn="l">
-              <a:lnSpc>
-                <a:spcPct val="114000"/>
-              </a:lnSpc>
-            </a:pPr>
-            <a:r>
-              <a:rPr sz="2000" b="1" i="1">
-                <a:solidFill>
-                  <a:srgbClr val="FFFFFF"/>
-                </a:solidFill>
-                <a:latin typeface="Archivo"/>
-              </a:rPr>
-              <a:t>QUATRE PARTIES</a:t>
-            </a:r>
-          </a:p>
-        </p:txBody>
-      </p:sp>
-      <p:sp>
-        <p:nvSpPr>
-          <p:cNvPr id="4" name="Rectangle 3"/>
-          <p:cNvSpPr/>
-          <p:nvPr/>
-        </p:nvSpPr>
-        <p:spPr>
-          <a:xfrm>
-            <a:off x="812800" y="1879600"/>
-            <a:ext cx="1143000" cy="25400"/>
           </a:xfrm>
           <a:prstGeom prst="rect">
             <a:avLst/>
@@ -7006,14 +8359,14 @@
       </p:sp>
       <p:sp>
         <p:nvSpPr>
-          <p:cNvPr id="5" name="TextBox 4"/>
+          <p:cNvPr id="3" name="TextBox 2"/>
           <p:cNvSpPr txBox="1"/>
           <p:nvPr/>
         </p:nvSpPr>
         <p:spPr>
           <a:xfrm>
-            <a:off x="812800" y="2222500"/>
-            <a:ext cx="10566400" cy="3822700"/>
+            <a:off x="952500" y="762000"/>
+            <a:ext cx="10287000" cy="952500"/>
           </a:xfrm>
           <a:prstGeom prst="rect">
             <a:avLst/>
@@ -7026,79 +8379,226 @@
           </a:bodyPr>
           <a:lstStyle/>
           <a:p>
+            <a:pPr algn="l"/>
+            <a:r>
+              <a:rPr sz="1600" b="1" i="0">
+                <a:solidFill>
+                  <a:srgbClr val="141414"/>
+                </a:solidFill>
+                <a:latin typeface="Poppins"/>
+              </a:rPr>
+              <a:t>À INSÉRER DANS TON DECK</a:t>
+            </a:r>
+          </a:p>
+        </p:txBody>
+      </p:sp>
+      <p:sp>
+        <p:nvSpPr>
+          <p:cNvPr id="4" name="TextBox 3"/>
+          <p:cNvSpPr txBox="1"/>
+          <p:nvPr/>
+        </p:nvSpPr>
+        <p:spPr>
+          <a:xfrm>
+            <a:off x="952500" y="1587500"/>
+            <a:ext cx="10287000" cy="1397000"/>
+          </a:xfrm>
+          <a:prstGeom prst="rect">
+            <a:avLst/>
+          </a:prstGeom>
+          <a:noFill/>
+        </p:spPr>
+        <p:txBody>
+          <a:bodyPr wrap="square" lIns="0" rIns="0" tIns="0" bIns="0" anchor="t">
+            <a:spAutoFit/>
+          </a:bodyPr>
+          <a:lstStyle/>
+          <a:p>
             <a:pPr algn="l">
               <a:lnSpc>
-                <a:spcPct val="142000"/>
+                <a:spcPct val="106000"/>
+              </a:lnSpc>
+            </a:pPr>
+            <a:r>
+              <a:rPr sz="4200" b="1" i="1">
+                <a:solidFill>
+                  <a:srgbClr val="141414"/>
+                </a:solidFill>
+                <a:latin typeface="Archivo"/>
+              </a:rPr>
+              <a:t>LE PLAN DE LA SOIRÉE</a:t>
+            </a:r>
+          </a:p>
+        </p:txBody>
+      </p:sp>
+      <p:sp>
+        <p:nvSpPr>
+          <p:cNvPr id="5" name="Rectangle 4"/>
+          <p:cNvSpPr/>
+          <p:nvPr/>
+        </p:nvSpPr>
+        <p:spPr>
+          <a:xfrm>
+            <a:off x="952500" y="3175000"/>
+            <a:ext cx="1651000" cy="50800"/>
+          </a:xfrm>
+          <a:prstGeom prst="rect">
+            <a:avLst/>
+          </a:prstGeom>
+          <a:solidFill>
+            <a:srgbClr val="141414"/>
+          </a:solidFill>
+          <a:ln>
+            <a:noFill/>
+          </a:ln>
+          <a:effectLst/>
+        </p:spPr>
+        <p:style>
+          <a:lnRef idx="1">
+            <a:schemeClr val="accent1"/>
+          </a:lnRef>
+          <a:fillRef idx="3">
+            <a:schemeClr val="accent1"/>
+          </a:fillRef>
+          <a:effectRef idx="2">
+            <a:schemeClr val="accent1"/>
+          </a:effectRef>
+          <a:fontRef idx="minor">
+            <a:schemeClr val="lt1"/>
+          </a:fontRef>
+        </p:style>
+        <p:txBody>
+          <a:bodyPr rtlCol="0" anchor="ctr"/>
+          <a:lstStyle/>
+          <a:p>
+            <a:pPr algn="ctr"/>
+          </a:p>
+        </p:txBody>
+      </p:sp>
+      <p:sp>
+        <p:nvSpPr>
+          <p:cNvPr id="6" name="TextBox 5"/>
+          <p:cNvSpPr txBox="1"/>
+          <p:nvPr/>
+        </p:nvSpPr>
+        <p:spPr>
+          <a:xfrm>
+            <a:off x="952500" y="3556000"/>
+            <a:ext cx="10287000" cy="2095500"/>
+          </a:xfrm>
+          <a:prstGeom prst="rect">
+            <a:avLst/>
+          </a:prstGeom>
+          <a:noFill/>
+        </p:spPr>
+        <p:txBody>
+          <a:bodyPr wrap="square" lIns="0" rIns="0" tIns="0" bIns="0" anchor="t">
+            <a:spAutoFit/>
+          </a:bodyPr>
+          <a:lstStyle/>
+          <a:p>
+            <a:pPr algn="l">
+              <a:spcAft>
+                <a:spcPts val="300"/>
+              </a:spcAft>
+            </a:pPr>
+            <a:r>
+              <a:rPr sz="1500" b="1" i="0">
+                <a:solidFill>
+                  <a:srgbClr val="141414"/>
+                </a:solidFill>
+                <a:latin typeface="Poppins"/>
+              </a:rPr>
+              <a:t>APRÈS ta slide</a:t>
+            </a:r>
+          </a:p>
+          <a:p>
+            <a:pPr algn="l">
+              <a:lnSpc>
+                <a:spcPct val="134000"/>
               </a:lnSpc>
               <a:spcAft>
-                <a:spcPts val="900"/>
+                <a:spcPts val="1300"/>
               </a:spcAft>
             </a:pPr>
             <a:r>
-              <a:rPr sz="1850" b="0" i="0">
-                <a:solidFill>
-                  <a:srgbClr val="FFFFFF"/>
+              <a:rPr sz="1900" b="0" i="0">
+                <a:solidFill>
+                  <a:srgbClr val="141414"/>
                 </a:solidFill>
                 <a:latin typeface="Poppins"/>
               </a:rPr>
-              <a:t>1. Poser le cadre — c'est quoi un paradigme, et pourquoi le tien n'est pas le tien</a:t>
+              <a:t>« Et à la fin : un QUIZ. Avec des cadeaux pour ceux qui répondent. »</a:t>
+            </a:r>
+          </a:p>
+          <a:p>
+            <a:pPr algn="l">
+              <a:spcAft>
+                <a:spcPts val="300"/>
+              </a:spcAft>
+            </a:pPr>
+            <a:r>
+              <a:rPr sz="1500" b="1" i="0">
+                <a:solidFill>
+                  <a:srgbClr val="141414"/>
+                </a:solidFill>
+                <a:latin typeface="Poppins"/>
+              </a:rPr>
+              <a:t>AVANT ta slide</a:t>
             </a:r>
           </a:p>
           <a:p>
             <a:pPr algn="l">
               <a:lnSpc>
-                <a:spcPct val="142000"/>
+                <a:spcPct val="134000"/>
               </a:lnSpc>
               <a:spcAft>
-                <a:spcPts val="900"/>
+                <a:spcPts val="1300"/>
               </a:spcAft>
             </a:pPr>
             <a:r>
-              <a:rPr sz="1850" b="0" i="0">
-                <a:solidFill>
-                  <a:srgbClr val="FFFFFF"/>
+              <a:rPr sz="1900" b="0" i="0">
+                <a:solidFill>
+                  <a:srgbClr val="141414"/>
                 </a:solidFill>
                 <a:latin typeface="Poppins"/>
               </a:rPr>
-              <a:t>2. Les six axes — où ça se voit dans ton agenda</a:t>
-            </a:r>
-          </a:p>
-          <a:p>
-            <a:pPr algn="l">
-              <a:lnSpc>
-                <a:spcPct val="142000"/>
-              </a:lnSpc>
-              <a:spcAft>
-                <a:spcPts val="900"/>
-              </a:spcAft>
-            </a:pPr>
-            <a:r>
-              <a:rPr sz="1850" b="0" i="0">
-                <a:solidFill>
-                  <a:srgbClr val="FFFFFF"/>
+              <a:t>« PARTIE 1 / POSER LE CADRE »</a:t>
+            </a:r>
+          </a:p>
+        </p:txBody>
+      </p:sp>
+      <p:sp>
+        <p:nvSpPr>
+          <p:cNvPr id="7" name="TextBox 6"/>
+          <p:cNvSpPr txBox="1"/>
+          <p:nvPr/>
+        </p:nvSpPr>
+        <p:spPr>
+          <a:xfrm>
+            <a:off x="952500" y="5905500"/>
+            <a:ext cx="10287000" cy="444500"/>
+          </a:xfrm>
+          <a:prstGeom prst="rect">
+            <a:avLst/>
+          </a:prstGeom>
+          <a:noFill/>
+        </p:spPr>
+        <p:txBody>
+          <a:bodyPr wrap="square" lIns="0" rIns="0" tIns="0" bIns="0" anchor="t">
+            <a:spAutoFit/>
+          </a:bodyPr>
+          <a:lstStyle/>
+          <a:p>
+            <a:pPr algn="l"/>
+            <a:r>
+              <a:rPr sz="1400" b="0" i="1">
+                <a:solidFill>
+                  <a:srgbClr val="141414"/>
                 </a:solidFill>
                 <a:latin typeface="Poppins"/>
               </a:rPr>
-              <a:t>3. Les compétences transversales — ce qu'il te manque vraiment</a:t>
-            </a:r>
-          </a:p>
-          <a:p>
-            <a:pPr algn="l">
-              <a:lnSpc>
-                <a:spcPct val="142000"/>
-              </a:lnSpc>
-              <a:spcAft>
-                <a:spcPts val="900"/>
-              </a:spcAft>
-            </a:pPr>
-            <a:r>
-              <a:rPr sz="1850" b="0" i="0">
-                <a:solidFill>
-                  <a:srgbClr val="FFFFFF"/>
-                </a:solidFill>
-                <a:latin typeface="Poppins"/>
-              </a:rPr>
-              <a:t>4. La méthodologie — comment on travaille ça ensemble</a:t>
+              <a:t>Les 2 slides qui suivent forment ce bloc. Cette page-ci ne va pas dans le deck.</a:t>
             </a:r>
           </a:p>
         </p:txBody>
@@ -7147,58 +8647,14 @@
       </p:pic>
       <p:sp>
         <p:nvSpPr>
-          <p:cNvPr id="3" name="Rectangle 2"/>
-          <p:cNvSpPr/>
-          <p:nvPr/>
-        </p:nvSpPr>
-        <p:spPr>
-          <a:xfrm>
-            <a:off x="1879600" y="2884170"/>
-            <a:ext cx="8432800" cy="1089660"/>
-          </a:xfrm>
-          <a:prstGeom prst="rect">
-            <a:avLst/>
-          </a:prstGeom>
-          <a:solidFill>
-            <a:srgbClr val="FFFFFF"/>
-          </a:solidFill>
-          <a:ln>
-            <a:noFill/>
-          </a:ln>
-          <a:effectLst/>
-        </p:spPr>
-        <p:style>
-          <a:lnRef idx="1">
-            <a:schemeClr val="accent1"/>
-          </a:lnRef>
-          <a:fillRef idx="3">
-            <a:schemeClr val="accent1"/>
-          </a:fillRef>
-          <a:effectRef idx="2">
-            <a:schemeClr val="accent1"/>
-          </a:effectRef>
-          <a:fontRef idx="minor">
-            <a:schemeClr val="lt1"/>
-          </a:fontRef>
-        </p:style>
-        <p:txBody>
-          <a:bodyPr rtlCol="0" anchor="ctr"/>
-          <a:lstStyle/>
-          <a:p>
-            <a:pPr algn="ctr"/>
-          </a:p>
-        </p:txBody>
-      </p:sp>
-      <p:sp>
-        <p:nvSpPr>
-          <p:cNvPr id="4" name="TextBox 3"/>
+          <p:cNvPr id="3" name="TextBox 2"/>
           <p:cNvSpPr txBox="1"/>
           <p:nvPr/>
         </p:nvSpPr>
         <p:spPr>
           <a:xfrm>
-            <a:off x="2070100" y="2884170"/>
-            <a:ext cx="8051800" cy="1089660"/>
+            <a:off x="812800" y="812800"/>
+            <a:ext cx="10566400" cy="5232400"/>
           </a:xfrm>
           <a:prstGeom prst="rect">
             <a:avLst/>
@@ -7213,143 +8669,39 @@
           <a:p>
             <a:pPr algn="ctr">
               <a:lnSpc>
-                <a:spcPct val="100000"/>
+                <a:spcPct val="134000"/>
               </a:lnSpc>
+              <a:spcAft>
+                <a:spcPts val="900"/>
+              </a:spcAft>
             </a:pPr>
             <a:r>
-              <a:rPr sz="6600" b="1" i="1">
-                <a:solidFill>
-                  <a:srgbClr val="131313"/>
-                </a:solidFill>
-                <a:latin typeface="Archivo"/>
-              </a:rPr>
-              <a:t>S</a:t>
-            </a:r>
-            <a:r>
-              <a:rPr sz="6600" b="1" i="1">
-                <a:solidFill>
-                  <a:srgbClr val="131313"/>
-                </a:solidFill>
-                <a:latin typeface="Archivo"/>
-              </a:rPr>
-              <a:t>O</a:t>
-            </a:r>
-            <a:r>
-              <a:rPr sz="6600" b="1" i="1">
-                <a:solidFill>
-                  <a:srgbClr val="131313"/>
-                </a:solidFill>
-                <a:latin typeface="Archivo"/>
-              </a:rPr>
-              <a:t>Y</a:t>
-            </a:r>
-            <a:r>
-              <a:rPr sz="6600" b="1" i="1">
-                <a:solidFill>
-                  <a:srgbClr val="131313"/>
-                </a:solidFill>
-                <a:latin typeface="Archivo"/>
-              </a:rPr>
-              <a:t>O</a:t>
-            </a:r>
-            <a:r>
-              <a:rPr sz="6600" b="1" i="1">
-                <a:solidFill>
-                  <a:srgbClr val="201C15"/>
-                </a:solidFill>
-                <a:latin typeface="Archivo"/>
-              </a:rPr>
-              <a:t>N</a:t>
-            </a:r>
-            <a:r>
-              <a:rPr sz="6600" b="1" i="1">
-                <a:solidFill>
-                  <a:srgbClr val="302717"/>
-                </a:solidFill>
-                <a:latin typeface="Archivo"/>
-              </a:rPr>
-              <a:t>S</a:t>
-            </a:r>
-            <a:r>
-              <a:rPr sz="6600" b="1" i="1">
-                <a:solidFill>
-                  <a:srgbClr val="3F3119"/>
-                </a:solidFill>
-                <a:latin typeface="Archivo"/>
-              </a:rPr>
-              <a:t> </a:t>
-            </a:r>
-            <a:r>
-              <a:rPr sz="6600" b="1" i="1">
-                <a:solidFill>
-                  <a:srgbClr val="4E3C1B"/>
-                </a:solidFill>
-                <a:latin typeface="Archivo"/>
-              </a:rPr>
-              <a:t>H</a:t>
-            </a:r>
-            <a:r>
-              <a:rPr sz="6600" b="1" i="1">
-                <a:solidFill>
-                  <a:srgbClr val="5D461D"/>
-                </a:solidFill>
-                <a:latin typeface="Archivo"/>
-              </a:rPr>
-              <a:t>O</a:t>
-            </a:r>
-            <a:r>
-              <a:rPr sz="6600" b="1" i="1">
-                <a:solidFill>
-                  <a:srgbClr val="6C5120"/>
-                </a:solidFill>
-                <a:latin typeface="Archivo"/>
-              </a:rPr>
-              <a:t>N</a:t>
-            </a:r>
-            <a:r>
-              <a:rPr sz="6600" b="1" i="1">
-                <a:solidFill>
-                  <a:srgbClr val="7B5B22"/>
-                </a:solidFill>
-                <a:latin typeface="Archivo"/>
-              </a:rPr>
-              <a:t>N</a:t>
-            </a:r>
-            <a:r>
-              <a:rPr sz="6600" b="1" i="1">
-                <a:solidFill>
-                  <a:srgbClr val="8A6624"/>
-                </a:solidFill>
-                <a:latin typeface="Archivo"/>
-              </a:rPr>
-              <a:t>Ê</a:t>
-            </a:r>
-            <a:r>
-              <a:rPr sz="6600" b="1" i="1">
-                <a:solidFill>
-                  <a:srgbClr val="997026"/>
-                </a:solidFill>
-                <a:latin typeface="Archivo"/>
-              </a:rPr>
-              <a:t>T</a:t>
-            </a:r>
-            <a:r>
-              <a:rPr sz="6600" b="1" i="1">
-                <a:solidFill>
-                  <a:srgbClr val="A87B28"/>
-                </a:solidFill>
-                <a:latin typeface="Archivo"/>
-              </a:rPr>
-              <a:t>E</a:t>
-            </a:r>
-            <a:r>
-              <a:rPr sz="6600" b="1" i="1">
-                <a:solidFill>
-                  <a:srgbClr val="B8862B"/>
-                </a:solidFill>
-                <a:latin typeface="Archivo"/>
-              </a:rPr>
-              <a:t>S</a:t>
+              <a:rPr sz="2600" b="0" i="0">
+                <a:solidFill>
+                  <a:srgbClr val="FFFFFF"/>
+                </a:solidFill>
+                <a:latin typeface="Poppins"/>
+              </a:rPr>
+              <a:t>On ne jette rien.</a:t>
+            </a:r>
+          </a:p>
+          <a:p>
+            <a:pPr algn="ctr">
+              <a:lnSpc>
+                <a:spcPct val="134000"/>
+              </a:lnSpc>
+              <a:spcAft>
+                <a:spcPts val="900"/>
+              </a:spcAft>
+            </a:pPr>
+            <a:r>
+              <a:rPr sz="2600" b="0" i="0">
+                <a:solidFill>
+                  <a:srgbClr val="E3A94F"/>
+                </a:solidFill>
+                <a:latin typeface="Poppins"/>
+              </a:rPr>
+              <a:t>On règle.</a:t>
             </a:r>
           </a:p>
         </p:txBody>
@@ -7420,58 +8772,36 @@
           <a:p>
             <a:pPr algn="ctr">
               <a:lnSpc>
-                <a:spcPct val="134000"/>
+                <a:spcPct val="118000"/>
               </a:lnSpc>
               <a:spcAft>
-                <a:spcPts val="900"/>
+                <a:spcPts val="1500"/>
               </a:spcAft>
             </a:pPr>
             <a:r>
-              <a:rPr sz="2600" b="0" i="0">
+              <a:rPr sz="3000" b="1" i="0">
                 <a:solidFill>
                   <a:srgbClr val="FFFFFF"/>
                 </a:solidFill>
-                <a:latin typeface="Poppins"/>
-              </a:rPr>
-              <a:t>On n'est pas venus vous définir</a:t>
+                <a:latin typeface="Oswald"/>
+              </a:rPr>
+              <a:t>L'IDÉE N'EST PAS DE TOUT REJETER. ON NE PEUT QU'EMPRUNTER. LA QUESTION, C'EST COMMENT.</a:t>
             </a:r>
           </a:p>
           <a:p>
             <a:pPr algn="ctr">
-              <a:lnSpc>
-                <a:spcPct val="134000"/>
-              </a:lnSpc>
               <a:spcAft>
-                <a:spcPts val="900"/>
+                <a:spcPts val="1700"/>
               </a:spcAft>
             </a:pPr>
             <a:r>
-              <a:rPr sz="2600" b="0" i="0">
-                <a:solidFill>
-                  <a:srgbClr val="FFFFFF"/>
+              <a:rPr sz="1400" b="0" i="1">
+                <a:solidFill>
+                  <a:srgbClr val="E3A94F"/>
                 </a:solidFill>
                 <a:latin typeface="Poppins"/>
               </a:rPr>
-              <a:t>le paradigme de l'entrepreneur musulman.</a:t>
-            </a:r>
-          </a:p>
-          <a:p>
-            <a:pPr algn="ctr">
-              <a:lnSpc>
-                <a:spcPct val="134000"/>
-              </a:lnSpc>
-              <a:spcAft>
-                <a:spcPts val="900"/>
-              </a:spcAft>
-            </a:pPr>
-            <a:r>
-              <a:rPr sz="2600" b="0" i="0">
-                <a:solidFill>
-                  <a:srgbClr val="E3A94F"/>
-                </a:solidFill>
-                <a:latin typeface="Poppins"/>
-              </a:rPr>
-              <a:t>On n'en est pas là.</a:t>
+              <a:t>— Dr Chauki Lazhar, spécialiste des fondements du droit —</a:t>
             </a:r>
           </a:p>
         </p:txBody>
@@ -7552,7 +8882,7 @@
                 </a:solidFill>
                 <a:latin typeface="Archivo"/>
               </a:rPr>
-              <a:t>CE QU'ON A FAIT CE SOIR</a:t>
+              <a:t>DEUX QUESTIONS AVANT D'ADOPTER UN OUTIL</a:t>
             </a:r>
           </a:p>
         </p:txBody>
@@ -7638,7 +8968,7 @@
                 </a:solidFill>
                 <a:latin typeface="Poppins"/>
               </a:rPr>
-              <a:t>On vous a posé les questions qui nous travaillent</a:t>
+              <a:t>1. D'où il vient ? Quelle idée de la réussite il transporte sans le dire ?</a:t>
             </a:r>
           </a:p>
           <a:p>
@@ -7657,7 +8987,7 @@
                 </a:solidFill>
                 <a:latin typeface="Poppins"/>
               </a:rPr>
-              <a:t>On vous a montré où on en est de notre propre réflexion</a:t>
+              <a:t>2. Qu'est-ce qu'il produit chez les gens ?</a:t>
             </a:r>
           </a:p>
           <a:p>
@@ -7672,30 +9002,11 @@
             <a:r>
               <a:rPr sz="1850" b="0" i="0">
                 <a:solidFill>
-                  <a:srgbClr val="FFFFFF"/>
+                  <a:srgbClr val="E3A94F"/>
                 </a:solidFill>
                 <a:latin typeface="Poppins"/>
               </a:rPr>
-              <a:t>On essaie nous-mêmes d'incarner tout ça, et on n'y arrive pas tous les jours</a:t>
-            </a:r>
-          </a:p>
-          <a:p>
-            <a:pPr algn="l">
-              <a:lnSpc>
-                <a:spcPct val="142000"/>
-              </a:lnSpc>
-              <a:spcAft>
-                <a:spcPts val="900"/>
-              </a:spcAft>
-            </a:pPr>
-            <a:r>
-              <a:rPr sz="1850" b="0" i="0">
-                <a:solidFill>
-                  <a:srgbClr val="E3A94F"/>
-                </a:solidFill>
-                <a:latin typeface="Poppins"/>
-              </a:rPr>
-              <a:t>👉 C'est un chantier. Pas une conclusion.</a:t>
+              <a:t>👉 Et c'est tout. Deux questions, sur n'importe quelle formation, n'importe quelle méthode.</a:t>
             </a:r>
           </a:p>
         </p:txBody>
@@ -7718,20 +9029,12 @@
         <p:nvPr/>
       </p:nvGrpSpPr>
       <p:grpSpPr/>
-      <p:pic>
-        <p:nvPicPr>
-          <p:cNvPr id="2" name="Picture 1" descr="bg.png"/>
-          <p:cNvPicPr>
-            <a:picLocks noChangeAspect="1"/>
-          </p:cNvPicPr>
+      <p:sp>
+        <p:nvSpPr>
+          <p:cNvPr id="2" name="Rectangle 1"/>
+          <p:cNvSpPr/>
           <p:nvPr/>
-        </p:nvPicPr>
-        <p:blipFill>
-          <a:blip r:embed="rId2"/>
-          <a:stretch>
-            <a:fillRect/>
-          </a:stretch>
-        </p:blipFill>
+        </p:nvSpPr>
         <p:spPr>
           <a:xfrm>
             <a:off x="0" y="0"/>
@@ -7740,8 +9043,36 @@
           <a:prstGeom prst="rect">
             <a:avLst/>
           </a:prstGeom>
-        </p:spPr>
-      </p:pic>
+          <a:solidFill>
+            <a:srgbClr val="E3A94F"/>
+          </a:solidFill>
+          <a:ln>
+            <a:noFill/>
+          </a:ln>
+          <a:effectLst/>
+        </p:spPr>
+        <p:style>
+          <a:lnRef idx="1">
+            <a:schemeClr val="accent1"/>
+          </a:lnRef>
+          <a:fillRef idx="3">
+            <a:schemeClr val="accent1"/>
+          </a:fillRef>
+          <a:effectRef idx="2">
+            <a:schemeClr val="accent1"/>
+          </a:effectRef>
+          <a:fontRef idx="minor">
+            <a:schemeClr val="lt1"/>
+          </a:fontRef>
+        </p:style>
+        <p:txBody>
+          <a:bodyPr rtlCol="0" anchor="ctr"/>
+          <a:lstStyle/>
+          <a:p>
+            <a:pPr algn="ctr"/>
+          </a:p>
+        </p:txBody>
+      </p:sp>
       <p:sp>
         <p:nvSpPr>
           <p:cNvPr id="3" name="TextBox 2"/>
@@ -7750,8 +9081,8 @@
         </p:nvSpPr>
         <p:spPr>
           <a:xfrm>
-            <a:off x="812800" y="812800"/>
-            <a:ext cx="10566400" cy="5232400"/>
+            <a:off x="952500" y="762000"/>
+            <a:ext cx="10287000" cy="952500"/>
           </a:xfrm>
           <a:prstGeom prst="rect">
             <a:avLst/>
@@ -7759,65 +9090,196 @@
           <a:noFill/>
         </p:spPr>
         <p:txBody>
-          <a:bodyPr wrap="square" lIns="0" rIns="0" tIns="0" bIns="0" anchor="ctr">
+          <a:bodyPr wrap="square" lIns="0" rIns="0" tIns="0" bIns="0" anchor="t">
             <a:spAutoFit/>
           </a:bodyPr>
           <a:lstStyle/>
           <a:p>
-            <a:pPr algn="ctr">
+            <a:pPr algn="l"/>
+            <a:r>
+              <a:rPr sz="1600" b="1" i="0">
+                <a:solidFill>
+                  <a:srgbClr val="141414"/>
+                </a:solidFill>
+                <a:latin typeface="Poppins"/>
+              </a:rPr>
+              <a:t>À INSÉRER DANS TON DECK</a:t>
+            </a:r>
+          </a:p>
+        </p:txBody>
+      </p:sp>
+      <p:sp>
+        <p:nvSpPr>
+          <p:cNvPr id="4" name="TextBox 3"/>
+          <p:cNvSpPr txBox="1"/>
+          <p:nvPr/>
+        </p:nvSpPr>
+        <p:spPr>
+          <a:xfrm>
+            <a:off x="952500" y="1587500"/>
+            <a:ext cx="10287000" cy="1397000"/>
+          </a:xfrm>
+          <a:prstGeom prst="rect">
+            <a:avLst/>
+          </a:prstGeom>
+          <a:noFill/>
+        </p:spPr>
+        <p:txBody>
+          <a:bodyPr wrap="square" lIns="0" rIns="0" tIns="0" bIns="0" anchor="t">
+            <a:spAutoFit/>
+          </a:bodyPr>
+          <a:lstStyle/>
+          <a:p>
+            <a:pPr algn="l">
+              <a:lnSpc>
+                <a:spcPct val="106000"/>
+              </a:lnSpc>
+            </a:pPr>
+            <a:r>
+              <a:rPr sz="4200" b="1" i="1">
+                <a:solidFill>
+                  <a:srgbClr val="141414"/>
+                </a:solidFill>
+                <a:latin typeface="Archivo"/>
+              </a:rPr>
+              <a:t>CE QUE TU EMPORTES</a:t>
+            </a:r>
+          </a:p>
+        </p:txBody>
+      </p:sp>
+      <p:sp>
+        <p:nvSpPr>
+          <p:cNvPr id="5" name="Rectangle 4"/>
+          <p:cNvSpPr/>
+          <p:nvPr/>
+        </p:nvSpPr>
+        <p:spPr>
+          <a:xfrm>
+            <a:off x="952500" y="3175000"/>
+            <a:ext cx="1651000" cy="50800"/>
+          </a:xfrm>
+          <a:prstGeom prst="rect">
+            <a:avLst/>
+          </a:prstGeom>
+          <a:solidFill>
+            <a:srgbClr val="141414"/>
+          </a:solidFill>
+          <a:ln>
+            <a:noFill/>
+          </a:ln>
+          <a:effectLst/>
+        </p:spPr>
+        <p:style>
+          <a:lnRef idx="1">
+            <a:schemeClr val="accent1"/>
+          </a:lnRef>
+          <a:fillRef idx="3">
+            <a:schemeClr val="accent1"/>
+          </a:fillRef>
+          <a:effectRef idx="2">
+            <a:schemeClr val="accent1"/>
+          </a:effectRef>
+          <a:fontRef idx="minor">
+            <a:schemeClr val="lt1"/>
+          </a:fontRef>
+        </p:style>
+        <p:txBody>
+          <a:bodyPr rtlCol="0" anchor="ctr"/>
+          <a:lstStyle/>
+          <a:p>
+            <a:pPr algn="ctr"/>
+          </a:p>
+        </p:txBody>
+      </p:sp>
+      <p:sp>
+        <p:nvSpPr>
+          <p:cNvPr id="6" name="TextBox 5"/>
+          <p:cNvSpPr txBox="1"/>
+          <p:nvPr/>
+        </p:nvSpPr>
+        <p:spPr>
+          <a:xfrm>
+            <a:off x="952500" y="3556000"/>
+            <a:ext cx="10287000" cy="2095500"/>
+          </a:xfrm>
+          <a:prstGeom prst="rect">
+            <a:avLst/>
+          </a:prstGeom>
+          <a:noFill/>
+        </p:spPr>
+        <p:txBody>
+          <a:bodyPr wrap="square" lIns="0" rIns="0" tIns="0" bIns="0" anchor="t">
+            <a:spAutoFit/>
+          </a:bodyPr>
+          <a:lstStyle/>
+          <a:p>
+            <a:pPr algn="l">
+              <a:spcAft>
+                <a:spcPts val="300"/>
+              </a:spcAft>
+            </a:pPr>
+            <a:r>
+              <a:rPr sz="1500" b="1" i="0">
+                <a:solidFill>
+                  <a:srgbClr val="141414"/>
+                </a:solidFill>
+                <a:latin typeface="Poppins"/>
+              </a:rPr>
+              <a:t>REMPLACE</a:t>
+            </a:r>
+          </a:p>
+          <a:p>
+            <a:pPr algn="l">
               <a:lnSpc>
                 <a:spcPct val="134000"/>
               </a:lnSpc>
               <a:spcAft>
-                <a:spcPts val="900"/>
+                <a:spcPts val="1300"/>
               </a:spcAft>
             </a:pPr>
             <a:r>
-              <a:rPr sz="2600" b="0" i="0">
-                <a:solidFill>
-                  <a:srgbClr val="FFFFFF"/>
+              <a:rPr sz="1900" b="0" i="0">
+                <a:solidFill>
+                  <a:srgbClr val="141414"/>
                 </a:solidFill>
                 <a:latin typeface="Poppins"/>
               </a:rPr>
-              <a:t>Un paradigme, ce n'est pas un document</a:t>
-            </a:r>
-          </a:p>
-          <a:p>
-            <a:pPr algn="ctr">
-              <a:lnSpc>
-                <a:spcPct val="134000"/>
-              </a:lnSpc>
-              <a:spcAft>
-                <a:spcPts val="900"/>
-              </a:spcAft>
-            </a:pPr>
-            <a:r>
-              <a:rPr sz="2600" b="0" i="0">
-                <a:solidFill>
-                  <a:srgbClr val="FFFFFF"/>
+              <a:t>ta séquence « CE QUE TU EMPORTES » : le titre et les trois slides 1️⃣ 2️⃣ 3️⃣</a:t>
+            </a:r>
+          </a:p>
+        </p:txBody>
+      </p:sp>
+      <p:sp>
+        <p:nvSpPr>
+          <p:cNvPr id="7" name="TextBox 6"/>
+          <p:cNvSpPr txBox="1"/>
+          <p:nvPr/>
+        </p:nvSpPr>
+        <p:spPr>
+          <a:xfrm>
+            <a:off x="952500" y="5905500"/>
+            <a:ext cx="10287000" cy="444500"/>
+          </a:xfrm>
+          <a:prstGeom prst="rect">
+            <a:avLst/>
+          </a:prstGeom>
+          <a:noFill/>
+        </p:spPr>
+        <p:txBody>
+          <a:bodyPr wrap="square" lIns="0" rIns="0" tIns="0" bIns="0" anchor="t">
+            <a:spAutoFit/>
+          </a:bodyPr>
+          <a:lstStyle/>
+          <a:p>
+            <a:pPr algn="l"/>
+            <a:r>
+              <a:rPr sz="1400" b="0" i="1">
+                <a:solidFill>
+                  <a:srgbClr val="141414"/>
                 </a:solidFill>
                 <a:latin typeface="Poppins"/>
               </a:rPr>
-              <a:t>qu'on adopte et qu'on applique.</a:t>
-            </a:r>
-          </a:p>
-          <a:p>
-            <a:pPr algn="ctr">
-              <a:lnSpc>
-                <a:spcPct val="134000"/>
-              </a:lnSpc>
-              <a:spcAft>
-                <a:spcPts val="900"/>
-              </a:spcAft>
-            </a:pPr>
-            <a:r>
-              <a:rPr sz="2600" b="0" i="0">
-                <a:solidFill>
-                  <a:srgbClr val="E3A94F"/>
-                </a:solidFill>
-                <a:latin typeface="Poppins"/>
-              </a:rPr>
-              <a:t>C'est une remise en question qui ne s'arrête pas.</a:t>
+              <a:t>Les 5 slides qui suivent forment ce bloc. Cette page-ci ne va pas dans le deck.</a:t>
             </a:r>
           </a:p>
         </p:txBody>
@@ -7866,59 +9328,20 @@
       </p:pic>
       <p:sp>
         <p:nvSpPr>
-          <p:cNvPr id="3" name="TextBox 2"/>
-          <p:cNvSpPr txBox="1"/>
-          <p:nvPr/>
-        </p:nvSpPr>
-        <p:spPr>
-          <a:xfrm>
-            <a:off x="812800" y="812800"/>
-            <a:ext cx="10566400" cy="698500"/>
-          </a:xfrm>
-          <a:prstGeom prst="rect">
-            <a:avLst/>
-          </a:prstGeom>
-          <a:noFill/>
-        </p:spPr>
-        <p:txBody>
-          <a:bodyPr wrap="square" lIns="0" rIns="0" tIns="0" bIns="0" anchor="t">
-            <a:spAutoFit/>
-          </a:bodyPr>
-          <a:lstStyle/>
-          <a:p>
-            <a:pPr algn="l">
-              <a:lnSpc>
-                <a:spcPct val="114000"/>
-              </a:lnSpc>
-            </a:pPr>
-            <a:r>
-              <a:rPr sz="2000" b="1" i="1">
-                <a:solidFill>
-                  <a:srgbClr val="FFFFFF"/>
-                </a:solidFill>
-                <a:latin typeface="Archivo"/>
-              </a:rPr>
-              <a:t>ET CE QU'ON NE SAIT PAS ENCORE</a:t>
-            </a:r>
-          </a:p>
-        </p:txBody>
-      </p:sp>
-      <p:sp>
-        <p:nvSpPr>
-          <p:cNvPr id="4" name="Rectangle 3"/>
+          <p:cNvPr id="3" name="Rectangle 2"/>
           <p:cNvSpPr/>
           <p:nvPr/>
         </p:nvSpPr>
         <p:spPr>
           <a:xfrm>
-            <a:off x="812800" y="1879600"/>
-            <a:ext cx="1143000" cy="25400"/>
+            <a:off x="1125220" y="2884170"/>
+            <a:ext cx="9941560" cy="1089660"/>
           </a:xfrm>
           <a:prstGeom prst="rect">
             <a:avLst/>
           </a:prstGeom>
           <a:solidFill>
-            <a:srgbClr val="E3A94F"/>
+            <a:srgbClr val="FFFFFF"/>
           </a:solidFill>
           <a:ln>
             <a:noFill/>
@@ -7949,6 +9372,445 @@
       </p:sp>
       <p:sp>
         <p:nvSpPr>
+          <p:cNvPr id="4" name="TextBox 3"/>
+          <p:cNvSpPr txBox="1"/>
+          <p:nvPr/>
+        </p:nvSpPr>
+        <p:spPr>
+          <a:xfrm>
+            <a:off x="1315720" y="2884170"/>
+            <a:ext cx="9560560" cy="1089660"/>
+          </a:xfrm>
+          <a:prstGeom prst="rect">
+            <a:avLst/>
+          </a:prstGeom>
+          <a:noFill/>
+        </p:spPr>
+        <p:txBody>
+          <a:bodyPr wrap="square" lIns="0" rIns="0" tIns="0" bIns="0" anchor="ctr">
+            <a:spAutoFit/>
+          </a:bodyPr>
+          <a:lstStyle/>
+          <a:p>
+            <a:pPr algn="ctr">
+              <a:lnSpc>
+                <a:spcPct val="100000"/>
+              </a:lnSpc>
+            </a:pPr>
+            <a:r>
+              <a:rPr sz="6600" b="1" i="1">
+                <a:solidFill>
+                  <a:srgbClr val="131313"/>
+                </a:solidFill>
+                <a:latin typeface="Archivo"/>
+              </a:rPr>
+              <a:t>C</a:t>
+            </a:r>
+            <a:r>
+              <a:rPr sz="6600" b="1" i="1">
+                <a:solidFill>
+                  <a:srgbClr val="131313"/>
+                </a:solidFill>
+                <a:latin typeface="Archivo"/>
+              </a:rPr>
+              <a:t>E</a:t>
+            </a:r>
+            <a:r>
+              <a:rPr sz="6600" b="1" i="1">
+                <a:solidFill>
+                  <a:srgbClr val="131313"/>
+                </a:solidFill>
+                <a:latin typeface="Archivo"/>
+              </a:rPr>
+              <a:t> </a:t>
+            </a:r>
+            <a:r>
+              <a:rPr sz="6600" b="1" i="1">
+                <a:solidFill>
+                  <a:srgbClr val="131313"/>
+                </a:solidFill>
+                <a:latin typeface="Archivo"/>
+              </a:rPr>
+              <a:t>Q</a:t>
+            </a:r>
+            <a:r>
+              <a:rPr sz="6600" b="1" i="1">
+                <a:solidFill>
+                  <a:srgbClr val="161513"/>
+                </a:solidFill>
+                <a:latin typeface="Archivo"/>
+              </a:rPr>
+              <a:t>U</a:t>
+            </a:r>
+            <a:r>
+              <a:rPr sz="6600" b="1" i="1">
+                <a:solidFill>
+                  <a:srgbClr val="221D15"/>
+                </a:solidFill>
+                <a:latin typeface="Archivo"/>
+              </a:rPr>
+              <a:t>E</a:t>
+            </a:r>
+            <a:r>
+              <a:rPr sz="6600" b="1" i="1">
+                <a:solidFill>
+                  <a:srgbClr val="2F2617"/>
+                </a:solidFill>
+                <a:latin typeface="Archivo"/>
+              </a:rPr>
+              <a:t> </a:t>
+            </a:r>
+            <a:r>
+              <a:rPr sz="6600" b="1" i="1">
+                <a:solidFill>
+                  <a:srgbClr val="3B2F18"/>
+                </a:solidFill>
+                <a:latin typeface="Archivo"/>
+              </a:rPr>
+              <a:t>T</a:t>
+            </a:r>
+            <a:r>
+              <a:rPr sz="6600" b="1" i="1">
+                <a:solidFill>
+                  <a:srgbClr val="48371A"/>
+                </a:solidFill>
+                <a:latin typeface="Archivo"/>
+              </a:rPr>
+              <a:t>U</a:t>
+            </a:r>
+            <a:r>
+              <a:rPr sz="6600" b="1" i="1">
+                <a:solidFill>
+                  <a:srgbClr val="54401C"/>
+                </a:solidFill>
+                <a:latin typeface="Archivo"/>
+              </a:rPr>
+              <a:t> </a:t>
+            </a:r>
+            <a:r>
+              <a:rPr sz="6600" b="1" i="1">
+                <a:solidFill>
+                  <a:srgbClr val="60491E"/>
+                </a:solidFill>
+                <a:latin typeface="Archivo"/>
+              </a:rPr>
+              <a:t>E</a:t>
+            </a:r>
+            <a:r>
+              <a:rPr sz="6600" b="1" i="1">
+                <a:solidFill>
+                  <a:srgbClr val="6D5120"/>
+                </a:solidFill>
+                <a:latin typeface="Archivo"/>
+              </a:rPr>
+              <a:t>M</a:t>
+            </a:r>
+            <a:r>
+              <a:rPr sz="6600" b="1" i="1">
+                <a:solidFill>
+                  <a:srgbClr val="795A21"/>
+                </a:solidFill>
+                <a:latin typeface="Archivo"/>
+              </a:rPr>
+              <a:t>P</a:t>
+            </a:r>
+            <a:r>
+              <a:rPr sz="6600" b="1" i="1">
+                <a:solidFill>
+                  <a:srgbClr val="866323"/>
+                </a:solidFill>
+                <a:latin typeface="Archivo"/>
+              </a:rPr>
+              <a:t>O</a:t>
+            </a:r>
+            <a:r>
+              <a:rPr sz="6600" b="1" i="1">
+                <a:solidFill>
+                  <a:srgbClr val="926B25"/>
+                </a:solidFill>
+                <a:latin typeface="Archivo"/>
+              </a:rPr>
+              <a:t>R</a:t>
+            </a:r>
+            <a:r>
+              <a:rPr sz="6600" b="1" i="1">
+                <a:solidFill>
+                  <a:srgbClr val="9F7427"/>
+                </a:solidFill>
+                <a:latin typeface="Archivo"/>
+              </a:rPr>
+              <a:t>T</a:t>
+            </a:r>
+            <a:r>
+              <a:rPr sz="6600" b="1" i="1">
+                <a:solidFill>
+                  <a:srgbClr val="AB7D29"/>
+                </a:solidFill>
+                <a:latin typeface="Archivo"/>
+              </a:rPr>
+              <a:t>E</a:t>
+            </a:r>
+            <a:r>
+              <a:rPr sz="6600" b="1" i="1">
+                <a:solidFill>
+                  <a:srgbClr val="B8862B"/>
+                </a:solidFill>
+                <a:latin typeface="Archivo"/>
+              </a:rPr>
+              <a:t>S</a:t>
+            </a:r>
+          </a:p>
+        </p:txBody>
+      </p:sp>
+    </p:spTree>
+  </p:cSld>
+  <p:clrMapOvr>
+    <a:masterClrMapping/>
+  </p:clrMapOvr>
+</p:sld>
+</file>
+
+<file path=ppt/slides/slide25.xml><?xml version="1.0" encoding="utf-8"?>
+<p:sld xmlns:a="http://schemas.openxmlformats.org/drawingml/2006/main" xmlns:p="http://schemas.openxmlformats.org/presentationml/2006/main" xmlns:r="http://schemas.openxmlformats.org/officeDocument/2006/relationships">
+  <p:cSld>
+    <p:spTree>
+      <p:nvGrpSpPr>
+        <p:cNvPr id="1" name=""/>
+        <p:cNvGrpSpPr/>
+        <p:nvPr/>
+      </p:nvGrpSpPr>
+      <p:grpSpPr/>
+      <p:pic>
+        <p:nvPicPr>
+          <p:cNvPr id="2" name="Picture 1" descr="bg.png"/>
+          <p:cNvPicPr>
+            <a:picLocks noChangeAspect="1"/>
+          </p:cNvPicPr>
+          <p:nvPr/>
+        </p:nvPicPr>
+        <p:blipFill>
+          <a:blip r:embed="rId2"/>
+          <a:stretch>
+            <a:fillRect/>
+          </a:stretch>
+        </p:blipFill>
+        <p:spPr>
+          <a:xfrm>
+            <a:off x="0" y="0"/>
+            <a:ext cx="12192000" cy="6858000"/>
+          </a:xfrm>
+          <a:prstGeom prst="rect">
+            <a:avLst/>
+          </a:prstGeom>
+        </p:spPr>
+      </p:pic>
+      <p:sp>
+        <p:nvSpPr>
+          <p:cNvPr id="3" name="TextBox 2"/>
+          <p:cNvSpPr txBox="1"/>
+          <p:nvPr/>
+        </p:nvSpPr>
+        <p:spPr>
+          <a:xfrm>
+            <a:off x="812800" y="812800"/>
+            <a:ext cx="10566400" cy="5232400"/>
+          </a:xfrm>
+          <a:prstGeom prst="rect">
+            <a:avLst/>
+          </a:prstGeom>
+          <a:noFill/>
+        </p:spPr>
+        <p:txBody>
+          <a:bodyPr wrap="square" lIns="0" rIns="0" tIns="0" bIns="0" anchor="ctr">
+            <a:spAutoFit/>
+          </a:bodyPr>
+          <a:lstStyle/>
+          <a:p>
+            <a:pPr algn="ctr">
+              <a:lnSpc>
+                <a:spcPct val="134000"/>
+              </a:lnSpc>
+              <a:spcAft>
+                <a:spcPts val="900"/>
+              </a:spcAft>
+            </a:pPr>
+            <a:r>
+              <a:rPr sz="2600" b="0" i="0">
+                <a:solidFill>
+                  <a:srgbClr val="FFFFFF"/>
+                </a:solidFill>
+                <a:latin typeface="Poppins"/>
+              </a:rPr>
+              <a:t>Tu es venu chercher des techniques.</a:t>
+            </a:r>
+          </a:p>
+          <a:p>
+            <a:pPr algn="ctr">
+              <a:lnSpc>
+                <a:spcPct val="134000"/>
+              </a:lnSpc>
+              <a:spcAft>
+                <a:spcPts val="900"/>
+              </a:spcAft>
+            </a:pPr>
+            <a:r>
+              <a:rPr sz="2600" b="0" i="0">
+                <a:solidFill>
+                  <a:srgbClr val="FFFFFF"/>
+                </a:solidFill>
+                <a:latin typeface="Poppins"/>
+              </a:rPr>
+              <a:t>Tu repars avec une question</a:t>
+            </a:r>
+          </a:p>
+          <a:p>
+            <a:pPr algn="ctr">
+              <a:lnSpc>
+                <a:spcPct val="134000"/>
+              </a:lnSpc>
+              <a:spcAft>
+                <a:spcPts val="900"/>
+              </a:spcAft>
+            </a:pPr>
+            <a:r>
+              <a:rPr sz="2600" b="0" i="0">
+                <a:solidFill>
+                  <a:srgbClr val="E3A94F"/>
+                </a:solidFill>
+                <a:latin typeface="Poppins"/>
+              </a:rPr>
+              <a:t>à te poser avant chaque technique.</a:t>
+            </a:r>
+          </a:p>
+        </p:txBody>
+      </p:sp>
+    </p:spTree>
+  </p:cSld>
+  <p:clrMapOvr>
+    <a:masterClrMapping/>
+  </p:clrMapOvr>
+</p:sld>
+</file>
+
+<file path=ppt/slides/slide26.xml><?xml version="1.0" encoding="utf-8"?>
+<p:sld xmlns:a="http://schemas.openxmlformats.org/drawingml/2006/main" xmlns:p="http://schemas.openxmlformats.org/presentationml/2006/main" xmlns:r="http://schemas.openxmlformats.org/officeDocument/2006/relationships">
+  <p:cSld>
+    <p:spTree>
+      <p:nvGrpSpPr>
+        <p:cNvPr id="1" name=""/>
+        <p:cNvGrpSpPr/>
+        <p:nvPr/>
+      </p:nvGrpSpPr>
+      <p:grpSpPr/>
+      <p:pic>
+        <p:nvPicPr>
+          <p:cNvPr id="2" name="Picture 1" descr="bg.png"/>
+          <p:cNvPicPr>
+            <a:picLocks noChangeAspect="1"/>
+          </p:cNvPicPr>
+          <p:nvPr/>
+        </p:nvPicPr>
+        <p:blipFill>
+          <a:blip r:embed="rId2"/>
+          <a:stretch>
+            <a:fillRect/>
+          </a:stretch>
+        </p:blipFill>
+        <p:spPr>
+          <a:xfrm>
+            <a:off x="0" y="0"/>
+            <a:ext cx="12192000" cy="6858000"/>
+          </a:xfrm>
+          <a:prstGeom prst="rect">
+            <a:avLst/>
+          </a:prstGeom>
+        </p:spPr>
+      </p:pic>
+      <p:sp>
+        <p:nvSpPr>
+          <p:cNvPr id="3" name="TextBox 2"/>
+          <p:cNvSpPr txBox="1"/>
+          <p:nvPr/>
+        </p:nvSpPr>
+        <p:spPr>
+          <a:xfrm>
+            <a:off x="812800" y="812800"/>
+            <a:ext cx="10566400" cy="698500"/>
+          </a:xfrm>
+          <a:prstGeom prst="rect">
+            <a:avLst/>
+          </a:prstGeom>
+          <a:noFill/>
+        </p:spPr>
+        <p:txBody>
+          <a:bodyPr wrap="square" lIns="0" rIns="0" tIns="0" bIns="0" anchor="t">
+            <a:spAutoFit/>
+          </a:bodyPr>
+          <a:lstStyle/>
+          <a:p>
+            <a:pPr algn="l">
+              <a:lnSpc>
+                <a:spcPct val="114000"/>
+              </a:lnSpc>
+            </a:pPr>
+            <a:r>
+              <a:rPr sz="2000" b="1" i="1">
+                <a:solidFill>
+                  <a:srgbClr val="FFFFFF"/>
+                </a:solidFill>
+                <a:latin typeface="Archivo"/>
+              </a:rPr>
+              <a:t>TROIS QUESTIONS, SUR TON ACTIVITÉ ET SUR CHACUN DE TES OUTILS</a:t>
+            </a:r>
+          </a:p>
+        </p:txBody>
+      </p:sp>
+      <p:sp>
+        <p:nvSpPr>
+          <p:cNvPr id="4" name="Rectangle 3"/>
+          <p:cNvSpPr/>
+          <p:nvPr/>
+        </p:nvSpPr>
+        <p:spPr>
+          <a:xfrm>
+            <a:off x="812800" y="1879600"/>
+            <a:ext cx="1143000" cy="25400"/>
+          </a:xfrm>
+          <a:prstGeom prst="rect">
+            <a:avLst/>
+          </a:prstGeom>
+          <a:solidFill>
+            <a:srgbClr val="E3A94F"/>
+          </a:solidFill>
+          <a:ln>
+            <a:noFill/>
+          </a:ln>
+          <a:effectLst/>
+        </p:spPr>
+        <p:style>
+          <a:lnRef idx="1">
+            <a:schemeClr val="accent1"/>
+          </a:lnRef>
+          <a:fillRef idx="3">
+            <a:schemeClr val="accent1"/>
+          </a:fillRef>
+          <a:effectRef idx="2">
+            <a:schemeClr val="accent1"/>
+          </a:effectRef>
+          <a:fontRef idx="minor">
+            <a:schemeClr val="lt1"/>
+          </a:fontRef>
+        </p:style>
+        <p:txBody>
+          <a:bodyPr rtlCol="0" anchor="ctr"/>
+          <a:lstStyle/>
+          <a:p>
+            <a:pPr algn="ctr"/>
+          </a:p>
+        </p:txBody>
+      </p:sp>
+      <p:sp>
+        <p:nvSpPr>
           <p:cNvPr id="5" name="TextBox 4"/>
           <p:cNvSpPr txBox="1"/>
           <p:nvPr/>
@@ -7980,11 +9842,11 @@
             <a:r>
               <a:rPr sz="1850" b="0" i="0">
                 <a:solidFill>
-                  <a:srgbClr val="FFFFFF"/>
+                  <a:srgbClr val="E3A94F"/>
                 </a:solidFill>
                 <a:latin typeface="Poppins"/>
               </a:rPr>
-              <a:t>Le prix juste — pas de barème possible, et pourtant le déséquilibre excessif existe</a:t>
+              <a:t>👉 Est-ce que ça crée de la DÉPENDANCE ?</a:t>
             </a:r>
           </a:p>
           <a:p>
@@ -7999,11 +9861,11 @@
             <a:r>
               <a:rPr sz="1850" b="0" i="0">
                 <a:solidFill>
-                  <a:srgbClr val="FFFFFF"/>
+                  <a:srgbClr val="E3A94F"/>
                 </a:solidFill>
                 <a:latin typeface="Poppins"/>
               </a:rPr>
-              <a:t>L'abonnement, les places de marché — le droit des transactions n'a pas fini d'y répondre</a:t>
+              <a:t>👉 Est-ce que ça crée de l'AVEUGLEMENT ?</a:t>
             </a:r>
           </a:p>
           <a:p>
@@ -8018,30 +9880,598 @@
             <a:r>
               <a:rPr sz="1850" b="0" i="0">
                 <a:solidFill>
-                  <a:srgbClr val="FFFFFF"/>
+                  <a:srgbClr val="E3A94F"/>
                 </a:solidFill>
                 <a:latin typeface="Poppins"/>
               </a:rPr>
-              <a:t>Et la question qu'on ne tranche pas : que faire quand un marché entier</a:t>
-            </a:r>
-          </a:p>
-          <a:p>
-            <a:pPr algn="l">
+              <a:t>👉 Est-ce que ça crée de l'EXCÈS ?</a:t>
+            </a:r>
+          </a:p>
+        </p:txBody>
+      </p:sp>
+    </p:spTree>
+  </p:cSld>
+  <p:clrMapOvr>
+    <a:masterClrMapping/>
+  </p:clrMapOvr>
+</p:sld>
+</file>
+
+<file path=ppt/slides/slide27.xml><?xml version="1.0" encoding="utf-8"?>
+<p:sld xmlns:a="http://schemas.openxmlformats.org/drawingml/2006/main" xmlns:p="http://schemas.openxmlformats.org/presentationml/2006/main" xmlns:r="http://schemas.openxmlformats.org/officeDocument/2006/relationships">
+  <p:cSld>
+    <p:spTree>
+      <p:nvGrpSpPr>
+        <p:cNvPr id="1" name=""/>
+        <p:cNvGrpSpPr/>
+        <p:nvPr/>
+      </p:nvGrpSpPr>
+      <p:grpSpPr/>
+      <p:pic>
+        <p:nvPicPr>
+          <p:cNvPr id="2" name="Picture 1" descr="bg.png"/>
+          <p:cNvPicPr>
+            <a:picLocks noChangeAspect="1"/>
+          </p:cNvPicPr>
+          <p:nvPr/>
+        </p:nvPicPr>
+        <p:blipFill>
+          <a:blip r:embed="rId2"/>
+          <a:stretch>
+            <a:fillRect/>
+          </a:stretch>
+        </p:blipFill>
+        <p:spPr>
+          <a:xfrm>
+            <a:off x="0" y="0"/>
+            <a:ext cx="12192000" cy="6858000"/>
+          </a:xfrm>
+          <a:prstGeom prst="rect">
+            <a:avLst/>
+          </a:prstGeom>
+        </p:spPr>
+      </p:pic>
+      <p:sp>
+        <p:nvSpPr>
+          <p:cNvPr id="3" name="TextBox 2"/>
+          <p:cNvSpPr txBox="1"/>
+          <p:nvPr/>
+        </p:nvSpPr>
+        <p:spPr>
+          <a:xfrm>
+            <a:off x="812800" y="812800"/>
+            <a:ext cx="10566400" cy="5232400"/>
+          </a:xfrm>
+          <a:prstGeom prst="rect">
+            <a:avLst/>
+          </a:prstGeom>
+          <a:noFill/>
+        </p:spPr>
+        <p:txBody>
+          <a:bodyPr wrap="square" lIns="0" rIns="0" tIns="0" bIns="0" anchor="ctr">
+            <a:spAutoFit/>
+          </a:bodyPr>
+          <a:lstStyle/>
+          <a:p>
+            <a:pPr algn="ctr">
               <a:lnSpc>
-                <a:spcPct val="142000"/>
+                <a:spcPct val="134000"/>
               </a:lnSpc>
               <a:spcAft>
                 <a:spcPts val="900"/>
               </a:spcAft>
             </a:pPr>
             <a:r>
-              <a:rPr sz="1850" b="0" i="0">
+              <a:rPr sz="2600" b="0" i="0">
                 <a:solidFill>
                   <a:srgbClr val="FFFFFF"/>
                 </a:solidFill>
                 <a:latin typeface="Poppins"/>
               </a:rPr>
-              <a:t>repose sur une pratique qu'on refuse ?</a:t>
+              <a:t>Trois questions.</a:t>
+            </a:r>
+          </a:p>
+          <a:p>
+            <a:pPr algn="ctr">
+              <a:lnSpc>
+                <a:spcPct val="134000"/>
+              </a:lnSpc>
+              <a:spcAft>
+                <a:spcPts val="900"/>
+              </a:spcAft>
+            </a:pPr>
+            <a:r>
+              <a:rPr sz="2600" b="0" i="0">
+                <a:solidFill>
+                  <a:srgbClr val="FFFFFF"/>
+                </a:solidFill>
+                <a:latin typeface="Poppins"/>
+              </a:rPr>
+              <a:t>Aucune compétence religieuse nécessaire.</a:t>
+            </a:r>
+          </a:p>
+          <a:p>
+            <a:pPr algn="ctr">
+              <a:lnSpc>
+                <a:spcPct val="134000"/>
+              </a:lnSpc>
+              <a:spcAft>
+                <a:spcPts val="900"/>
+              </a:spcAft>
+            </a:pPr>
+            <a:r>
+              <a:rPr sz="2600" b="0" i="0">
+                <a:solidFill>
+                  <a:srgbClr val="E3A94F"/>
+                </a:solidFill>
+                <a:latin typeface="Poppins"/>
+              </a:rPr>
+              <a:t>Tu peux les poser dès lundi matin.</a:t>
+            </a:r>
+          </a:p>
+        </p:txBody>
+      </p:sp>
+    </p:spTree>
+  </p:cSld>
+  <p:clrMapOvr>
+    <a:masterClrMapping/>
+  </p:clrMapOvr>
+</p:sld>
+</file>
+
+<file path=ppt/slides/slide28.xml><?xml version="1.0" encoding="utf-8"?>
+<p:sld xmlns:a="http://schemas.openxmlformats.org/drawingml/2006/main" xmlns:p="http://schemas.openxmlformats.org/presentationml/2006/main" xmlns:r="http://schemas.openxmlformats.org/officeDocument/2006/relationships">
+  <p:cSld>
+    <p:spTree>
+      <p:nvGrpSpPr>
+        <p:cNvPr id="1" name=""/>
+        <p:cNvGrpSpPr/>
+        <p:nvPr/>
+      </p:nvGrpSpPr>
+      <p:grpSpPr/>
+      <p:pic>
+        <p:nvPicPr>
+          <p:cNvPr id="2" name="Picture 1" descr="bg.png"/>
+          <p:cNvPicPr>
+            <a:picLocks noChangeAspect="1"/>
+          </p:cNvPicPr>
+          <p:nvPr/>
+        </p:nvPicPr>
+        <p:blipFill>
+          <a:blip r:embed="rId2"/>
+          <a:stretch>
+            <a:fillRect/>
+          </a:stretch>
+        </p:blipFill>
+        <p:spPr>
+          <a:xfrm>
+            <a:off x="0" y="0"/>
+            <a:ext cx="12192000" cy="6858000"/>
+          </a:xfrm>
+          <a:prstGeom prst="rect">
+            <a:avLst/>
+          </a:prstGeom>
+        </p:spPr>
+      </p:pic>
+      <p:sp>
+        <p:nvSpPr>
+          <p:cNvPr id="3" name="TextBox 2"/>
+          <p:cNvSpPr txBox="1"/>
+          <p:nvPr/>
+        </p:nvSpPr>
+        <p:spPr>
+          <a:xfrm>
+            <a:off x="812800" y="812800"/>
+            <a:ext cx="10566400" cy="5232400"/>
+          </a:xfrm>
+          <a:prstGeom prst="rect">
+            <a:avLst/>
+          </a:prstGeom>
+          <a:noFill/>
+        </p:spPr>
+        <p:txBody>
+          <a:bodyPr wrap="square" lIns="0" rIns="0" tIns="0" bIns="0" anchor="ctr">
+            <a:spAutoFit/>
+          </a:bodyPr>
+          <a:lstStyle/>
+          <a:p>
+            <a:pPr algn="ctr">
+              <a:lnSpc>
+                <a:spcPct val="134000"/>
+              </a:lnSpc>
+              <a:spcAft>
+                <a:spcPts val="900"/>
+              </a:spcAft>
+            </a:pPr>
+            <a:r>
+              <a:rPr sz="2600" b="0" i="0">
+                <a:solidFill>
+                  <a:srgbClr val="FFFFFF"/>
+                </a:solidFill>
+                <a:latin typeface="Poppins"/>
+              </a:rPr>
+              <a:t>Halal répond à : est-ce que j'ai le droit ?</a:t>
+            </a:r>
+          </a:p>
+          <a:p>
+            <a:pPr algn="ctr">
+              <a:lnSpc>
+                <a:spcPct val="134000"/>
+              </a:lnSpc>
+              <a:spcAft>
+                <a:spcPts val="900"/>
+              </a:spcAft>
+            </a:pPr>
+            <a:r>
+              <a:rPr sz="2600" b="0" i="0">
+                <a:solidFill>
+                  <a:srgbClr val="FFFFFF"/>
+                </a:solidFill>
+                <a:latin typeface="Poppins"/>
+              </a:rPr>
+              <a:t>Ça ne répond pas à :</a:t>
+            </a:r>
+          </a:p>
+          <a:p>
+            <a:pPr algn="ctr">
+              <a:lnSpc>
+                <a:spcPct val="134000"/>
+              </a:lnSpc>
+              <a:spcAft>
+                <a:spcPts val="900"/>
+              </a:spcAft>
+            </a:pPr>
+            <a:r>
+              <a:rPr sz="2600" b="0" i="0">
+                <a:solidFill>
+                  <a:srgbClr val="E3A94F"/>
+                </a:solidFill>
+                <a:latin typeface="Poppins"/>
+              </a:rPr>
+              <a:t>est-ce que c'est ce que je dois faire ?</a:t>
+            </a:r>
+          </a:p>
+        </p:txBody>
+      </p:sp>
+    </p:spTree>
+  </p:cSld>
+  <p:clrMapOvr>
+    <a:masterClrMapping/>
+  </p:clrMapOvr>
+</p:sld>
+</file>
+
+<file path=ppt/slides/slide29.xml><?xml version="1.0" encoding="utf-8"?>
+<p:sld xmlns:a="http://schemas.openxmlformats.org/drawingml/2006/main" xmlns:p="http://schemas.openxmlformats.org/presentationml/2006/main" xmlns:r="http://schemas.openxmlformats.org/officeDocument/2006/relationships">
+  <p:cSld>
+    <p:spTree>
+      <p:nvGrpSpPr>
+        <p:cNvPr id="1" name=""/>
+        <p:cNvGrpSpPr/>
+        <p:nvPr/>
+      </p:nvGrpSpPr>
+      <p:grpSpPr/>
+      <p:sp>
+        <p:nvSpPr>
+          <p:cNvPr id="2" name="Rectangle 1"/>
+          <p:cNvSpPr/>
+          <p:nvPr/>
+        </p:nvSpPr>
+        <p:spPr>
+          <a:xfrm>
+            <a:off x="0" y="0"/>
+            <a:ext cx="12192000" cy="6858000"/>
+          </a:xfrm>
+          <a:prstGeom prst="rect">
+            <a:avLst/>
+          </a:prstGeom>
+          <a:solidFill>
+            <a:srgbClr val="E3A94F"/>
+          </a:solidFill>
+          <a:ln>
+            <a:noFill/>
+          </a:ln>
+          <a:effectLst/>
+        </p:spPr>
+        <p:style>
+          <a:lnRef idx="1">
+            <a:schemeClr val="accent1"/>
+          </a:lnRef>
+          <a:fillRef idx="3">
+            <a:schemeClr val="accent1"/>
+          </a:fillRef>
+          <a:effectRef idx="2">
+            <a:schemeClr val="accent1"/>
+          </a:effectRef>
+          <a:fontRef idx="minor">
+            <a:schemeClr val="lt1"/>
+          </a:fontRef>
+        </p:style>
+        <p:txBody>
+          <a:bodyPr rtlCol="0" anchor="ctr"/>
+          <a:lstStyle/>
+          <a:p>
+            <a:pPr algn="ctr"/>
+          </a:p>
+        </p:txBody>
+      </p:sp>
+      <p:sp>
+        <p:nvSpPr>
+          <p:cNvPr id="3" name="TextBox 2"/>
+          <p:cNvSpPr txBox="1"/>
+          <p:nvPr/>
+        </p:nvSpPr>
+        <p:spPr>
+          <a:xfrm>
+            <a:off x="952500" y="762000"/>
+            <a:ext cx="10287000" cy="952500"/>
+          </a:xfrm>
+          <a:prstGeom prst="rect">
+            <a:avLst/>
+          </a:prstGeom>
+          <a:noFill/>
+        </p:spPr>
+        <p:txBody>
+          <a:bodyPr wrap="square" lIns="0" rIns="0" tIns="0" bIns="0" anchor="t">
+            <a:spAutoFit/>
+          </a:bodyPr>
+          <a:lstStyle/>
+          <a:p>
+            <a:pPr algn="l"/>
+            <a:r>
+              <a:rPr sz="1600" b="1" i="0">
+                <a:solidFill>
+                  <a:srgbClr val="141414"/>
+                </a:solidFill>
+                <a:latin typeface="Poppins"/>
+              </a:rPr>
+              <a:t>À INSÉRER DANS TON DECK</a:t>
+            </a:r>
+          </a:p>
+        </p:txBody>
+      </p:sp>
+      <p:sp>
+        <p:nvSpPr>
+          <p:cNvPr id="4" name="TextBox 3"/>
+          <p:cNvSpPr txBox="1"/>
+          <p:nvPr/>
+        </p:nvSpPr>
+        <p:spPr>
+          <a:xfrm>
+            <a:off x="952500" y="1587500"/>
+            <a:ext cx="10287000" cy="1397000"/>
+          </a:xfrm>
+          <a:prstGeom prst="rect">
+            <a:avLst/>
+          </a:prstGeom>
+          <a:noFill/>
+        </p:spPr>
+        <p:txBody>
+          <a:bodyPr wrap="square" lIns="0" rIns="0" tIns="0" bIns="0" anchor="t">
+            <a:spAutoFit/>
+          </a:bodyPr>
+          <a:lstStyle/>
+          <a:p>
+            <a:pPr algn="l">
+              <a:lnSpc>
+                <a:spcPct val="106000"/>
+              </a:lnSpc>
+            </a:pPr>
+            <a:r>
+              <a:rPr sz="4200" b="1" i="1">
+                <a:solidFill>
+                  <a:srgbClr val="141414"/>
+                </a:solidFill>
+                <a:latin typeface="Archivo"/>
+              </a:rPr>
+              <a:t>SOYONS HONNÊTES</a:t>
+            </a:r>
+          </a:p>
+        </p:txBody>
+      </p:sp>
+      <p:sp>
+        <p:nvSpPr>
+          <p:cNvPr id="5" name="Rectangle 4"/>
+          <p:cNvSpPr/>
+          <p:nvPr/>
+        </p:nvSpPr>
+        <p:spPr>
+          <a:xfrm>
+            <a:off x="952500" y="3175000"/>
+            <a:ext cx="1651000" cy="50800"/>
+          </a:xfrm>
+          <a:prstGeom prst="rect">
+            <a:avLst/>
+          </a:prstGeom>
+          <a:solidFill>
+            <a:srgbClr val="141414"/>
+          </a:solidFill>
+          <a:ln>
+            <a:noFill/>
+          </a:ln>
+          <a:effectLst/>
+        </p:spPr>
+        <p:style>
+          <a:lnRef idx="1">
+            <a:schemeClr val="accent1"/>
+          </a:lnRef>
+          <a:fillRef idx="3">
+            <a:schemeClr val="accent1"/>
+          </a:fillRef>
+          <a:effectRef idx="2">
+            <a:schemeClr val="accent1"/>
+          </a:effectRef>
+          <a:fontRef idx="minor">
+            <a:schemeClr val="lt1"/>
+          </a:fontRef>
+        </p:style>
+        <p:txBody>
+          <a:bodyPr rtlCol="0" anchor="ctr"/>
+          <a:lstStyle/>
+          <a:p>
+            <a:pPr algn="ctr"/>
+          </a:p>
+        </p:txBody>
+      </p:sp>
+      <p:sp>
+        <p:nvSpPr>
+          <p:cNvPr id="6" name="TextBox 5"/>
+          <p:cNvSpPr txBox="1"/>
+          <p:nvPr/>
+        </p:nvSpPr>
+        <p:spPr>
+          <a:xfrm>
+            <a:off x="952500" y="3556000"/>
+            <a:ext cx="10287000" cy="2095500"/>
+          </a:xfrm>
+          <a:prstGeom prst="rect">
+            <a:avLst/>
+          </a:prstGeom>
+          <a:noFill/>
+        </p:spPr>
+        <p:txBody>
+          <a:bodyPr wrap="square" lIns="0" rIns="0" tIns="0" bIns="0" anchor="t">
+            <a:spAutoFit/>
+          </a:bodyPr>
+          <a:lstStyle/>
+          <a:p>
+            <a:pPr algn="l">
+              <a:spcAft>
+                <a:spcPts val="300"/>
+              </a:spcAft>
+            </a:pPr>
+            <a:r>
+              <a:rPr sz="1500" b="1" i="0">
+                <a:solidFill>
+                  <a:srgbClr val="141414"/>
+                </a:solidFill>
+                <a:latin typeface="Poppins"/>
+              </a:rPr>
+              <a:t>APRÈS</a:t>
+            </a:r>
+          </a:p>
+          <a:p>
+            <a:pPr algn="l">
+              <a:lnSpc>
+                <a:spcPct val="134000"/>
+              </a:lnSpc>
+              <a:spcAft>
+                <a:spcPts val="1300"/>
+              </a:spcAft>
+            </a:pPr>
+            <a:r>
+              <a:rPr sz="1900" b="0" i="0">
+                <a:solidFill>
+                  <a:srgbClr val="141414"/>
+                </a:solidFill>
+                <a:latin typeface="Poppins"/>
+              </a:rPr>
+              <a:t>le bloc « CE QUE TU EMPORTES » que tu viens de poser</a:t>
+            </a:r>
+          </a:p>
+          <a:p>
+            <a:pPr algn="l">
+              <a:spcAft>
+                <a:spcPts val="300"/>
+              </a:spcAft>
+            </a:pPr>
+            <a:r>
+              <a:rPr sz="1500" b="1" i="0">
+                <a:solidFill>
+                  <a:srgbClr val="141414"/>
+                </a:solidFill>
+                <a:latin typeface="Poppins"/>
+              </a:rPr>
+              <a:t>REMPLACE aussi</a:t>
+            </a:r>
+          </a:p>
+          <a:p>
+            <a:pPr algn="l">
+              <a:lnSpc>
+                <a:spcPct val="134000"/>
+              </a:lnSpc>
+              <a:spcAft>
+                <a:spcPts val="1300"/>
+              </a:spcAft>
+            </a:pPr>
+            <a:r>
+              <a:rPr sz="1900" b="0" i="0">
+                <a:solidFill>
+                  <a:srgbClr val="141414"/>
+                </a:solidFill>
+                <a:latin typeface="Poppins"/>
+              </a:rPr>
+              <a:t>« ET CE QU'ON NE SAIT PAS ENCORE »</a:t>
+            </a:r>
+          </a:p>
+          <a:p>
+            <a:pPr algn="l">
+              <a:spcAft>
+                <a:spcPts val="300"/>
+              </a:spcAft>
+            </a:pPr>
+            <a:r>
+              <a:rPr sz="1500" b="1" i="0">
+                <a:solidFill>
+                  <a:srgbClr val="141414"/>
+                </a:solidFill>
+                <a:latin typeface="Poppins"/>
+              </a:rPr>
+              <a:t>AVANT ta slide</a:t>
+            </a:r>
+          </a:p>
+          <a:p>
+            <a:pPr algn="l">
+              <a:lnSpc>
+                <a:spcPct val="134000"/>
+              </a:lnSpc>
+              <a:spcAft>
+                <a:spcPts val="1300"/>
+              </a:spcAft>
+            </a:pPr>
+            <a:r>
+              <a:rPr sz="1900" b="0" i="0">
+                <a:solidFill>
+                  <a:srgbClr val="141414"/>
+                </a:solidFill>
+                <a:latin typeface="Poppins"/>
+              </a:rPr>
+              <a:t>« LE QUIZ »</a:t>
+            </a:r>
+          </a:p>
+        </p:txBody>
+      </p:sp>
+      <p:sp>
+        <p:nvSpPr>
+          <p:cNvPr id="7" name="TextBox 6"/>
+          <p:cNvSpPr txBox="1"/>
+          <p:nvPr/>
+        </p:nvSpPr>
+        <p:spPr>
+          <a:xfrm>
+            <a:off x="952500" y="5905500"/>
+            <a:ext cx="10287000" cy="444500"/>
+          </a:xfrm>
+          <a:prstGeom prst="rect">
+            <a:avLst/>
+          </a:prstGeom>
+          <a:noFill/>
+        </p:spPr>
+        <p:txBody>
+          <a:bodyPr wrap="square" lIns="0" rIns="0" tIns="0" bIns="0" anchor="t">
+            <a:spAutoFit/>
+          </a:bodyPr>
+          <a:lstStyle/>
+          <a:p>
+            <a:pPr algn="l"/>
+            <a:r>
+              <a:rPr sz="1400" b="0" i="1">
+                <a:solidFill>
+                  <a:srgbClr val="141414"/>
+                </a:solidFill>
+                <a:latin typeface="Poppins"/>
+              </a:rPr>
+              <a:t>Les 5 slides qui suivent forment ce bloc. Cette page-ci ne va pas dans le deck.</a:t>
             </a:r>
           </a:p>
         </p:txBody>
@@ -8066,7 +10496,7 @@
       <p:grpSpPr/>
       <p:pic>
         <p:nvPicPr>
-          <p:cNvPr id="2" name="Picture 1" descr="bg2.png"/>
+          <p:cNvPr id="2" name="Picture 1" descr="bg.png"/>
           <p:cNvPicPr>
             <a:picLocks noChangeAspect="1"/>
           </p:cNvPicPr>
@@ -8090,94 +10520,20 @@
       </p:pic>
       <p:sp>
         <p:nvSpPr>
-          <p:cNvPr id="3" name="TextBox 2"/>
-          <p:cNvSpPr txBox="1"/>
-          <p:nvPr/>
-        </p:nvSpPr>
-        <p:spPr>
-          <a:xfrm>
-            <a:off x="812800" y="2032000"/>
-            <a:ext cx="10566400" cy="762000"/>
-          </a:xfrm>
-          <a:prstGeom prst="rect">
-            <a:avLst/>
-          </a:prstGeom>
-          <a:noFill/>
-        </p:spPr>
-        <p:txBody>
-          <a:bodyPr wrap="square" lIns="0" rIns="0" tIns="0" bIns="0" anchor="b">
-            <a:spAutoFit/>
-          </a:bodyPr>
-          <a:lstStyle/>
-          <a:p>
-            <a:pPr algn="l"/>
-            <a:r>
-              <a:rPr sz="1700" b="1" i="0">
-                <a:solidFill>
-                  <a:srgbClr val="E3A94F"/>
-                </a:solidFill>
-                <a:latin typeface="Poppins"/>
-              </a:rPr>
-              <a:t>PARTIE 1 SUR 4</a:t>
-            </a:r>
-          </a:p>
-        </p:txBody>
-      </p:sp>
-      <p:sp>
-        <p:nvSpPr>
-          <p:cNvPr id="4" name="TextBox 3"/>
-          <p:cNvSpPr txBox="1"/>
-          <p:nvPr/>
-        </p:nvSpPr>
-        <p:spPr>
-          <a:xfrm>
-            <a:off x="812800" y="2870200"/>
-            <a:ext cx="10566400" cy="1651000"/>
-          </a:xfrm>
-          <a:prstGeom prst="rect">
-            <a:avLst/>
-          </a:prstGeom>
-          <a:noFill/>
-        </p:spPr>
-        <p:txBody>
-          <a:bodyPr wrap="square" lIns="0" rIns="0" tIns="0" bIns="0" anchor="t">
-            <a:spAutoFit/>
-          </a:bodyPr>
-          <a:lstStyle/>
-          <a:p>
-            <a:pPr algn="l">
-              <a:lnSpc>
-                <a:spcPct val="104000"/>
-              </a:lnSpc>
-            </a:pPr>
-            <a:r>
-              <a:rPr sz="5500" b="1" i="1">
-                <a:solidFill>
-                  <a:srgbClr val="FFFFFF"/>
-                </a:solidFill>
-                <a:latin typeface="Archivo"/>
-              </a:rPr>
-              <a:t>POSER LE CADRE</a:t>
-            </a:r>
-          </a:p>
-        </p:txBody>
-      </p:sp>
-      <p:sp>
-        <p:nvSpPr>
-          <p:cNvPr id="5" name="Rectangle 4"/>
+          <p:cNvPr id="3" name="Rectangle 2"/>
           <p:cNvSpPr/>
           <p:nvPr/>
         </p:nvSpPr>
         <p:spPr>
           <a:xfrm>
-            <a:off x="812800" y="4699000"/>
-            <a:ext cx="1905000" cy="31750"/>
+            <a:off x="622300" y="2884170"/>
+            <a:ext cx="10947400" cy="1089660"/>
           </a:xfrm>
           <a:prstGeom prst="rect">
             <a:avLst/>
           </a:prstGeom>
           <a:solidFill>
-            <a:srgbClr val="E3A94F"/>
+            <a:srgbClr val="FFFFFF"/>
           </a:solidFill>
           <a:ln>
             <a:noFill/>
@@ -8203,6 +10559,1159 @@
           <a:lstStyle/>
           <a:p>
             <a:pPr algn="ctr"/>
+          </a:p>
+        </p:txBody>
+      </p:sp>
+      <p:sp>
+        <p:nvSpPr>
+          <p:cNvPr id="4" name="TextBox 3"/>
+          <p:cNvSpPr txBox="1"/>
+          <p:nvPr/>
+        </p:nvSpPr>
+        <p:spPr>
+          <a:xfrm>
+            <a:off x="812800" y="2884170"/>
+            <a:ext cx="10566400" cy="1089660"/>
+          </a:xfrm>
+          <a:prstGeom prst="rect">
+            <a:avLst/>
+          </a:prstGeom>
+          <a:noFill/>
+        </p:spPr>
+        <p:txBody>
+          <a:bodyPr wrap="square" lIns="0" rIns="0" tIns="0" bIns="0" anchor="ctr">
+            <a:spAutoFit/>
+          </a:bodyPr>
+          <a:lstStyle/>
+          <a:p>
+            <a:pPr algn="ctr">
+              <a:lnSpc>
+                <a:spcPct val="100000"/>
+              </a:lnSpc>
+            </a:pPr>
+            <a:r>
+              <a:rPr sz="6600" b="1" i="1">
+                <a:solidFill>
+                  <a:srgbClr val="131313"/>
+                </a:solidFill>
+                <a:latin typeface="Archivo"/>
+              </a:rPr>
+              <a:t>L</a:t>
+            </a:r>
+            <a:r>
+              <a:rPr sz="6600" b="1" i="1">
+                <a:solidFill>
+                  <a:srgbClr val="131313"/>
+                </a:solidFill>
+                <a:latin typeface="Archivo"/>
+              </a:rPr>
+              <a:t>E</a:t>
+            </a:r>
+            <a:r>
+              <a:rPr sz="6600" b="1" i="1">
+                <a:solidFill>
+                  <a:srgbClr val="131313"/>
+                </a:solidFill>
+                <a:latin typeface="Archivo"/>
+              </a:rPr>
+              <a:t> </a:t>
+            </a:r>
+            <a:r>
+              <a:rPr sz="6600" b="1" i="1">
+                <a:solidFill>
+                  <a:srgbClr val="131313"/>
+                </a:solidFill>
+                <a:latin typeface="Archivo"/>
+              </a:rPr>
+              <a:t>P</a:t>
+            </a:r>
+            <a:r>
+              <a:rPr sz="6600" b="1" i="1">
+                <a:solidFill>
+                  <a:srgbClr val="131313"/>
+                </a:solidFill>
+                <a:latin typeface="Archivo"/>
+              </a:rPr>
+              <a:t>L</a:t>
+            </a:r>
+            <a:r>
+              <a:rPr sz="6600" b="1" i="1">
+                <a:solidFill>
+                  <a:srgbClr val="1C1914"/>
+                </a:solidFill>
+                <a:latin typeface="Archivo"/>
+              </a:rPr>
+              <a:t>A</a:t>
+            </a:r>
+            <a:r>
+              <a:rPr sz="6600" b="1" i="1">
+                <a:solidFill>
+                  <a:srgbClr val="272115"/>
+                </a:solidFill>
+                <a:latin typeface="Archivo"/>
+              </a:rPr>
+              <a:t>N</a:t>
+            </a:r>
+            <a:r>
+              <a:rPr sz="6600" b="1" i="1">
+                <a:solidFill>
+                  <a:srgbClr val="322817"/>
+                </a:solidFill>
+                <a:latin typeface="Archivo"/>
+              </a:rPr>
+              <a:t> </a:t>
+            </a:r>
+            <a:r>
+              <a:rPr sz="6600" b="1" i="1">
+                <a:solidFill>
+                  <a:srgbClr val="3D3019"/>
+                </a:solidFill>
+                <a:latin typeface="Archivo"/>
+              </a:rPr>
+              <a:t>D</a:t>
+            </a:r>
+            <a:r>
+              <a:rPr sz="6600" b="1" i="1">
+                <a:solidFill>
+                  <a:srgbClr val="48381A"/>
+                </a:solidFill>
+                <a:latin typeface="Archivo"/>
+              </a:rPr>
+              <a:t>E</a:t>
+            </a:r>
+            <a:r>
+              <a:rPr sz="6600" b="1" i="1">
+                <a:solidFill>
+                  <a:srgbClr val="53401C"/>
+                </a:solidFill>
+                <a:latin typeface="Archivo"/>
+              </a:rPr>
+              <a:t> </a:t>
+            </a:r>
+            <a:r>
+              <a:rPr sz="6600" b="1" i="1">
+                <a:solidFill>
+                  <a:srgbClr val="5E471E"/>
+                </a:solidFill>
+                <a:latin typeface="Archivo"/>
+              </a:rPr>
+              <a:t>L</a:t>
+            </a:r>
+            <a:r>
+              <a:rPr sz="6600" b="1" i="1">
+                <a:solidFill>
+                  <a:srgbClr val="6A4F1F"/>
+                </a:solidFill>
+                <a:latin typeface="Archivo"/>
+              </a:rPr>
+              <a:t>A</a:t>
+            </a:r>
+            <a:r>
+              <a:rPr sz="6600" b="1" i="1">
+                <a:solidFill>
+                  <a:srgbClr val="755721"/>
+                </a:solidFill>
+                <a:latin typeface="Archivo"/>
+              </a:rPr>
+              <a:t> </a:t>
+            </a:r>
+            <a:r>
+              <a:rPr sz="6600" b="1" i="1">
+                <a:solidFill>
+                  <a:srgbClr val="805F22"/>
+                </a:solidFill>
+                <a:latin typeface="Archivo"/>
+              </a:rPr>
+              <a:t>S</a:t>
+            </a:r>
+            <a:r>
+              <a:rPr sz="6600" b="1" i="1">
+                <a:solidFill>
+                  <a:srgbClr val="8B6624"/>
+                </a:solidFill>
+                <a:latin typeface="Archivo"/>
+              </a:rPr>
+              <a:t>O</a:t>
+            </a:r>
+            <a:r>
+              <a:rPr sz="6600" b="1" i="1">
+                <a:solidFill>
+                  <a:srgbClr val="966E26"/>
+                </a:solidFill>
+                <a:latin typeface="Archivo"/>
+              </a:rPr>
+              <a:t>I</a:t>
+            </a:r>
+            <a:r>
+              <a:rPr sz="6600" b="1" i="1">
+                <a:solidFill>
+                  <a:srgbClr val="A17627"/>
+                </a:solidFill>
+                <a:latin typeface="Archivo"/>
+              </a:rPr>
+              <a:t>R</a:t>
+            </a:r>
+            <a:r>
+              <a:rPr sz="6600" b="1" i="1">
+                <a:solidFill>
+                  <a:srgbClr val="AC7E29"/>
+                </a:solidFill>
+                <a:latin typeface="Archivo"/>
+              </a:rPr>
+              <a:t>É</a:t>
+            </a:r>
+            <a:r>
+              <a:rPr sz="6600" b="1" i="1">
+                <a:solidFill>
+                  <a:srgbClr val="B8862B"/>
+                </a:solidFill>
+                <a:latin typeface="Archivo"/>
+              </a:rPr>
+              <a:t>E</a:t>
+            </a:r>
+          </a:p>
+        </p:txBody>
+      </p:sp>
+    </p:spTree>
+  </p:cSld>
+  <p:clrMapOvr>
+    <a:masterClrMapping/>
+  </p:clrMapOvr>
+</p:sld>
+</file>
+
+<file path=ppt/slides/slide30.xml><?xml version="1.0" encoding="utf-8"?>
+<p:sld xmlns:a="http://schemas.openxmlformats.org/drawingml/2006/main" xmlns:p="http://schemas.openxmlformats.org/presentationml/2006/main" xmlns:r="http://schemas.openxmlformats.org/officeDocument/2006/relationships">
+  <p:cSld>
+    <p:spTree>
+      <p:nvGrpSpPr>
+        <p:cNvPr id="1" name=""/>
+        <p:cNvGrpSpPr/>
+        <p:nvPr/>
+      </p:nvGrpSpPr>
+      <p:grpSpPr/>
+      <p:pic>
+        <p:nvPicPr>
+          <p:cNvPr id="2" name="Picture 1" descr="bg.png"/>
+          <p:cNvPicPr>
+            <a:picLocks noChangeAspect="1"/>
+          </p:cNvPicPr>
+          <p:nvPr/>
+        </p:nvPicPr>
+        <p:blipFill>
+          <a:blip r:embed="rId2"/>
+          <a:stretch>
+            <a:fillRect/>
+          </a:stretch>
+        </p:blipFill>
+        <p:spPr>
+          <a:xfrm>
+            <a:off x="0" y="0"/>
+            <a:ext cx="12192000" cy="6858000"/>
+          </a:xfrm>
+          <a:prstGeom prst="rect">
+            <a:avLst/>
+          </a:prstGeom>
+        </p:spPr>
+      </p:pic>
+      <p:sp>
+        <p:nvSpPr>
+          <p:cNvPr id="3" name="Rectangle 2"/>
+          <p:cNvSpPr/>
+          <p:nvPr/>
+        </p:nvSpPr>
+        <p:spPr>
+          <a:xfrm>
+            <a:off x="1879600" y="2884170"/>
+            <a:ext cx="8432800" cy="1089660"/>
+          </a:xfrm>
+          <a:prstGeom prst="rect">
+            <a:avLst/>
+          </a:prstGeom>
+          <a:solidFill>
+            <a:srgbClr val="FFFFFF"/>
+          </a:solidFill>
+          <a:ln>
+            <a:noFill/>
+          </a:ln>
+          <a:effectLst/>
+        </p:spPr>
+        <p:style>
+          <a:lnRef idx="1">
+            <a:schemeClr val="accent1"/>
+          </a:lnRef>
+          <a:fillRef idx="3">
+            <a:schemeClr val="accent1"/>
+          </a:fillRef>
+          <a:effectRef idx="2">
+            <a:schemeClr val="accent1"/>
+          </a:effectRef>
+          <a:fontRef idx="minor">
+            <a:schemeClr val="lt1"/>
+          </a:fontRef>
+        </p:style>
+        <p:txBody>
+          <a:bodyPr rtlCol="0" anchor="ctr"/>
+          <a:lstStyle/>
+          <a:p>
+            <a:pPr algn="ctr"/>
+          </a:p>
+        </p:txBody>
+      </p:sp>
+      <p:sp>
+        <p:nvSpPr>
+          <p:cNvPr id="4" name="TextBox 3"/>
+          <p:cNvSpPr txBox="1"/>
+          <p:nvPr/>
+        </p:nvSpPr>
+        <p:spPr>
+          <a:xfrm>
+            <a:off x="2070100" y="2884170"/>
+            <a:ext cx="8051800" cy="1089660"/>
+          </a:xfrm>
+          <a:prstGeom prst="rect">
+            <a:avLst/>
+          </a:prstGeom>
+          <a:noFill/>
+        </p:spPr>
+        <p:txBody>
+          <a:bodyPr wrap="square" lIns="0" rIns="0" tIns="0" bIns="0" anchor="ctr">
+            <a:spAutoFit/>
+          </a:bodyPr>
+          <a:lstStyle/>
+          <a:p>
+            <a:pPr algn="ctr">
+              <a:lnSpc>
+                <a:spcPct val="100000"/>
+              </a:lnSpc>
+            </a:pPr>
+            <a:r>
+              <a:rPr sz="6600" b="1" i="1">
+                <a:solidFill>
+                  <a:srgbClr val="131313"/>
+                </a:solidFill>
+                <a:latin typeface="Archivo"/>
+              </a:rPr>
+              <a:t>S</a:t>
+            </a:r>
+            <a:r>
+              <a:rPr sz="6600" b="1" i="1">
+                <a:solidFill>
+                  <a:srgbClr val="131313"/>
+                </a:solidFill>
+                <a:latin typeface="Archivo"/>
+              </a:rPr>
+              <a:t>O</a:t>
+            </a:r>
+            <a:r>
+              <a:rPr sz="6600" b="1" i="1">
+                <a:solidFill>
+                  <a:srgbClr val="131313"/>
+                </a:solidFill>
+                <a:latin typeface="Archivo"/>
+              </a:rPr>
+              <a:t>Y</a:t>
+            </a:r>
+            <a:r>
+              <a:rPr sz="6600" b="1" i="1">
+                <a:solidFill>
+                  <a:srgbClr val="131313"/>
+                </a:solidFill>
+                <a:latin typeface="Archivo"/>
+              </a:rPr>
+              <a:t>O</a:t>
+            </a:r>
+            <a:r>
+              <a:rPr sz="6600" b="1" i="1">
+                <a:solidFill>
+                  <a:srgbClr val="201C15"/>
+                </a:solidFill>
+                <a:latin typeface="Archivo"/>
+              </a:rPr>
+              <a:t>N</a:t>
+            </a:r>
+            <a:r>
+              <a:rPr sz="6600" b="1" i="1">
+                <a:solidFill>
+                  <a:srgbClr val="302717"/>
+                </a:solidFill>
+                <a:latin typeface="Archivo"/>
+              </a:rPr>
+              <a:t>S</a:t>
+            </a:r>
+            <a:r>
+              <a:rPr sz="6600" b="1" i="1">
+                <a:solidFill>
+                  <a:srgbClr val="3F3119"/>
+                </a:solidFill>
+                <a:latin typeface="Archivo"/>
+              </a:rPr>
+              <a:t> </a:t>
+            </a:r>
+            <a:r>
+              <a:rPr sz="6600" b="1" i="1">
+                <a:solidFill>
+                  <a:srgbClr val="4E3C1B"/>
+                </a:solidFill>
+                <a:latin typeface="Archivo"/>
+              </a:rPr>
+              <a:t>H</a:t>
+            </a:r>
+            <a:r>
+              <a:rPr sz="6600" b="1" i="1">
+                <a:solidFill>
+                  <a:srgbClr val="5D461D"/>
+                </a:solidFill>
+                <a:latin typeface="Archivo"/>
+              </a:rPr>
+              <a:t>O</a:t>
+            </a:r>
+            <a:r>
+              <a:rPr sz="6600" b="1" i="1">
+                <a:solidFill>
+                  <a:srgbClr val="6C5120"/>
+                </a:solidFill>
+                <a:latin typeface="Archivo"/>
+              </a:rPr>
+              <a:t>N</a:t>
+            </a:r>
+            <a:r>
+              <a:rPr sz="6600" b="1" i="1">
+                <a:solidFill>
+                  <a:srgbClr val="7B5B22"/>
+                </a:solidFill>
+                <a:latin typeface="Archivo"/>
+              </a:rPr>
+              <a:t>N</a:t>
+            </a:r>
+            <a:r>
+              <a:rPr sz="6600" b="1" i="1">
+                <a:solidFill>
+                  <a:srgbClr val="8A6624"/>
+                </a:solidFill>
+                <a:latin typeface="Archivo"/>
+              </a:rPr>
+              <a:t>Ê</a:t>
+            </a:r>
+            <a:r>
+              <a:rPr sz="6600" b="1" i="1">
+                <a:solidFill>
+                  <a:srgbClr val="997026"/>
+                </a:solidFill>
+                <a:latin typeface="Archivo"/>
+              </a:rPr>
+              <a:t>T</a:t>
+            </a:r>
+            <a:r>
+              <a:rPr sz="6600" b="1" i="1">
+                <a:solidFill>
+                  <a:srgbClr val="A87B28"/>
+                </a:solidFill>
+                <a:latin typeface="Archivo"/>
+              </a:rPr>
+              <a:t>E</a:t>
+            </a:r>
+            <a:r>
+              <a:rPr sz="6600" b="1" i="1">
+                <a:solidFill>
+                  <a:srgbClr val="B8862B"/>
+                </a:solidFill>
+                <a:latin typeface="Archivo"/>
+              </a:rPr>
+              <a:t>S</a:t>
+            </a:r>
+          </a:p>
+        </p:txBody>
+      </p:sp>
+    </p:spTree>
+  </p:cSld>
+  <p:clrMapOvr>
+    <a:masterClrMapping/>
+  </p:clrMapOvr>
+</p:sld>
+</file>
+
+<file path=ppt/slides/slide31.xml><?xml version="1.0" encoding="utf-8"?>
+<p:sld xmlns:a="http://schemas.openxmlformats.org/drawingml/2006/main" xmlns:p="http://schemas.openxmlformats.org/presentationml/2006/main" xmlns:r="http://schemas.openxmlformats.org/officeDocument/2006/relationships">
+  <p:cSld>
+    <p:spTree>
+      <p:nvGrpSpPr>
+        <p:cNvPr id="1" name=""/>
+        <p:cNvGrpSpPr/>
+        <p:nvPr/>
+      </p:nvGrpSpPr>
+      <p:grpSpPr/>
+      <p:pic>
+        <p:nvPicPr>
+          <p:cNvPr id="2" name="Picture 1" descr="bg.png"/>
+          <p:cNvPicPr>
+            <a:picLocks noChangeAspect="1"/>
+          </p:cNvPicPr>
+          <p:nvPr/>
+        </p:nvPicPr>
+        <p:blipFill>
+          <a:blip r:embed="rId2"/>
+          <a:stretch>
+            <a:fillRect/>
+          </a:stretch>
+        </p:blipFill>
+        <p:spPr>
+          <a:xfrm>
+            <a:off x="0" y="0"/>
+            <a:ext cx="12192000" cy="6858000"/>
+          </a:xfrm>
+          <a:prstGeom prst="rect">
+            <a:avLst/>
+          </a:prstGeom>
+        </p:spPr>
+      </p:pic>
+      <p:sp>
+        <p:nvSpPr>
+          <p:cNvPr id="3" name="TextBox 2"/>
+          <p:cNvSpPr txBox="1"/>
+          <p:nvPr/>
+        </p:nvSpPr>
+        <p:spPr>
+          <a:xfrm>
+            <a:off x="812800" y="812800"/>
+            <a:ext cx="10566400" cy="5232400"/>
+          </a:xfrm>
+          <a:prstGeom prst="rect">
+            <a:avLst/>
+          </a:prstGeom>
+          <a:noFill/>
+        </p:spPr>
+        <p:txBody>
+          <a:bodyPr wrap="square" lIns="0" rIns="0" tIns="0" bIns="0" anchor="ctr">
+            <a:spAutoFit/>
+          </a:bodyPr>
+          <a:lstStyle/>
+          <a:p>
+            <a:pPr algn="ctr">
+              <a:lnSpc>
+                <a:spcPct val="134000"/>
+              </a:lnSpc>
+              <a:spcAft>
+                <a:spcPts val="900"/>
+              </a:spcAft>
+            </a:pPr>
+            <a:r>
+              <a:rPr sz="2600" b="0" i="0">
+                <a:solidFill>
+                  <a:srgbClr val="FFFFFF"/>
+                </a:solidFill>
+                <a:latin typeface="Poppins"/>
+              </a:rPr>
+              <a:t>On n'est pas venus vous définir</a:t>
+            </a:r>
+          </a:p>
+          <a:p>
+            <a:pPr algn="ctr">
+              <a:lnSpc>
+                <a:spcPct val="134000"/>
+              </a:lnSpc>
+              <a:spcAft>
+                <a:spcPts val="900"/>
+              </a:spcAft>
+            </a:pPr>
+            <a:r>
+              <a:rPr sz="2600" b="0" i="0">
+                <a:solidFill>
+                  <a:srgbClr val="FFFFFF"/>
+                </a:solidFill>
+                <a:latin typeface="Poppins"/>
+              </a:rPr>
+              <a:t>le paradigme de l'entrepreneur musulman.</a:t>
+            </a:r>
+          </a:p>
+          <a:p>
+            <a:pPr algn="ctr">
+              <a:lnSpc>
+                <a:spcPct val="134000"/>
+              </a:lnSpc>
+              <a:spcAft>
+                <a:spcPts val="900"/>
+              </a:spcAft>
+            </a:pPr>
+            <a:r>
+              <a:rPr sz="2600" b="0" i="0">
+                <a:solidFill>
+                  <a:srgbClr val="E3A94F"/>
+                </a:solidFill>
+                <a:latin typeface="Poppins"/>
+              </a:rPr>
+              <a:t>On n'en est pas là.</a:t>
+            </a:r>
+          </a:p>
+        </p:txBody>
+      </p:sp>
+    </p:spTree>
+  </p:cSld>
+  <p:clrMapOvr>
+    <a:masterClrMapping/>
+  </p:clrMapOvr>
+</p:sld>
+</file>
+
+<file path=ppt/slides/slide32.xml><?xml version="1.0" encoding="utf-8"?>
+<p:sld xmlns:a="http://schemas.openxmlformats.org/drawingml/2006/main" xmlns:p="http://schemas.openxmlformats.org/presentationml/2006/main" xmlns:r="http://schemas.openxmlformats.org/officeDocument/2006/relationships">
+  <p:cSld>
+    <p:spTree>
+      <p:nvGrpSpPr>
+        <p:cNvPr id="1" name=""/>
+        <p:cNvGrpSpPr/>
+        <p:nvPr/>
+      </p:nvGrpSpPr>
+      <p:grpSpPr/>
+      <p:pic>
+        <p:nvPicPr>
+          <p:cNvPr id="2" name="Picture 1" descr="bg.png"/>
+          <p:cNvPicPr>
+            <a:picLocks noChangeAspect="1"/>
+          </p:cNvPicPr>
+          <p:nvPr/>
+        </p:nvPicPr>
+        <p:blipFill>
+          <a:blip r:embed="rId2"/>
+          <a:stretch>
+            <a:fillRect/>
+          </a:stretch>
+        </p:blipFill>
+        <p:spPr>
+          <a:xfrm>
+            <a:off x="0" y="0"/>
+            <a:ext cx="12192000" cy="6858000"/>
+          </a:xfrm>
+          <a:prstGeom prst="rect">
+            <a:avLst/>
+          </a:prstGeom>
+        </p:spPr>
+      </p:pic>
+      <p:sp>
+        <p:nvSpPr>
+          <p:cNvPr id="3" name="TextBox 2"/>
+          <p:cNvSpPr txBox="1"/>
+          <p:nvPr/>
+        </p:nvSpPr>
+        <p:spPr>
+          <a:xfrm>
+            <a:off x="812800" y="812800"/>
+            <a:ext cx="10566400" cy="698500"/>
+          </a:xfrm>
+          <a:prstGeom prst="rect">
+            <a:avLst/>
+          </a:prstGeom>
+          <a:noFill/>
+        </p:spPr>
+        <p:txBody>
+          <a:bodyPr wrap="square" lIns="0" rIns="0" tIns="0" bIns="0" anchor="t">
+            <a:spAutoFit/>
+          </a:bodyPr>
+          <a:lstStyle/>
+          <a:p>
+            <a:pPr algn="l">
+              <a:lnSpc>
+                <a:spcPct val="114000"/>
+              </a:lnSpc>
+            </a:pPr>
+            <a:r>
+              <a:rPr sz="2000" b="1" i="1">
+                <a:solidFill>
+                  <a:srgbClr val="FFFFFF"/>
+                </a:solidFill>
+                <a:latin typeface="Archivo"/>
+              </a:rPr>
+              <a:t>CE QU'ON A FAIT CE SOIR</a:t>
+            </a:r>
+          </a:p>
+        </p:txBody>
+      </p:sp>
+      <p:sp>
+        <p:nvSpPr>
+          <p:cNvPr id="4" name="Rectangle 3"/>
+          <p:cNvSpPr/>
+          <p:nvPr/>
+        </p:nvSpPr>
+        <p:spPr>
+          <a:xfrm>
+            <a:off x="812800" y="1879600"/>
+            <a:ext cx="1143000" cy="25400"/>
+          </a:xfrm>
+          <a:prstGeom prst="rect">
+            <a:avLst/>
+          </a:prstGeom>
+          <a:solidFill>
+            <a:srgbClr val="E3A94F"/>
+          </a:solidFill>
+          <a:ln>
+            <a:noFill/>
+          </a:ln>
+          <a:effectLst/>
+        </p:spPr>
+        <p:style>
+          <a:lnRef idx="1">
+            <a:schemeClr val="accent1"/>
+          </a:lnRef>
+          <a:fillRef idx="3">
+            <a:schemeClr val="accent1"/>
+          </a:fillRef>
+          <a:effectRef idx="2">
+            <a:schemeClr val="accent1"/>
+          </a:effectRef>
+          <a:fontRef idx="minor">
+            <a:schemeClr val="lt1"/>
+          </a:fontRef>
+        </p:style>
+        <p:txBody>
+          <a:bodyPr rtlCol="0" anchor="ctr"/>
+          <a:lstStyle/>
+          <a:p>
+            <a:pPr algn="ctr"/>
+          </a:p>
+        </p:txBody>
+      </p:sp>
+      <p:sp>
+        <p:nvSpPr>
+          <p:cNvPr id="5" name="TextBox 4"/>
+          <p:cNvSpPr txBox="1"/>
+          <p:nvPr/>
+        </p:nvSpPr>
+        <p:spPr>
+          <a:xfrm>
+            <a:off x="812800" y="2222500"/>
+            <a:ext cx="10566400" cy="3822700"/>
+          </a:xfrm>
+          <a:prstGeom prst="rect">
+            <a:avLst/>
+          </a:prstGeom>
+          <a:noFill/>
+        </p:spPr>
+        <p:txBody>
+          <a:bodyPr wrap="square" lIns="0" rIns="0" tIns="0" bIns="0" anchor="t">
+            <a:spAutoFit/>
+          </a:bodyPr>
+          <a:lstStyle/>
+          <a:p>
+            <a:pPr algn="l">
+              <a:lnSpc>
+                <a:spcPct val="142000"/>
+              </a:lnSpc>
+              <a:spcAft>
+                <a:spcPts val="900"/>
+              </a:spcAft>
+            </a:pPr>
+            <a:r>
+              <a:rPr sz="1850" b="0" i="0">
+                <a:solidFill>
+                  <a:srgbClr val="FFFFFF"/>
+                </a:solidFill>
+                <a:latin typeface="Poppins"/>
+              </a:rPr>
+              <a:t>On vous a posé les questions qui nous travaillent</a:t>
+            </a:r>
+          </a:p>
+          <a:p>
+            <a:pPr algn="l">
+              <a:lnSpc>
+                <a:spcPct val="142000"/>
+              </a:lnSpc>
+              <a:spcAft>
+                <a:spcPts val="900"/>
+              </a:spcAft>
+            </a:pPr>
+            <a:r>
+              <a:rPr sz="1850" b="0" i="0">
+                <a:solidFill>
+                  <a:srgbClr val="FFFFFF"/>
+                </a:solidFill>
+                <a:latin typeface="Poppins"/>
+              </a:rPr>
+              <a:t>On vous a montré où on en est de notre propre réflexion</a:t>
+            </a:r>
+          </a:p>
+          <a:p>
+            <a:pPr algn="l">
+              <a:lnSpc>
+                <a:spcPct val="142000"/>
+              </a:lnSpc>
+              <a:spcAft>
+                <a:spcPts val="900"/>
+              </a:spcAft>
+            </a:pPr>
+            <a:r>
+              <a:rPr sz="1850" b="0" i="0">
+                <a:solidFill>
+                  <a:srgbClr val="FFFFFF"/>
+                </a:solidFill>
+                <a:latin typeface="Poppins"/>
+              </a:rPr>
+              <a:t>On essaie nous-mêmes d'incarner tout ça, et on n'y arrive pas tous les jours</a:t>
+            </a:r>
+          </a:p>
+          <a:p>
+            <a:pPr algn="l">
+              <a:lnSpc>
+                <a:spcPct val="142000"/>
+              </a:lnSpc>
+              <a:spcAft>
+                <a:spcPts val="900"/>
+              </a:spcAft>
+            </a:pPr>
+            <a:r>
+              <a:rPr sz="1850" b="0" i="0">
+                <a:solidFill>
+                  <a:srgbClr val="E3A94F"/>
+                </a:solidFill>
+                <a:latin typeface="Poppins"/>
+              </a:rPr>
+              <a:t>👉 C'est un chantier. Pas une conclusion.</a:t>
+            </a:r>
+          </a:p>
+        </p:txBody>
+      </p:sp>
+    </p:spTree>
+  </p:cSld>
+  <p:clrMapOvr>
+    <a:masterClrMapping/>
+  </p:clrMapOvr>
+</p:sld>
+</file>
+
+<file path=ppt/slides/slide33.xml><?xml version="1.0" encoding="utf-8"?>
+<p:sld xmlns:a="http://schemas.openxmlformats.org/drawingml/2006/main" xmlns:p="http://schemas.openxmlformats.org/presentationml/2006/main" xmlns:r="http://schemas.openxmlformats.org/officeDocument/2006/relationships">
+  <p:cSld>
+    <p:spTree>
+      <p:nvGrpSpPr>
+        <p:cNvPr id="1" name=""/>
+        <p:cNvGrpSpPr/>
+        <p:nvPr/>
+      </p:nvGrpSpPr>
+      <p:grpSpPr/>
+      <p:pic>
+        <p:nvPicPr>
+          <p:cNvPr id="2" name="Picture 1" descr="bg.png"/>
+          <p:cNvPicPr>
+            <a:picLocks noChangeAspect="1"/>
+          </p:cNvPicPr>
+          <p:nvPr/>
+        </p:nvPicPr>
+        <p:blipFill>
+          <a:blip r:embed="rId2"/>
+          <a:stretch>
+            <a:fillRect/>
+          </a:stretch>
+        </p:blipFill>
+        <p:spPr>
+          <a:xfrm>
+            <a:off x="0" y="0"/>
+            <a:ext cx="12192000" cy="6858000"/>
+          </a:xfrm>
+          <a:prstGeom prst="rect">
+            <a:avLst/>
+          </a:prstGeom>
+        </p:spPr>
+      </p:pic>
+      <p:sp>
+        <p:nvSpPr>
+          <p:cNvPr id="3" name="TextBox 2"/>
+          <p:cNvSpPr txBox="1"/>
+          <p:nvPr/>
+        </p:nvSpPr>
+        <p:spPr>
+          <a:xfrm>
+            <a:off x="812800" y="812800"/>
+            <a:ext cx="10566400" cy="5232400"/>
+          </a:xfrm>
+          <a:prstGeom prst="rect">
+            <a:avLst/>
+          </a:prstGeom>
+          <a:noFill/>
+        </p:spPr>
+        <p:txBody>
+          <a:bodyPr wrap="square" lIns="0" rIns="0" tIns="0" bIns="0" anchor="ctr">
+            <a:spAutoFit/>
+          </a:bodyPr>
+          <a:lstStyle/>
+          <a:p>
+            <a:pPr algn="ctr">
+              <a:lnSpc>
+                <a:spcPct val="134000"/>
+              </a:lnSpc>
+              <a:spcAft>
+                <a:spcPts val="900"/>
+              </a:spcAft>
+            </a:pPr>
+            <a:r>
+              <a:rPr sz="2600" b="0" i="0">
+                <a:solidFill>
+                  <a:srgbClr val="FFFFFF"/>
+                </a:solidFill>
+                <a:latin typeface="Poppins"/>
+              </a:rPr>
+              <a:t>Un paradigme, ce n'est pas un document</a:t>
+            </a:r>
+          </a:p>
+          <a:p>
+            <a:pPr algn="ctr">
+              <a:lnSpc>
+                <a:spcPct val="134000"/>
+              </a:lnSpc>
+              <a:spcAft>
+                <a:spcPts val="900"/>
+              </a:spcAft>
+            </a:pPr>
+            <a:r>
+              <a:rPr sz="2600" b="0" i="0">
+                <a:solidFill>
+                  <a:srgbClr val="FFFFFF"/>
+                </a:solidFill>
+                <a:latin typeface="Poppins"/>
+              </a:rPr>
+              <a:t>qu'on adopte et qu'on applique.</a:t>
+            </a:r>
+          </a:p>
+          <a:p>
+            <a:pPr algn="ctr">
+              <a:lnSpc>
+                <a:spcPct val="134000"/>
+              </a:lnSpc>
+              <a:spcAft>
+                <a:spcPts val="900"/>
+              </a:spcAft>
+            </a:pPr>
+            <a:r>
+              <a:rPr sz="2600" b="0" i="0">
+                <a:solidFill>
+                  <a:srgbClr val="E3A94F"/>
+                </a:solidFill>
+                <a:latin typeface="Poppins"/>
+              </a:rPr>
+              <a:t>C'est une remise en question qui ne s'arrête pas.</a:t>
+            </a:r>
+          </a:p>
+        </p:txBody>
+      </p:sp>
+    </p:spTree>
+  </p:cSld>
+  <p:clrMapOvr>
+    <a:masterClrMapping/>
+  </p:clrMapOvr>
+</p:sld>
+</file>
+
+<file path=ppt/slides/slide34.xml><?xml version="1.0" encoding="utf-8"?>
+<p:sld xmlns:a="http://schemas.openxmlformats.org/drawingml/2006/main" xmlns:p="http://schemas.openxmlformats.org/presentationml/2006/main" xmlns:r="http://schemas.openxmlformats.org/officeDocument/2006/relationships">
+  <p:cSld>
+    <p:spTree>
+      <p:nvGrpSpPr>
+        <p:cNvPr id="1" name=""/>
+        <p:cNvGrpSpPr/>
+        <p:nvPr/>
+      </p:nvGrpSpPr>
+      <p:grpSpPr/>
+      <p:pic>
+        <p:nvPicPr>
+          <p:cNvPr id="2" name="Picture 1" descr="bg.png"/>
+          <p:cNvPicPr>
+            <a:picLocks noChangeAspect="1"/>
+          </p:cNvPicPr>
+          <p:nvPr/>
+        </p:nvPicPr>
+        <p:blipFill>
+          <a:blip r:embed="rId2"/>
+          <a:stretch>
+            <a:fillRect/>
+          </a:stretch>
+        </p:blipFill>
+        <p:spPr>
+          <a:xfrm>
+            <a:off x="0" y="0"/>
+            <a:ext cx="12192000" cy="6858000"/>
+          </a:xfrm>
+          <a:prstGeom prst="rect">
+            <a:avLst/>
+          </a:prstGeom>
+        </p:spPr>
+      </p:pic>
+      <p:sp>
+        <p:nvSpPr>
+          <p:cNvPr id="3" name="TextBox 2"/>
+          <p:cNvSpPr txBox="1"/>
+          <p:nvPr/>
+        </p:nvSpPr>
+        <p:spPr>
+          <a:xfrm>
+            <a:off x="812800" y="812800"/>
+            <a:ext cx="10566400" cy="698500"/>
+          </a:xfrm>
+          <a:prstGeom prst="rect">
+            <a:avLst/>
+          </a:prstGeom>
+          <a:noFill/>
+        </p:spPr>
+        <p:txBody>
+          <a:bodyPr wrap="square" lIns="0" rIns="0" tIns="0" bIns="0" anchor="t">
+            <a:spAutoFit/>
+          </a:bodyPr>
+          <a:lstStyle/>
+          <a:p>
+            <a:pPr algn="l">
+              <a:lnSpc>
+                <a:spcPct val="114000"/>
+              </a:lnSpc>
+            </a:pPr>
+            <a:r>
+              <a:rPr sz="2000" b="1" i="1">
+                <a:solidFill>
+                  <a:srgbClr val="FFFFFF"/>
+                </a:solidFill>
+                <a:latin typeface="Archivo"/>
+              </a:rPr>
+              <a:t>ET CE QU'ON NE SAIT PAS ENCORE</a:t>
+            </a:r>
+          </a:p>
+        </p:txBody>
+      </p:sp>
+      <p:sp>
+        <p:nvSpPr>
+          <p:cNvPr id="4" name="Rectangle 3"/>
+          <p:cNvSpPr/>
+          <p:nvPr/>
+        </p:nvSpPr>
+        <p:spPr>
+          <a:xfrm>
+            <a:off x="812800" y="1879600"/>
+            <a:ext cx="1143000" cy="25400"/>
+          </a:xfrm>
+          <a:prstGeom prst="rect">
+            <a:avLst/>
+          </a:prstGeom>
+          <a:solidFill>
+            <a:srgbClr val="E3A94F"/>
+          </a:solidFill>
+          <a:ln>
+            <a:noFill/>
+          </a:ln>
+          <a:effectLst/>
+        </p:spPr>
+        <p:style>
+          <a:lnRef idx="1">
+            <a:schemeClr val="accent1"/>
+          </a:lnRef>
+          <a:fillRef idx="3">
+            <a:schemeClr val="accent1"/>
+          </a:fillRef>
+          <a:effectRef idx="2">
+            <a:schemeClr val="accent1"/>
+          </a:effectRef>
+          <a:fontRef idx="minor">
+            <a:schemeClr val="lt1"/>
+          </a:fontRef>
+        </p:style>
+        <p:txBody>
+          <a:bodyPr rtlCol="0" anchor="ctr"/>
+          <a:lstStyle/>
+          <a:p>
+            <a:pPr algn="ctr"/>
+          </a:p>
+        </p:txBody>
+      </p:sp>
+      <p:sp>
+        <p:nvSpPr>
+          <p:cNvPr id="5" name="TextBox 4"/>
+          <p:cNvSpPr txBox="1"/>
+          <p:nvPr/>
+        </p:nvSpPr>
+        <p:spPr>
+          <a:xfrm>
+            <a:off x="812800" y="2222500"/>
+            <a:ext cx="10566400" cy="3822700"/>
+          </a:xfrm>
+          <a:prstGeom prst="rect">
+            <a:avLst/>
+          </a:prstGeom>
+          <a:noFill/>
+        </p:spPr>
+        <p:txBody>
+          <a:bodyPr wrap="square" lIns="0" rIns="0" tIns="0" bIns="0" anchor="t">
+            <a:spAutoFit/>
+          </a:bodyPr>
+          <a:lstStyle/>
+          <a:p>
+            <a:pPr algn="l">
+              <a:lnSpc>
+                <a:spcPct val="142000"/>
+              </a:lnSpc>
+              <a:spcAft>
+                <a:spcPts val="900"/>
+              </a:spcAft>
+            </a:pPr>
+            <a:r>
+              <a:rPr sz="1850" b="0" i="0">
+                <a:solidFill>
+                  <a:srgbClr val="FFFFFF"/>
+                </a:solidFill>
+                <a:latin typeface="Poppins"/>
+              </a:rPr>
+              <a:t>Le prix juste — pas de barème possible, et pourtant le déséquilibre excessif existe</a:t>
+            </a:r>
+          </a:p>
+          <a:p>
+            <a:pPr algn="l">
+              <a:lnSpc>
+                <a:spcPct val="142000"/>
+              </a:lnSpc>
+              <a:spcAft>
+                <a:spcPts val="900"/>
+              </a:spcAft>
+            </a:pPr>
+            <a:r>
+              <a:rPr sz="1850" b="0" i="0">
+                <a:solidFill>
+                  <a:srgbClr val="FFFFFF"/>
+                </a:solidFill>
+                <a:latin typeface="Poppins"/>
+              </a:rPr>
+              <a:t>L'abonnement, les places de marché — le droit des transactions n'a pas fini d'y répondre</a:t>
+            </a:r>
+          </a:p>
+          <a:p>
+            <a:pPr algn="l">
+              <a:lnSpc>
+                <a:spcPct val="142000"/>
+              </a:lnSpc>
+              <a:spcAft>
+                <a:spcPts val="900"/>
+              </a:spcAft>
+            </a:pPr>
+            <a:r>
+              <a:rPr sz="1850" b="0" i="0">
+                <a:solidFill>
+                  <a:srgbClr val="FFFFFF"/>
+                </a:solidFill>
+                <a:latin typeface="Poppins"/>
+              </a:rPr>
+              <a:t>Et la question qu'on ne tranche pas : que faire quand un marché entier</a:t>
+            </a:r>
+          </a:p>
+          <a:p>
+            <a:pPr algn="l">
+              <a:lnSpc>
+                <a:spcPct val="142000"/>
+              </a:lnSpc>
+              <a:spcAft>
+                <a:spcPts val="900"/>
+              </a:spcAft>
+            </a:pPr>
+            <a:r>
+              <a:rPr sz="1850" b="0" i="0">
+                <a:solidFill>
+                  <a:srgbClr val="FFFFFF"/>
+                </a:solidFill>
+                <a:latin typeface="Poppins"/>
+              </a:rPr>
+              <a:t>repose sur une pratique qu'on refuse ?</a:t>
+            </a:r>
           </a:p>
         </p:txBody>
       </p:sp>
@@ -8226,7 +11735,7 @@
       <p:grpSpPr/>
       <p:pic>
         <p:nvPicPr>
-          <p:cNvPr id="2" name="Picture 1" descr="bg2.png"/>
+          <p:cNvPr id="2" name="Picture 1" descr="bg.png"/>
           <p:cNvPicPr>
             <a:picLocks noChangeAspect="1"/>
           </p:cNvPicPr>
@@ -8256,43 +11765,8 @@
         </p:nvSpPr>
         <p:spPr>
           <a:xfrm>
-            <a:off x="812800" y="2032000"/>
-            <a:ext cx="10566400" cy="762000"/>
-          </a:xfrm>
-          <a:prstGeom prst="rect">
-            <a:avLst/>
-          </a:prstGeom>
-          <a:noFill/>
-        </p:spPr>
-        <p:txBody>
-          <a:bodyPr wrap="square" lIns="0" rIns="0" tIns="0" bIns="0" anchor="b">
-            <a:spAutoFit/>
-          </a:bodyPr>
-          <a:lstStyle/>
-          <a:p>
-            <a:pPr algn="l"/>
-            <a:r>
-              <a:rPr sz="1700" b="1" i="0">
-                <a:solidFill>
-                  <a:srgbClr val="E3A94F"/>
-                </a:solidFill>
-                <a:latin typeface="Poppins"/>
-              </a:rPr>
-              <a:t>PARTIE 2 SUR 4</a:t>
-            </a:r>
-          </a:p>
-        </p:txBody>
-      </p:sp>
-      <p:sp>
-        <p:nvSpPr>
-          <p:cNvPr id="4" name="TextBox 3"/>
-          <p:cNvSpPr txBox="1"/>
-          <p:nvPr/>
-        </p:nvSpPr>
-        <p:spPr>
-          <a:xfrm>
-            <a:off x="812800" y="2870200"/>
-            <a:ext cx="10566400" cy="1651000"/>
+            <a:off x="812800" y="812800"/>
+            <a:ext cx="10566400" cy="698500"/>
           </a:xfrm>
           <a:prstGeom prst="rect">
             <a:avLst/>
@@ -8307,31 +11781,31 @@
           <a:p>
             <a:pPr algn="l">
               <a:lnSpc>
-                <a:spcPct val="104000"/>
+                <a:spcPct val="114000"/>
               </a:lnSpc>
             </a:pPr>
             <a:r>
-              <a:rPr sz="5500" b="1" i="1">
+              <a:rPr sz="2000" b="1" i="1">
                 <a:solidFill>
                   <a:srgbClr val="FFFFFF"/>
                 </a:solidFill>
                 <a:latin typeface="Archivo"/>
               </a:rPr>
-              <a:t>LES SIX AXES</a:t>
-            </a:r>
-          </a:p>
-        </p:txBody>
-      </p:sp>
-      <p:sp>
-        <p:nvSpPr>
-          <p:cNvPr id="5" name="Rectangle 4"/>
+              <a:t>QUATRE PARTIES</a:t>
+            </a:r>
+          </a:p>
+        </p:txBody>
+      </p:sp>
+      <p:sp>
+        <p:nvSpPr>
+          <p:cNvPr id="4" name="Rectangle 3"/>
           <p:cNvSpPr/>
           <p:nvPr/>
         </p:nvSpPr>
         <p:spPr>
           <a:xfrm>
-            <a:off x="812800" y="4699000"/>
-            <a:ext cx="1905000" cy="31750"/>
+            <a:off x="812800" y="1879600"/>
+            <a:ext cx="1143000" cy="25400"/>
           </a:xfrm>
           <a:prstGeom prst="rect">
             <a:avLst/>
@@ -8363,6 +11837,105 @@
           <a:lstStyle/>
           <a:p>
             <a:pPr algn="ctr"/>
+          </a:p>
+        </p:txBody>
+      </p:sp>
+      <p:sp>
+        <p:nvSpPr>
+          <p:cNvPr id="5" name="TextBox 4"/>
+          <p:cNvSpPr txBox="1"/>
+          <p:nvPr/>
+        </p:nvSpPr>
+        <p:spPr>
+          <a:xfrm>
+            <a:off x="812800" y="2222500"/>
+            <a:ext cx="10566400" cy="3822700"/>
+          </a:xfrm>
+          <a:prstGeom prst="rect">
+            <a:avLst/>
+          </a:prstGeom>
+          <a:noFill/>
+        </p:spPr>
+        <p:txBody>
+          <a:bodyPr wrap="square" lIns="0" rIns="0" tIns="0" bIns="0" anchor="t">
+            <a:spAutoFit/>
+          </a:bodyPr>
+          <a:lstStyle/>
+          <a:p>
+            <a:pPr algn="l">
+              <a:lnSpc>
+                <a:spcPct val="142000"/>
+              </a:lnSpc>
+              <a:spcAft>
+                <a:spcPts val="900"/>
+              </a:spcAft>
+            </a:pPr>
+            <a:r>
+              <a:rPr sz="1850" b="0" i="0">
+                <a:solidFill>
+                  <a:srgbClr val="FFFFFF"/>
+                </a:solidFill>
+                <a:latin typeface="Poppins"/>
+              </a:rPr>
+              <a:t>1. Poser le cadre — c'est quoi un paradigme, et pourquoi le tien n'est pas le tien</a:t>
+            </a:r>
+          </a:p>
+          <a:p>
+            <a:pPr algn="l">
+              <a:lnSpc>
+                <a:spcPct val="142000"/>
+              </a:lnSpc>
+              <a:spcAft>
+                <a:spcPts val="900"/>
+              </a:spcAft>
+            </a:pPr>
+            <a:r>
+              <a:rPr sz="1850" b="0" i="0">
+                <a:solidFill>
+                  <a:srgbClr val="FFFFFF"/>
+                </a:solidFill>
+                <a:latin typeface="Poppins"/>
+              </a:rPr>
+              <a:t>2. Les six axes — où ça se voit dans ton agenda</a:t>
+            </a:r>
+          </a:p>
+          <a:p>
+            <a:pPr algn="l">
+              <a:lnSpc>
+                <a:spcPct val="142000"/>
+              </a:lnSpc>
+              <a:spcAft>
+                <a:spcPts val="900"/>
+              </a:spcAft>
+            </a:pPr>
+            <a:r>
+              <a:rPr sz="1850" b="0" i="0">
+                <a:solidFill>
+                  <a:srgbClr val="FFFFFF"/>
+                </a:solidFill>
+                <a:latin typeface="Poppins"/>
+              </a:rPr>
+              <a:t>3. Les compétences transversales — ce qu'il te manque vraiment</a:t>
+            </a:r>
+          </a:p>
+          <a:p>
+            <a:pPr algn="l">
+              <a:lnSpc>
+                <a:spcPct val="142000"/>
+              </a:lnSpc>
+              <a:spcAft>
+                <a:spcPts val="900"/>
+              </a:spcAft>
+            </a:pPr>
+            <a:r>
+              <a:rPr sz="1850" b="0" i="0">
+                <a:solidFill>
+                  <a:srgbClr val="FFFFFF"/>
+                </a:solidFill>
+                <a:latin typeface="Poppins"/>
+              </a:rPr>
+              <a:t>4. La méthodologie — comment on travaille ça ensemble</a:t>
+            </a:r>
           </a:p>
         </p:txBody>
       </p:sp>
@@ -8384,114 +11957,16 @@
         <p:nvPr/>
       </p:nvGrpSpPr>
       <p:grpSpPr/>
-      <p:pic>
-        <p:nvPicPr>
-          <p:cNvPr id="2" name="Picture 1" descr="bg2.png"/>
-          <p:cNvPicPr>
-            <a:picLocks noChangeAspect="1"/>
-          </p:cNvPicPr>
+      <p:sp>
+        <p:nvSpPr>
+          <p:cNvPr id="2" name="Rectangle 1"/>
+          <p:cNvSpPr/>
           <p:nvPr/>
-        </p:nvPicPr>
-        <p:blipFill>
-          <a:blip r:embed="rId2"/>
-          <a:stretch>
-            <a:fillRect/>
-          </a:stretch>
-        </p:blipFill>
+        </p:nvSpPr>
         <p:spPr>
           <a:xfrm>
             <a:off x="0" y="0"/>
             <a:ext cx="12192000" cy="6858000"/>
-          </a:xfrm>
-          <a:prstGeom prst="rect">
-            <a:avLst/>
-          </a:prstGeom>
-        </p:spPr>
-      </p:pic>
-      <p:sp>
-        <p:nvSpPr>
-          <p:cNvPr id="3" name="TextBox 2"/>
-          <p:cNvSpPr txBox="1"/>
-          <p:nvPr/>
-        </p:nvSpPr>
-        <p:spPr>
-          <a:xfrm>
-            <a:off x="812800" y="2032000"/>
-            <a:ext cx="10566400" cy="762000"/>
-          </a:xfrm>
-          <a:prstGeom prst="rect">
-            <a:avLst/>
-          </a:prstGeom>
-          <a:noFill/>
-        </p:spPr>
-        <p:txBody>
-          <a:bodyPr wrap="square" lIns="0" rIns="0" tIns="0" bIns="0" anchor="b">
-            <a:spAutoFit/>
-          </a:bodyPr>
-          <a:lstStyle/>
-          <a:p>
-            <a:pPr algn="l"/>
-            <a:r>
-              <a:rPr sz="1700" b="1" i="0">
-                <a:solidFill>
-                  <a:srgbClr val="E3A94F"/>
-                </a:solidFill>
-                <a:latin typeface="Poppins"/>
-              </a:rPr>
-              <a:t>PARTIE 3 SUR 4</a:t>
-            </a:r>
-          </a:p>
-        </p:txBody>
-      </p:sp>
-      <p:sp>
-        <p:nvSpPr>
-          <p:cNvPr id="4" name="TextBox 3"/>
-          <p:cNvSpPr txBox="1"/>
-          <p:nvPr/>
-        </p:nvSpPr>
-        <p:spPr>
-          <a:xfrm>
-            <a:off x="812800" y="2870200"/>
-            <a:ext cx="10566400" cy="1651000"/>
-          </a:xfrm>
-          <a:prstGeom prst="rect">
-            <a:avLst/>
-          </a:prstGeom>
-          <a:noFill/>
-        </p:spPr>
-        <p:txBody>
-          <a:bodyPr wrap="square" lIns="0" rIns="0" tIns="0" bIns="0" anchor="t">
-            <a:spAutoFit/>
-          </a:bodyPr>
-          <a:lstStyle/>
-          <a:p>
-            <a:pPr algn="l">
-              <a:lnSpc>
-                <a:spcPct val="104000"/>
-              </a:lnSpc>
-            </a:pPr>
-            <a:r>
-              <a:rPr sz="5500" b="1" i="1">
-                <a:solidFill>
-                  <a:srgbClr val="FFFFFF"/>
-                </a:solidFill>
-                <a:latin typeface="Archivo"/>
-              </a:rPr>
-              <a:t>LES COMPÉTENCES TRANSVERSALES</a:t>
-            </a:r>
-          </a:p>
-        </p:txBody>
-      </p:sp>
-      <p:sp>
-        <p:nvSpPr>
-          <p:cNvPr id="5" name="Rectangle 4"/>
-          <p:cNvSpPr/>
-          <p:nvPr/>
-        </p:nvSpPr>
-        <p:spPr>
-          <a:xfrm>
-            <a:off x="812800" y="4699000"/>
-            <a:ext cx="1905000" cy="31750"/>
           </a:xfrm>
           <a:prstGeom prst="rect">
             <a:avLst/>
@@ -8523,6 +11998,217 @@
           <a:lstStyle/>
           <a:p>
             <a:pPr algn="ctr"/>
+          </a:p>
+        </p:txBody>
+      </p:sp>
+      <p:sp>
+        <p:nvSpPr>
+          <p:cNvPr id="3" name="TextBox 2"/>
+          <p:cNvSpPr txBox="1"/>
+          <p:nvPr/>
+        </p:nvSpPr>
+        <p:spPr>
+          <a:xfrm>
+            <a:off x="952500" y="762000"/>
+            <a:ext cx="10287000" cy="952500"/>
+          </a:xfrm>
+          <a:prstGeom prst="rect">
+            <a:avLst/>
+          </a:prstGeom>
+          <a:noFill/>
+        </p:spPr>
+        <p:txBody>
+          <a:bodyPr wrap="square" lIns="0" rIns="0" tIns="0" bIns="0" anchor="t">
+            <a:spAutoFit/>
+          </a:bodyPr>
+          <a:lstStyle/>
+          <a:p>
+            <a:pPr algn="l"/>
+            <a:r>
+              <a:rPr sz="1600" b="1" i="0">
+                <a:solidFill>
+                  <a:srgbClr val="141414"/>
+                </a:solidFill>
+                <a:latin typeface="Poppins"/>
+              </a:rPr>
+              <a:t>À INSÉRER DANS TON DECK</a:t>
+            </a:r>
+          </a:p>
+        </p:txBody>
+      </p:sp>
+      <p:sp>
+        <p:nvSpPr>
+          <p:cNvPr id="4" name="TextBox 3"/>
+          <p:cNvSpPr txBox="1"/>
+          <p:nvPr/>
+        </p:nvSpPr>
+        <p:spPr>
+          <a:xfrm>
+            <a:off x="952500" y="1587500"/>
+            <a:ext cx="10287000" cy="1397000"/>
+          </a:xfrm>
+          <a:prstGeom prst="rect">
+            <a:avLst/>
+          </a:prstGeom>
+          <a:noFill/>
+        </p:spPr>
+        <p:txBody>
+          <a:bodyPr wrap="square" lIns="0" rIns="0" tIns="0" bIns="0" anchor="t">
+            <a:spAutoFit/>
+          </a:bodyPr>
+          <a:lstStyle/>
+          <a:p>
+            <a:pPr algn="l">
+              <a:lnSpc>
+                <a:spcPct val="106000"/>
+              </a:lnSpc>
+            </a:pPr>
+            <a:r>
+              <a:rPr sz="4200" b="1" i="1">
+                <a:solidFill>
+                  <a:srgbClr val="141414"/>
+                </a:solidFill>
+                <a:latin typeface="Archivo"/>
+              </a:rPr>
+              <a:t>SÉPARATEUR PARTIE 1</a:t>
+            </a:r>
+          </a:p>
+        </p:txBody>
+      </p:sp>
+      <p:sp>
+        <p:nvSpPr>
+          <p:cNvPr id="5" name="Rectangle 4"/>
+          <p:cNvSpPr/>
+          <p:nvPr/>
+        </p:nvSpPr>
+        <p:spPr>
+          <a:xfrm>
+            <a:off x="952500" y="3175000"/>
+            <a:ext cx="1651000" cy="50800"/>
+          </a:xfrm>
+          <a:prstGeom prst="rect">
+            <a:avLst/>
+          </a:prstGeom>
+          <a:solidFill>
+            <a:srgbClr val="141414"/>
+          </a:solidFill>
+          <a:ln>
+            <a:noFill/>
+          </a:ln>
+          <a:effectLst/>
+        </p:spPr>
+        <p:style>
+          <a:lnRef idx="1">
+            <a:schemeClr val="accent1"/>
+          </a:lnRef>
+          <a:fillRef idx="3">
+            <a:schemeClr val="accent1"/>
+          </a:fillRef>
+          <a:effectRef idx="2">
+            <a:schemeClr val="accent1"/>
+          </a:effectRef>
+          <a:fontRef idx="minor">
+            <a:schemeClr val="lt1"/>
+          </a:fontRef>
+        </p:style>
+        <p:txBody>
+          <a:bodyPr rtlCol="0" anchor="ctr"/>
+          <a:lstStyle/>
+          <a:p>
+            <a:pPr algn="ctr"/>
+          </a:p>
+        </p:txBody>
+      </p:sp>
+      <p:sp>
+        <p:nvSpPr>
+          <p:cNvPr id="6" name="TextBox 5"/>
+          <p:cNvSpPr txBox="1"/>
+          <p:nvPr/>
+        </p:nvSpPr>
+        <p:spPr>
+          <a:xfrm>
+            <a:off x="952500" y="3556000"/>
+            <a:ext cx="10287000" cy="2095500"/>
+          </a:xfrm>
+          <a:prstGeom prst="rect">
+            <a:avLst/>
+          </a:prstGeom>
+          <a:noFill/>
+        </p:spPr>
+        <p:txBody>
+          <a:bodyPr wrap="square" lIns="0" rIns="0" tIns="0" bIns="0" anchor="t">
+            <a:spAutoFit/>
+          </a:bodyPr>
+          <a:lstStyle/>
+          <a:p>
+            <a:pPr algn="l">
+              <a:spcAft>
+                <a:spcPts val="300"/>
+              </a:spcAft>
+            </a:pPr>
+            <a:r>
+              <a:rPr sz="1500" b="1" i="0">
+                <a:solidFill>
+                  <a:srgbClr val="141414"/>
+                </a:solidFill>
+                <a:latin typeface="Poppins"/>
+              </a:rPr>
+              <a:t>REMPLACE ta slide</a:t>
+            </a:r>
+          </a:p>
+          <a:p>
+            <a:pPr algn="l">
+              <a:lnSpc>
+                <a:spcPct val="134000"/>
+              </a:lnSpc>
+              <a:spcAft>
+                <a:spcPts val="1300"/>
+              </a:spcAft>
+            </a:pPr>
+            <a:r>
+              <a:rPr sz="1900" b="0" i="0">
+                <a:solidFill>
+                  <a:srgbClr val="141414"/>
+                </a:solidFill>
+                <a:latin typeface="Poppins"/>
+              </a:rPr>
+              <a:t>« PARTIE 1 / POSER LE CADRE »</a:t>
+            </a:r>
+          </a:p>
+        </p:txBody>
+      </p:sp>
+      <p:sp>
+        <p:nvSpPr>
+          <p:cNvPr id="7" name="TextBox 6"/>
+          <p:cNvSpPr txBox="1"/>
+          <p:nvPr/>
+        </p:nvSpPr>
+        <p:spPr>
+          <a:xfrm>
+            <a:off x="952500" y="5905500"/>
+            <a:ext cx="10287000" cy="444500"/>
+          </a:xfrm>
+          <a:prstGeom prst="rect">
+            <a:avLst/>
+          </a:prstGeom>
+          <a:noFill/>
+        </p:spPr>
+        <p:txBody>
+          <a:bodyPr wrap="square" lIns="0" rIns="0" tIns="0" bIns="0" anchor="t">
+            <a:spAutoFit/>
+          </a:bodyPr>
+          <a:lstStyle/>
+          <a:p>
+            <a:pPr algn="l"/>
+            <a:r>
+              <a:rPr sz="1400" b="0" i="1">
+                <a:solidFill>
+                  <a:srgbClr val="141414"/>
+                </a:solidFill>
+                <a:latin typeface="Poppins"/>
+              </a:rPr>
+              <a:t>Les 1 slides qui suivent forment ce bloc. Cette page-ci ne va pas dans le deck.</a:t>
+            </a:r>
           </a:p>
         </p:txBody>
       </p:sp>
@@ -8598,7 +12284,7 @@
                 </a:solidFill>
                 <a:latin typeface="Poppins"/>
               </a:rPr>
-              <a:t>PARTIE 4 SUR 4</a:t>
+              <a:t>PARTIE 1 SUR 4</a:t>
             </a:r>
           </a:p>
         </p:txBody>
@@ -8637,7 +12323,7 @@
                 </a:solidFill>
                 <a:latin typeface="Archivo"/>
               </a:rPr>
-              <a:t>LA MÉTHODOLOGIE TARIQA</a:t>
+              <a:t>POSER LE CADRE</a:t>
             </a:r>
           </a:p>
         </p:txBody>
@@ -8704,20 +12390,12 @@
         <p:nvPr/>
       </p:nvGrpSpPr>
       <p:grpSpPr/>
-      <p:pic>
-        <p:nvPicPr>
-          <p:cNvPr id="2" name="Picture 1" descr="bg.png"/>
-          <p:cNvPicPr>
-            <a:picLocks noChangeAspect="1"/>
-          </p:cNvPicPr>
+      <p:sp>
+        <p:nvSpPr>
+          <p:cNvPr id="2" name="Rectangle 1"/>
+          <p:cNvSpPr/>
           <p:nvPr/>
-        </p:nvPicPr>
-        <p:blipFill>
-          <a:blip r:embed="rId2"/>
-          <a:stretch>
-            <a:fillRect/>
-          </a:stretch>
-        </p:blipFill>
+        </p:nvSpPr>
         <p:spPr>
           <a:xfrm>
             <a:off x="0" y="0"/>
@@ -8726,24 +12404,8 @@
           <a:prstGeom prst="rect">
             <a:avLst/>
           </a:prstGeom>
-        </p:spPr>
-      </p:pic>
-      <p:sp>
-        <p:nvSpPr>
-          <p:cNvPr id="3" name="Rectangle 2"/>
-          <p:cNvSpPr/>
-          <p:nvPr/>
-        </p:nvSpPr>
-        <p:spPr>
-          <a:xfrm>
-            <a:off x="1125220" y="2884170"/>
-            <a:ext cx="9941560" cy="1089660"/>
-          </a:xfrm>
-          <a:prstGeom prst="rect">
-            <a:avLst/>
-          </a:prstGeom>
           <a:solidFill>
-            <a:srgbClr val="FFFFFF"/>
+            <a:srgbClr val="E3A94F"/>
           </a:solidFill>
           <a:ln>
             <a:noFill/>
@@ -8774,14 +12436,49 @@
       </p:sp>
       <p:sp>
         <p:nvSpPr>
+          <p:cNvPr id="3" name="TextBox 2"/>
+          <p:cNvSpPr txBox="1"/>
+          <p:nvPr/>
+        </p:nvSpPr>
+        <p:spPr>
+          <a:xfrm>
+            <a:off x="952500" y="762000"/>
+            <a:ext cx="10287000" cy="952500"/>
+          </a:xfrm>
+          <a:prstGeom prst="rect">
+            <a:avLst/>
+          </a:prstGeom>
+          <a:noFill/>
+        </p:spPr>
+        <p:txBody>
+          <a:bodyPr wrap="square" lIns="0" rIns="0" tIns="0" bIns="0" anchor="t">
+            <a:spAutoFit/>
+          </a:bodyPr>
+          <a:lstStyle/>
+          <a:p>
+            <a:pPr algn="l"/>
+            <a:r>
+              <a:rPr sz="1600" b="1" i="0">
+                <a:solidFill>
+                  <a:srgbClr val="141414"/>
+                </a:solidFill>
+                <a:latin typeface="Poppins"/>
+              </a:rPr>
+              <a:t>À INSÉRER DANS TON DECK</a:t>
+            </a:r>
+          </a:p>
+        </p:txBody>
+      </p:sp>
+      <p:sp>
+        <p:nvSpPr>
           <p:cNvPr id="4" name="TextBox 3"/>
           <p:cNvSpPr txBox="1"/>
           <p:nvPr/>
         </p:nvSpPr>
         <p:spPr>
           <a:xfrm>
-            <a:off x="1315720" y="2884170"/>
-            <a:ext cx="9560560" cy="1089660"/>
+            <a:off x="952500" y="1587500"/>
+            <a:ext cx="10287000" cy="1397000"/>
           </a:xfrm>
           <a:prstGeom prst="rect">
             <a:avLst/>
@@ -8789,177 +12486,161 @@
           <a:noFill/>
         </p:spPr>
         <p:txBody>
-          <a:bodyPr wrap="square" lIns="0" rIns="0" tIns="0" bIns="0" anchor="ctr">
+          <a:bodyPr wrap="square" lIns="0" rIns="0" tIns="0" bIns="0" anchor="t">
             <a:spAutoFit/>
           </a:bodyPr>
           <a:lstStyle/>
           <a:p>
-            <a:pPr algn="ctr">
+            <a:pPr algn="l">
               <a:lnSpc>
-                <a:spcPct val="100000"/>
+                <a:spcPct val="106000"/>
               </a:lnSpc>
             </a:pPr>
             <a:r>
-              <a:rPr sz="6600" b="1" i="1">
-                <a:solidFill>
-                  <a:srgbClr val="131313"/>
+              <a:rPr sz="4200" b="1" i="1">
+                <a:solidFill>
+                  <a:srgbClr val="141414"/>
                 </a:solidFill>
                 <a:latin typeface="Archivo"/>
               </a:rPr>
-              <a:t>U</a:t>
-            </a:r>
-            <a:r>
-              <a:rPr sz="6600" b="1" i="1">
-                <a:solidFill>
-                  <a:srgbClr val="131313"/>
-                </a:solidFill>
-                <a:latin typeface="Archivo"/>
-              </a:rPr>
-              <a:t>N</a:t>
-            </a:r>
-            <a:r>
-              <a:rPr sz="6600" b="1" i="1">
-                <a:solidFill>
-                  <a:srgbClr val="131313"/>
-                </a:solidFill>
-                <a:latin typeface="Archivo"/>
-              </a:rPr>
-              <a:t>E</a:t>
-            </a:r>
-            <a:r>
-              <a:rPr sz="6600" b="1" i="1">
-                <a:solidFill>
-                  <a:srgbClr val="131313"/>
-                </a:solidFill>
-                <a:latin typeface="Archivo"/>
-              </a:rPr>
-              <a:t> </a:t>
-            </a:r>
-            <a:r>
-              <a:rPr sz="6600" b="1" i="1">
-                <a:solidFill>
-                  <a:srgbClr val="161513"/>
-                </a:solidFill>
-                <a:latin typeface="Archivo"/>
-              </a:rPr>
-              <a:t>S</a:t>
-            </a:r>
-            <a:r>
-              <a:rPr sz="6600" b="1" i="1">
-                <a:solidFill>
-                  <a:srgbClr val="221D15"/>
-                </a:solidFill>
-                <a:latin typeface="Archivo"/>
-              </a:rPr>
-              <a:t>E</a:t>
-            </a:r>
-            <a:r>
-              <a:rPr sz="6600" b="1" i="1">
-                <a:solidFill>
-                  <a:srgbClr val="2F2617"/>
-                </a:solidFill>
-                <a:latin typeface="Archivo"/>
-              </a:rPr>
-              <a:t>U</a:t>
-            </a:r>
-            <a:r>
-              <a:rPr sz="6600" b="1" i="1">
-                <a:solidFill>
-                  <a:srgbClr val="3B2F18"/>
-                </a:solidFill>
-                <a:latin typeface="Archivo"/>
-              </a:rPr>
-              <a:t>L</a:t>
-            </a:r>
-            <a:r>
-              <a:rPr sz="6600" b="1" i="1">
-                <a:solidFill>
-                  <a:srgbClr val="48371A"/>
-                </a:solidFill>
-                <a:latin typeface="Archivo"/>
-              </a:rPr>
-              <a:t>E</a:t>
-            </a:r>
-            <a:r>
-              <a:rPr sz="6600" b="1" i="1">
-                <a:solidFill>
-                  <a:srgbClr val="54401C"/>
-                </a:solidFill>
-                <a:latin typeface="Archivo"/>
-              </a:rPr>
-              <a:t> </a:t>
-            </a:r>
-            <a:r>
-              <a:rPr sz="6600" b="1" i="1">
-                <a:solidFill>
-                  <a:srgbClr val="60491E"/>
-                </a:solidFill>
-                <a:latin typeface="Archivo"/>
-              </a:rPr>
-              <a:t>Q</a:t>
-            </a:r>
-            <a:r>
-              <a:rPr sz="6600" b="1" i="1">
-                <a:solidFill>
-                  <a:srgbClr val="6D5120"/>
-                </a:solidFill>
-                <a:latin typeface="Archivo"/>
-              </a:rPr>
-              <a:t>U</a:t>
-            </a:r>
-            <a:r>
-              <a:rPr sz="6600" b="1" i="1">
-                <a:solidFill>
-                  <a:srgbClr val="795A21"/>
-                </a:solidFill>
-                <a:latin typeface="Archivo"/>
-              </a:rPr>
-              <a:t>E</a:t>
-            </a:r>
-            <a:r>
-              <a:rPr sz="6600" b="1" i="1">
-                <a:solidFill>
-                  <a:srgbClr val="866323"/>
-                </a:solidFill>
-                <a:latin typeface="Archivo"/>
-              </a:rPr>
-              <a:t>S</a:t>
-            </a:r>
-            <a:r>
-              <a:rPr sz="6600" b="1" i="1">
-                <a:solidFill>
-                  <a:srgbClr val="926B25"/>
-                </a:solidFill>
-                <a:latin typeface="Archivo"/>
-              </a:rPr>
-              <a:t>T</a:t>
-            </a:r>
-            <a:r>
-              <a:rPr sz="6600" b="1" i="1">
-                <a:solidFill>
-                  <a:srgbClr val="9F7427"/>
-                </a:solidFill>
-                <a:latin typeface="Archivo"/>
-              </a:rPr>
-              <a:t>I</a:t>
-            </a:r>
-            <a:r>
-              <a:rPr sz="6600" b="1" i="1">
-                <a:solidFill>
-                  <a:srgbClr val="AB7D29"/>
-                </a:solidFill>
-                <a:latin typeface="Archivo"/>
-              </a:rPr>
-              <a:t>O</a:t>
-            </a:r>
-            <a:r>
-              <a:rPr sz="6600" b="1" i="1">
-                <a:solidFill>
-                  <a:srgbClr val="B8862B"/>
-                </a:solidFill>
-                <a:latin typeface="Archivo"/>
-              </a:rPr>
-              <a:t>N</a:t>
+              <a:t>SÉPARATEUR PARTIE 2</a:t>
+            </a:r>
+          </a:p>
+        </p:txBody>
+      </p:sp>
+      <p:sp>
+        <p:nvSpPr>
+          <p:cNvPr id="5" name="Rectangle 4"/>
+          <p:cNvSpPr/>
+          <p:nvPr/>
+        </p:nvSpPr>
+        <p:spPr>
+          <a:xfrm>
+            <a:off x="952500" y="3175000"/>
+            <a:ext cx="1651000" cy="50800"/>
+          </a:xfrm>
+          <a:prstGeom prst="rect">
+            <a:avLst/>
+          </a:prstGeom>
+          <a:solidFill>
+            <a:srgbClr val="141414"/>
+          </a:solidFill>
+          <a:ln>
+            <a:noFill/>
+          </a:ln>
+          <a:effectLst/>
+        </p:spPr>
+        <p:style>
+          <a:lnRef idx="1">
+            <a:schemeClr val="accent1"/>
+          </a:lnRef>
+          <a:fillRef idx="3">
+            <a:schemeClr val="accent1"/>
+          </a:fillRef>
+          <a:effectRef idx="2">
+            <a:schemeClr val="accent1"/>
+          </a:effectRef>
+          <a:fontRef idx="minor">
+            <a:schemeClr val="lt1"/>
+          </a:fontRef>
+        </p:style>
+        <p:txBody>
+          <a:bodyPr rtlCol="0" anchor="ctr"/>
+          <a:lstStyle/>
+          <a:p>
+            <a:pPr algn="ctr"/>
+          </a:p>
+        </p:txBody>
+      </p:sp>
+      <p:sp>
+        <p:nvSpPr>
+          <p:cNvPr id="6" name="TextBox 5"/>
+          <p:cNvSpPr txBox="1"/>
+          <p:nvPr/>
+        </p:nvSpPr>
+        <p:spPr>
+          <a:xfrm>
+            <a:off x="952500" y="3556000"/>
+            <a:ext cx="10287000" cy="2095500"/>
+          </a:xfrm>
+          <a:prstGeom prst="rect">
+            <a:avLst/>
+          </a:prstGeom>
+          <a:noFill/>
+        </p:spPr>
+        <p:txBody>
+          <a:bodyPr wrap="square" lIns="0" rIns="0" tIns="0" bIns="0" anchor="t">
+            <a:spAutoFit/>
+          </a:bodyPr>
+          <a:lstStyle/>
+          <a:p>
+            <a:pPr algn="l">
+              <a:spcAft>
+                <a:spcPts val="300"/>
+              </a:spcAft>
+            </a:pPr>
+            <a:r>
+              <a:rPr sz="1500" b="1" i="0">
+                <a:solidFill>
+                  <a:srgbClr val="141414"/>
+                </a:solidFill>
+                <a:latin typeface="Poppins"/>
+              </a:rPr>
+              <a:t>REMPLACE ta slide</a:t>
+            </a:r>
+          </a:p>
+          <a:p>
+            <a:pPr algn="l">
+              <a:lnSpc>
+                <a:spcPct val="134000"/>
+              </a:lnSpc>
+              <a:spcAft>
+                <a:spcPts val="1300"/>
+              </a:spcAft>
+            </a:pPr>
+            <a:r>
+              <a:rPr sz="1900" b="0" i="0">
+                <a:solidFill>
+                  <a:srgbClr val="141414"/>
+                </a:solidFill>
+                <a:latin typeface="Poppins"/>
+              </a:rPr>
+              <a:t>« PARTIE 2 / LES SIX AXES »  (celle du pack précédent)</a:t>
+            </a:r>
+          </a:p>
+        </p:txBody>
+      </p:sp>
+      <p:sp>
+        <p:nvSpPr>
+          <p:cNvPr id="7" name="TextBox 6"/>
+          <p:cNvSpPr txBox="1"/>
+          <p:nvPr/>
+        </p:nvSpPr>
+        <p:spPr>
+          <a:xfrm>
+            <a:off x="952500" y="5905500"/>
+            <a:ext cx="10287000" cy="444500"/>
+          </a:xfrm>
+          <a:prstGeom prst="rect">
+            <a:avLst/>
+          </a:prstGeom>
+          <a:noFill/>
+        </p:spPr>
+        <p:txBody>
+          <a:bodyPr wrap="square" lIns="0" rIns="0" tIns="0" bIns="0" anchor="t">
+            <a:spAutoFit/>
+          </a:bodyPr>
+          <a:lstStyle/>
+          <a:p>
+            <a:pPr algn="l"/>
+            <a:r>
+              <a:rPr sz="1400" b="0" i="1">
+                <a:solidFill>
+                  <a:srgbClr val="141414"/>
+                </a:solidFill>
+                <a:latin typeface="Poppins"/>
+              </a:rPr>
+              <a:t>Les 1 slides qui suivent forment ce bloc. Cette page-ci ne va pas dans le deck.</a:t>
             </a:r>
           </a:p>
         </p:txBody>
@@ -8984,7 +12665,7 @@
       <p:grpSpPr/>
       <p:pic>
         <p:nvPicPr>
-          <p:cNvPr id="2" name="Picture 1" descr="bg.png"/>
+          <p:cNvPr id="2" name="Picture 1" descr="bg2.png"/>
           <p:cNvPicPr>
             <a:picLocks noChangeAspect="1"/>
           </p:cNvPicPr>
@@ -9014,8 +12695,8 @@
         </p:nvSpPr>
         <p:spPr>
           <a:xfrm>
-            <a:off x="812800" y="812800"/>
-            <a:ext cx="10566400" cy="5232400"/>
+            <a:off x="812800" y="2032000"/>
+            <a:ext cx="10566400" cy="762000"/>
           </a:xfrm>
           <a:prstGeom prst="rect">
             <a:avLst/>
@@ -9023,41 +12704,104 @@
           <a:noFill/>
         </p:spPr>
         <p:txBody>
-          <a:bodyPr wrap="square" lIns="0" rIns="0" tIns="0" bIns="0" anchor="ctr">
+          <a:bodyPr wrap="square" lIns="0" rIns="0" tIns="0" bIns="0" anchor="b">
             <a:spAutoFit/>
           </a:bodyPr>
           <a:lstStyle/>
           <a:p>
-            <a:pPr algn="ctr">
+            <a:pPr algn="l"/>
+            <a:r>
+              <a:rPr sz="1700" b="1" i="0">
+                <a:solidFill>
+                  <a:srgbClr val="E3A94F"/>
+                </a:solidFill>
+                <a:latin typeface="Poppins"/>
+              </a:rPr>
+              <a:t>PARTIE 2 SUR 4</a:t>
+            </a:r>
+          </a:p>
+        </p:txBody>
+      </p:sp>
+      <p:sp>
+        <p:nvSpPr>
+          <p:cNvPr id="4" name="TextBox 3"/>
+          <p:cNvSpPr txBox="1"/>
+          <p:nvPr/>
+        </p:nvSpPr>
+        <p:spPr>
+          <a:xfrm>
+            <a:off x="812800" y="2870200"/>
+            <a:ext cx="10566400" cy="1651000"/>
+          </a:xfrm>
+          <a:prstGeom prst="rect">
+            <a:avLst/>
+          </a:prstGeom>
+          <a:noFill/>
+        </p:spPr>
+        <p:txBody>
+          <a:bodyPr wrap="square" lIns="0" rIns="0" tIns="0" bIns="0" anchor="t">
+            <a:spAutoFit/>
+          </a:bodyPr>
+          <a:lstStyle/>
+          <a:p>
+            <a:pPr algn="l">
               <a:lnSpc>
-                <a:spcPct val="106000"/>
+                <a:spcPct val="104000"/>
               </a:lnSpc>
             </a:pPr>
             <a:r>
-              <a:rPr sz="3900" b="1" i="1">
+              <a:rPr sz="5500" b="1" i="1">
                 <a:solidFill>
                   <a:srgbClr val="FFFFFF"/>
                 </a:solidFill>
                 <a:latin typeface="Archivo"/>
               </a:rPr>
-              <a:t>QU'EST-CE QUE JE CHANGE</a:t>
-            </a:r>
-          </a:p>
-          <a:p>
-            <a:pPr algn="ctr">
-              <a:lnSpc>
-                <a:spcPct val="106000"/>
-              </a:lnSpc>
-            </a:pPr>
-            <a:r>
-              <a:rPr sz="3900" b="1" i="1">
-                <a:solidFill>
-                  <a:srgbClr val="FFFFFF"/>
-                </a:solidFill>
-                <a:latin typeface="Archivo"/>
-              </a:rPr>
-              <a:t>CHEZ MOI, DÈS LUNDI ?</a:t>
-            </a:r>
+              <a:t>LES SIX AXES</a:t>
+            </a:r>
+          </a:p>
+        </p:txBody>
+      </p:sp>
+      <p:sp>
+        <p:nvSpPr>
+          <p:cNvPr id="5" name="Rectangle 4"/>
+          <p:cNvSpPr/>
+          <p:nvPr/>
+        </p:nvSpPr>
+        <p:spPr>
+          <a:xfrm>
+            <a:off x="812800" y="4699000"/>
+            <a:ext cx="1905000" cy="31750"/>
+          </a:xfrm>
+          <a:prstGeom prst="rect">
+            <a:avLst/>
+          </a:prstGeom>
+          <a:solidFill>
+            <a:srgbClr val="E3A94F"/>
+          </a:solidFill>
+          <a:ln>
+            <a:noFill/>
+          </a:ln>
+          <a:effectLst/>
+        </p:spPr>
+        <p:style>
+          <a:lnRef idx="1">
+            <a:schemeClr val="accent1"/>
+          </a:lnRef>
+          <a:fillRef idx="3">
+            <a:schemeClr val="accent1"/>
+          </a:fillRef>
+          <a:effectRef idx="2">
+            <a:schemeClr val="accent1"/>
+          </a:effectRef>
+          <a:fontRef idx="minor">
+            <a:schemeClr val="lt1"/>
+          </a:fontRef>
+        </p:style>
+        <p:txBody>
+          <a:bodyPr rtlCol="0" anchor="ctr"/>
+          <a:lstStyle/>
+          <a:p>
+            <a:pPr algn="ctr"/>
           </a:p>
         </p:txBody>
       </p:sp>
@@ -9079,79 +12823,16 @@
         <p:nvPr/>
       </p:nvGrpSpPr>
       <p:grpSpPr/>
-      <p:pic>
-        <p:nvPicPr>
-          <p:cNvPr id="2" name="Picture 1" descr="bg.png"/>
-          <p:cNvPicPr>
-            <a:picLocks noChangeAspect="1"/>
-          </p:cNvPicPr>
+      <p:sp>
+        <p:nvSpPr>
+          <p:cNvPr id="2" name="Rectangle 1"/>
+          <p:cNvSpPr/>
           <p:nvPr/>
-        </p:nvPicPr>
-        <p:blipFill>
-          <a:blip r:embed="rId2"/>
-          <a:stretch>
-            <a:fillRect/>
-          </a:stretch>
-        </p:blipFill>
+        </p:nvSpPr>
         <p:spPr>
           <a:xfrm>
             <a:off x="0" y="0"/>
             <a:ext cx="12192000" cy="6858000"/>
-          </a:xfrm>
-          <a:prstGeom prst="rect">
-            <a:avLst/>
-          </a:prstGeom>
-        </p:spPr>
-      </p:pic>
-      <p:sp>
-        <p:nvSpPr>
-          <p:cNvPr id="3" name="TextBox 2"/>
-          <p:cNvSpPr txBox="1"/>
-          <p:nvPr/>
-        </p:nvSpPr>
-        <p:spPr>
-          <a:xfrm>
-            <a:off x="812800" y="812800"/>
-            <a:ext cx="10566400" cy="698500"/>
-          </a:xfrm>
-          <a:prstGeom prst="rect">
-            <a:avLst/>
-          </a:prstGeom>
-          <a:noFill/>
-        </p:spPr>
-        <p:txBody>
-          <a:bodyPr wrap="square" lIns="0" rIns="0" tIns="0" bIns="0" anchor="t">
-            <a:spAutoFit/>
-          </a:bodyPr>
-          <a:lstStyle/>
-          <a:p>
-            <a:pPr algn="l">
-              <a:lnSpc>
-                <a:spcPct val="114000"/>
-              </a:lnSpc>
-            </a:pPr>
-            <a:r>
-              <a:rPr sz="2000" b="1" i="1">
-                <a:solidFill>
-                  <a:srgbClr val="FFFFFF"/>
-                </a:solidFill>
-                <a:latin typeface="Archivo"/>
-              </a:rPr>
-              <a:t>LES SIX AXES, ET L'ACTION QUI VA AVEC</a:t>
-            </a:r>
-          </a:p>
-        </p:txBody>
-      </p:sp>
-      <p:sp>
-        <p:nvSpPr>
-          <p:cNvPr id="4" name="Rectangle 3"/>
-          <p:cNvSpPr/>
-          <p:nvPr/>
-        </p:nvSpPr>
-        <p:spPr>
-          <a:xfrm>
-            <a:off x="812800" y="1879600"/>
-            <a:ext cx="1143000" cy="25400"/>
           </a:xfrm>
           <a:prstGeom prst="rect">
             <a:avLst/>
@@ -9188,14 +12869,14 @@
       </p:sp>
       <p:sp>
         <p:nvSpPr>
-          <p:cNvPr id="5" name="TextBox 4"/>
+          <p:cNvPr id="3" name="TextBox 2"/>
           <p:cNvSpPr txBox="1"/>
           <p:nvPr/>
         </p:nvSpPr>
         <p:spPr>
           <a:xfrm>
-            <a:off x="812800" y="2222500"/>
-            <a:ext cx="10566400" cy="3822700"/>
+            <a:off x="952500" y="762000"/>
+            <a:ext cx="10287000" cy="952500"/>
           </a:xfrm>
           <a:prstGeom prst="rect">
             <a:avLst/>
@@ -9208,117 +12889,191 @@
           </a:bodyPr>
           <a:lstStyle/>
           <a:p>
+            <a:pPr algn="l"/>
+            <a:r>
+              <a:rPr sz="1600" b="1" i="0">
+                <a:solidFill>
+                  <a:srgbClr val="141414"/>
+                </a:solidFill>
+                <a:latin typeface="Poppins"/>
+              </a:rPr>
+              <a:t>À INSÉRER DANS TON DECK</a:t>
+            </a:r>
+          </a:p>
+        </p:txBody>
+      </p:sp>
+      <p:sp>
+        <p:nvSpPr>
+          <p:cNvPr id="4" name="TextBox 3"/>
+          <p:cNvSpPr txBox="1"/>
+          <p:nvPr/>
+        </p:nvSpPr>
+        <p:spPr>
+          <a:xfrm>
+            <a:off x="952500" y="1587500"/>
+            <a:ext cx="10287000" cy="1397000"/>
+          </a:xfrm>
+          <a:prstGeom prst="rect">
+            <a:avLst/>
+          </a:prstGeom>
+          <a:noFill/>
+        </p:spPr>
+        <p:txBody>
+          <a:bodyPr wrap="square" lIns="0" rIns="0" tIns="0" bIns="0" anchor="t">
+            <a:spAutoFit/>
+          </a:bodyPr>
+          <a:lstStyle/>
+          <a:p>
             <a:pPr algn="l">
               <a:lnSpc>
-                <a:spcPct val="142000"/>
+                <a:spcPct val="106000"/>
+              </a:lnSpc>
+            </a:pPr>
+            <a:r>
+              <a:rPr sz="4200" b="1" i="1">
+                <a:solidFill>
+                  <a:srgbClr val="141414"/>
+                </a:solidFill>
+                <a:latin typeface="Archivo"/>
+              </a:rPr>
+              <a:t>SÉPARATEUR PARTIE 3</a:t>
+            </a:r>
+          </a:p>
+        </p:txBody>
+      </p:sp>
+      <p:sp>
+        <p:nvSpPr>
+          <p:cNvPr id="5" name="Rectangle 4"/>
+          <p:cNvSpPr/>
+          <p:nvPr/>
+        </p:nvSpPr>
+        <p:spPr>
+          <a:xfrm>
+            <a:off x="952500" y="3175000"/>
+            <a:ext cx="1651000" cy="50800"/>
+          </a:xfrm>
+          <a:prstGeom prst="rect">
+            <a:avLst/>
+          </a:prstGeom>
+          <a:solidFill>
+            <a:srgbClr val="141414"/>
+          </a:solidFill>
+          <a:ln>
+            <a:noFill/>
+          </a:ln>
+          <a:effectLst/>
+        </p:spPr>
+        <p:style>
+          <a:lnRef idx="1">
+            <a:schemeClr val="accent1"/>
+          </a:lnRef>
+          <a:fillRef idx="3">
+            <a:schemeClr val="accent1"/>
+          </a:fillRef>
+          <a:effectRef idx="2">
+            <a:schemeClr val="accent1"/>
+          </a:effectRef>
+          <a:fontRef idx="minor">
+            <a:schemeClr val="lt1"/>
+          </a:fontRef>
+        </p:style>
+        <p:txBody>
+          <a:bodyPr rtlCol="0" anchor="ctr"/>
+          <a:lstStyle/>
+          <a:p>
+            <a:pPr algn="ctr"/>
+          </a:p>
+        </p:txBody>
+      </p:sp>
+      <p:sp>
+        <p:nvSpPr>
+          <p:cNvPr id="6" name="TextBox 5"/>
+          <p:cNvSpPr txBox="1"/>
+          <p:nvPr/>
+        </p:nvSpPr>
+        <p:spPr>
+          <a:xfrm>
+            <a:off x="952500" y="3556000"/>
+            <a:ext cx="10287000" cy="2095500"/>
+          </a:xfrm>
+          <a:prstGeom prst="rect">
+            <a:avLst/>
+          </a:prstGeom>
+          <a:noFill/>
+        </p:spPr>
+        <p:txBody>
+          <a:bodyPr wrap="square" lIns="0" rIns="0" tIns="0" bIns="0" anchor="t">
+            <a:spAutoFit/>
+          </a:bodyPr>
+          <a:lstStyle/>
+          <a:p>
+            <a:pPr algn="l">
+              <a:spcAft>
+                <a:spcPts val="300"/>
+              </a:spcAft>
+            </a:pPr>
+            <a:r>
+              <a:rPr sz="1500" b="1" i="0">
+                <a:solidFill>
+                  <a:srgbClr val="141414"/>
+                </a:solidFill>
+                <a:latin typeface="Poppins"/>
+              </a:rPr>
+              <a:t>AVANT ta slide</a:t>
+            </a:r>
+          </a:p>
+          <a:p>
+            <a:pPr algn="l">
+              <a:lnSpc>
+                <a:spcPct val="134000"/>
               </a:lnSpc>
               <a:spcAft>
-                <a:spcPts val="600"/>
+                <a:spcPts val="1300"/>
               </a:spcAft>
             </a:pPr>
             <a:r>
-              <a:rPr sz="1600" b="0" i="0">
-                <a:solidFill>
-                  <a:srgbClr val="FFFFFF"/>
+              <a:rPr sz="1900" b="0" i="0">
+                <a:solidFill>
+                  <a:srgbClr val="141414"/>
                 </a:solidFill>
                 <a:latin typeface="Poppins"/>
               </a:rPr>
-              <a:t>1. La finalité → écris pour quoi tu fais ça, puis ouvre ton agenda</a:t>
-            </a:r>
-          </a:p>
-          <a:p>
-            <a:pPr algn="l">
-              <a:lnSpc>
-                <a:spcPct val="142000"/>
-              </a:lnSpc>
-              <a:spcAft>
-                <a:spcPts val="600"/>
-              </a:spcAft>
-            </a:pPr>
-            <a:r>
-              <a:rPr sz="1600" b="0" i="0">
-                <a:solidFill>
-                  <a:srgbClr val="FFFFFF"/>
+              <a:t>« CE QUI TE MANQUE N'EST PAS CE QUE TU CROIS »</a:t>
+            </a:r>
+          </a:p>
+        </p:txBody>
+      </p:sp>
+      <p:sp>
+        <p:nvSpPr>
+          <p:cNvPr id="7" name="TextBox 6"/>
+          <p:cNvSpPr txBox="1"/>
+          <p:nvPr/>
+        </p:nvSpPr>
+        <p:spPr>
+          <a:xfrm>
+            <a:off x="952500" y="5905500"/>
+            <a:ext cx="10287000" cy="444500"/>
+          </a:xfrm>
+          <a:prstGeom prst="rect">
+            <a:avLst/>
+          </a:prstGeom>
+          <a:noFill/>
+        </p:spPr>
+        <p:txBody>
+          <a:bodyPr wrap="square" lIns="0" rIns="0" tIns="0" bIns="0" anchor="t">
+            <a:spAutoFit/>
+          </a:bodyPr>
+          <a:lstStyle/>
+          <a:p>
+            <a:pPr algn="l"/>
+            <a:r>
+              <a:rPr sz="1400" b="0" i="1">
+                <a:solidFill>
+                  <a:srgbClr val="141414"/>
                 </a:solidFill>
                 <a:latin typeface="Poppins"/>
               </a:rPr>
-              <a:t>2. La mesure → une ligne non chiffrable, tout en haut du tableau de bord</a:t>
-            </a:r>
-          </a:p>
-          <a:p>
-            <a:pPr algn="l">
-              <a:lnSpc>
-                <a:spcPct val="142000"/>
-              </a:lnSpc>
-              <a:spcAft>
-                <a:spcPts val="600"/>
-              </a:spcAft>
-            </a:pPr>
-            <a:r>
-              <a:rPr sz="1600" b="0" i="0">
-                <a:solidFill>
-                  <a:srgbClr val="FFFFFF"/>
-                </a:solidFill>
-                <a:latin typeface="Poppins"/>
-              </a:rPr>
-              <a:t>3. Le profit et le risque → qui perd quoi, si ça tourne mal ?</a:t>
-            </a:r>
-          </a:p>
-          <a:p>
-            <a:pPr algn="l">
-              <a:lnSpc>
-                <a:spcPct val="142000"/>
-              </a:lnSpc>
-              <a:spcAft>
-                <a:spcPts val="600"/>
-              </a:spcAft>
-            </a:pPr>
-            <a:r>
-              <a:rPr sz="1600" b="0" i="0">
-                <a:solidFill>
-                  <a:srgbClr val="FFFFFF"/>
-                </a:solidFill>
-                <a:latin typeface="Poppins"/>
-              </a:rPr>
-              <a:t>4. La croissance et la dette → ce rythme, je le tiens encore dans deux ans ?</a:t>
-            </a:r>
-          </a:p>
-          <a:p>
-            <a:pPr algn="l">
-              <a:lnSpc>
-                <a:spcPct val="142000"/>
-              </a:lnSpc>
-              <a:spcAft>
-                <a:spcPts val="600"/>
-              </a:spcAft>
-            </a:pPr>
-            <a:r>
-              <a:rPr sz="1600" b="0" i="0">
-                <a:solidFill>
-                  <a:srgbClr val="FFFFFF"/>
-                </a:solidFill>
-                <a:latin typeface="Poppins"/>
-              </a:rPr>
-              <a:t>5. La concurrence → recommande un concurrent, publiquement</a:t>
-            </a:r>
-          </a:p>
-          <a:p>
-            <a:pPr algn="l">
-              <a:lnSpc>
-                <a:spcPct val="142000"/>
-              </a:lnSpc>
-              <a:spcAft>
-                <a:spcPts val="600"/>
-              </a:spcAft>
-            </a:pPr>
-            <a:r>
-              <a:rPr sz="1600" b="0" i="0">
-                <a:solidFill>
-                  <a:srgbClr val="FFFFFF"/>
-                </a:solidFill>
-                <a:latin typeface="Poppins"/>
-              </a:rPr>
-              <a:t>6. Le client et l'effet → qu'est-ce que j'installe chez mes clients ?</a:t>
+              <a:t>Les 1 slides qui suivent forment ce bloc. Cette page-ci ne va pas dans le deck.</a:t>
             </a:r>
           </a:p>
         </p:txBody>
